--- a/assets/slides/GAMS code, modules & realizations.pptx
+++ b/assets/slides/GAMS code, modules & realizations.pptx
@@ -1,14 +1,14 @@
 
 <file path=ppt/presentation.xml><?xml version="1.0" encoding="utf-8"?>
-<p:presentation xmlns:a="http://schemas.openxmlformats.org/drawingml/2006/main" xmlns:r="http://schemas.openxmlformats.org/officeDocument/2006/relationships" xmlns:p="http://schemas.openxmlformats.org/presentationml/2006/main" saveSubsetFonts="1">
+<p:presentation xmlns:a="http://schemas.openxmlformats.org/drawingml/2006/main" xmlns:r="http://schemas.openxmlformats.org/officeDocument/2006/relationships" xmlns:p="http://schemas.openxmlformats.org/presentationml/2006/main" showSpecialPlsOnTitleSld="0" saveSubsetFonts="1">
   <p:sldMasterIdLst>
     <p:sldMasterId id="2147483648" r:id="rId1"/>
   </p:sldMasterIdLst>
   <p:notesMasterIdLst>
-    <p:notesMasterId r:id="rId14"/>
+    <p:notesMasterId r:id="rId15"/>
   </p:notesMasterIdLst>
   <p:handoutMasterIdLst>
-    <p:handoutMasterId r:id="rId15"/>
+    <p:handoutMasterId r:id="rId16"/>
   </p:handoutMasterIdLst>
   <p:sldIdLst>
     <p:sldId id="268" r:id="rId2"/>
@@ -21,8 +21,9 @@
     <p:sldId id="279" r:id="rId9"/>
     <p:sldId id="280" r:id="rId10"/>
     <p:sldId id="278" r:id="rId11"/>
-    <p:sldId id="281" r:id="rId12"/>
-    <p:sldId id="264" r:id="rId13"/>
+    <p:sldId id="282" r:id="rId12"/>
+    <p:sldId id="281" r:id="rId13"/>
+    <p:sldId id="264" r:id="rId14"/>
   </p:sldIdLst>
   <p:sldSz cx="12192000" cy="6858000"/>
   <p:notesSz cx="6888163" cy="10020300"/>
@@ -226,7 +227,7 @@
           <a:p>
             <a:fld id="{FF82B2F4-7748-42CC-9666-B2A9A5CB98C2}" type="datetimeFigureOut">
               <a:rPr lang="en-DE" smtClean="0"/>
-              <a:t>14 Jun 2025</a:t>
+              <a:t>12 Jun 2026</a:t>
             </a:fld>
             <a:endParaRPr lang="en-DE"/>
           </a:p>
@@ -362,7 +363,7 @@
           <a:p>
             <a:fld id="{68F8FAD1-4573-4756-A12F-73F1310CA974}" type="datetimeFigureOut">
               <a:rPr lang="en-DE" smtClean="0"/>
-              <a:t>14 Jun 2025</a:t>
+              <a:t>12 Jun 2026</a:t>
             </a:fld>
             <a:endParaRPr lang="en-DE"/>
           </a:p>
@@ -674,7 +675,7 @@
           <a:bodyPr/>
           <a:lstStyle/>
           <a:p>
-            <a:endParaRPr lang="en-DE" dirty="0"/>
+            <a:endParaRPr lang="en-DE"/>
           </a:p>
         </p:txBody>
       </p:sp>
@@ -695,7 +696,7 @@
           <a:p>
             <a:fld id="{9200DD5E-38F3-4021-BB8A-F5D2D445ACDA}" type="slidenum">
               <a:rPr lang="en-DE" smtClean="0"/>
-              <a:t>3</a:t>
+              <a:t>1</a:t>
             </a:fld>
             <a:endParaRPr lang="en-DE"/>
           </a:p>
@@ -704,7 +705,343 @@
     </p:spTree>
     <p:extLst>
       <p:ext uri="{BB962C8B-B14F-4D97-AF65-F5344CB8AC3E}">
-        <p14:creationId xmlns:p14="http://schemas.microsoft.com/office/powerpoint/2010/main" val="3535760707"/>
+        <p14:creationId xmlns:p14="http://schemas.microsoft.com/office/powerpoint/2010/main" val="2909232684"/>
+      </p:ext>
+    </p:extLst>
+  </p:cSld>
+  <p:clrMapOvr>
+    <a:masterClrMapping/>
+  </p:clrMapOvr>
+</p:notes>
+</file>
+
+<file path=ppt/notesSlides/notesSlide10.xml><?xml version="1.0" encoding="utf-8"?>
+<p:notes xmlns:a="http://schemas.openxmlformats.org/drawingml/2006/main" xmlns:r="http://schemas.openxmlformats.org/officeDocument/2006/relationships" xmlns:p="http://schemas.openxmlformats.org/presentationml/2006/main">
+  <p:cSld>
+    <p:spTree>
+      <p:nvGrpSpPr>
+        <p:cNvPr id="1" name=""/>
+        <p:cNvGrpSpPr/>
+        <p:nvPr/>
+      </p:nvGrpSpPr>
+      <p:grpSpPr>
+        <a:xfrm>
+          <a:off x="0" y="0"/>
+          <a:ext cx="0" cy="0"/>
+          <a:chOff x="0" y="0"/>
+          <a:chExt cx="0" cy="0"/>
+        </a:xfrm>
+      </p:grpSpPr>
+      <p:sp>
+        <p:nvSpPr>
+          <p:cNvPr id="2" name="Slide Image Placeholder 1"/>
+          <p:cNvSpPr>
+            <a:spLocks noGrp="1" noRot="1" noChangeAspect="1"/>
+          </p:cNvSpPr>
+          <p:nvPr>
+            <p:ph type="sldImg"/>
+          </p:nvPr>
+        </p:nvSpPr>
+        <p:spPr/>
+      </p:sp>
+      <p:sp>
+        <p:nvSpPr>
+          <p:cNvPr id="3" name="Notes Placeholder 2"/>
+          <p:cNvSpPr>
+            <a:spLocks noGrp="1"/>
+          </p:cNvSpPr>
+          <p:nvPr>
+            <p:ph type="body" idx="1"/>
+          </p:nvPr>
+        </p:nvSpPr>
+        <p:spPr/>
+        <p:txBody>
+          <a:bodyPr/>
+          <a:lstStyle/>
+          <a:p>
+            <a:endParaRPr lang="en-DE"/>
+          </a:p>
+        </p:txBody>
+      </p:sp>
+      <p:sp>
+        <p:nvSpPr>
+          <p:cNvPr id="4" name="Slide Number Placeholder 3"/>
+          <p:cNvSpPr>
+            <a:spLocks noGrp="1"/>
+          </p:cNvSpPr>
+          <p:nvPr>
+            <p:ph type="sldNum" sz="quarter" idx="5"/>
+          </p:nvPr>
+        </p:nvSpPr>
+        <p:spPr/>
+        <p:txBody>
+          <a:bodyPr/>
+          <a:lstStyle/>
+          <a:p>
+            <a:fld id="{9200DD5E-38F3-4021-BB8A-F5D2D445ACDA}" type="slidenum">
+              <a:rPr lang="en-DE" smtClean="0"/>
+              <a:t>10</a:t>
+            </a:fld>
+            <a:endParaRPr lang="en-DE"/>
+          </a:p>
+        </p:txBody>
+      </p:sp>
+    </p:spTree>
+    <p:extLst>
+      <p:ext uri="{BB962C8B-B14F-4D97-AF65-F5344CB8AC3E}">
+        <p14:creationId xmlns:p14="http://schemas.microsoft.com/office/powerpoint/2010/main" val="1041549961"/>
+      </p:ext>
+    </p:extLst>
+  </p:cSld>
+  <p:clrMapOvr>
+    <a:masterClrMapping/>
+  </p:clrMapOvr>
+</p:notes>
+</file>
+
+<file path=ppt/notesSlides/notesSlide11.xml><?xml version="1.0" encoding="utf-8"?>
+<p:notes xmlns:a="http://schemas.openxmlformats.org/drawingml/2006/main" xmlns:r="http://schemas.openxmlformats.org/officeDocument/2006/relationships" xmlns:p="http://schemas.openxmlformats.org/presentationml/2006/main">
+  <p:cSld>
+    <p:spTree>
+      <p:nvGrpSpPr>
+        <p:cNvPr id="1" name=""/>
+        <p:cNvGrpSpPr/>
+        <p:nvPr/>
+      </p:nvGrpSpPr>
+      <p:grpSpPr>
+        <a:xfrm>
+          <a:off x="0" y="0"/>
+          <a:ext cx="0" cy="0"/>
+          <a:chOff x="0" y="0"/>
+          <a:chExt cx="0" cy="0"/>
+        </a:xfrm>
+      </p:grpSpPr>
+      <p:sp>
+        <p:nvSpPr>
+          <p:cNvPr id="2" name="Slide Image Placeholder 1"/>
+          <p:cNvSpPr>
+            <a:spLocks noGrp="1" noRot="1" noChangeAspect="1"/>
+          </p:cNvSpPr>
+          <p:nvPr>
+            <p:ph type="sldImg"/>
+          </p:nvPr>
+        </p:nvSpPr>
+        <p:spPr/>
+      </p:sp>
+      <p:sp>
+        <p:nvSpPr>
+          <p:cNvPr id="3" name="Notes Placeholder 2"/>
+          <p:cNvSpPr>
+            <a:spLocks noGrp="1"/>
+          </p:cNvSpPr>
+          <p:nvPr>
+            <p:ph type="body" idx="1"/>
+          </p:nvPr>
+        </p:nvSpPr>
+        <p:spPr/>
+        <p:txBody>
+          <a:bodyPr/>
+          <a:lstStyle/>
+          <a:p>
+            <a:endParaRPr lang="en-DE" dirty="0"/>
+          </a:p>
+        </p:txBody>
+      </p:sp>
+      <p:sp>
+        <p:nvSpPr>
+          <p:cNvPr id="4" name="Slide Number Placeholder 3"/>
+          <p:cNvSpPr>
+            <a:spLocks noGrp="1"/>
+          </p:cNvSpPr>
+          <p:nvPr>
+            <p:ph type="sldNum" sz="quarter" idx="5"/>
+          </p:nvPr>
+        </p:nvSpPr>
+        <p:spPr/>
+        <p:txBody>
+          <a:bodyPr/>
+          <a:lstStyle/>
+          <a:p>
+            <a:fld id="{9200DD5E-38F3-4021-BB8A-F5D2D445ACDA}" type="slidenum">
+              <a:rPr lang="en-DE" smtClean="0"/>
+              <a:t>11</a:t>
+            </a:fld>
+            <a:endParaRPr lang="en-DE"/>
+          </a:p>
+        </p:txBody>
+      </p:sp>
+    </p:spTree>
+    <p:extLst>
+      <p:ext uri="{BB962C8B-B14F-4D97-AF65-F5344CB8AC3E}">
+        <p14:creationId xmlns:p14="http://schemas.microsoft.com/office/powerpoint/2010/main" val="2616984001"/>
+      </p:ext>
+    </p:extLst>
+  </p:cSld>
+  <p:clrMapOvr>
+    <a:masterClrMapping/>
+  </p:clrMapOvr>
+</p:notes>
+</file>
+
+<file path=ppt/notesSlides/notesSlide12.xml><?xml version="1.0" encoding="utf-8"?>
+<p:notes xmlns:a="http://schemas.openxmlformats.org/drawingml/2006/main" xmlns:r="http://schemas.openxmlformats.org/officeDocument/2006/relationships" xmlns:p="http://schemas.openxmlformats.org/presentationml/2006/main">
+  <p:cSld>
+    <p:spTree>
+      <p:nvGrpSpPr>
+        <p:cNvPr id="1" name=""/>
+        <p:cNvGrpSpPr/>
+        <p:nvPr/>
+      </p:nvGrpSpPr>
+      <p:grpSpPr>
+        <a:xfrm>
+          <a:off x="0" y="0"/>
+          <a:ext cx="0" cy="0"/>
+          <a:chOff x="0" y="0"/>
+          <a:chExt cx="0" cy="0"/>
+        </a:xfrm>
+      </p:grpSpPr>
+      <p:sp>
+        <p:nvSpPr>
+          <p:cNvPr id="2" name="Slide Image Placeholder 1"/>
+          <p:cNvSpPr>
+            <a:spLocks noGrp="1" noRot="1" noChangeAspect="1"/>
+          </p:cNvSpPr>
+          <p:nvPr>
+            <p:ph type="sldImg"/>
+          </p:nvPr>
+        </p:nvSpPr>
+        <p:spPr/>
+      </p:sp>
+      <p:sp>
+        <p:nvSpPr>
+          <p:cNvPr id="3" name="Notes Placeholder 2"/>
+          <p:cNvSpPr>
+            <a:spLocks noGrp="1"/>
+          </p:cNvSpPr>
+          <p:nvPr>
+            <p:ph type="body" idx="1"/>
+          </p:nvPr>
+        </p:nvSpPr>
+        <p:spPr/>
+        <p:txBody>
+          <a:bodyPr/>
+          <a:lstStyle/>
+          <a:p>
+            <a:endParaRPr lang="en-DE"/>
+          </a:p>
+        </p:txBody>
+      </p:sp>
+      <p:sp>
+        <p:nvSpPr>
+          <p:cNvPr id="4" name="Slide Number Placeholder 3"/>
+          <p:cNvSpPr>
+            <a:spLocks noGrp="1"/>
+          </p:cNvSpPr>
+          <p:nvPr>
+            <p:ph type="sldNum" sz="quarter" idx="5"/>
+          </p:nvPr>
+        </p:nvSpPr>
+        <p:spPr/>
+        <p:txBody>
+          <a:bodyPr/>
+          <a:lstStyle/>
+          <a:p>
+            <a:fld id="{9200DD5E-38F3-4021-BB8A-F5D2D445ACDA}" type="slidenum">
+              <a:rPr lang="en-DE" smtClean="0"/>
+              <a:t>12</a:t>
+            </a:fld>
+            <a:endParaRPr lang="en-DE"/>
+          </a:p>
+        </p:txBody>
+      </p:sp>
+    </p:spTree>
+    <p:extLst>
+      <p:ext uri="{BB962C8B-B14F-4D97-AF65-F5344CB8AC3E}">
+        <p14:creationId xmlns:p14="http://schemas.microsoft.com/office/powerpoint/2010/main" val="1824188213"/>
+      </p:ext>
+    </p:extLst>
+  </p:cSld>
+  <p:clrMapOvr>
+    <a:masterClrMapping/>
+  </p:clrMapOvr>
+</p:notes>
+</file>
+
+<file path=ppt/notesSlides/notesSlide13.xml><?xml version="1.0" encoding="utf-8"?>
+<p:notes xmlns:a="http://schemas.openxmlformats.org/drawingml/2006/main" xmlns:r="http://schemas.openxmlformats.org/officeDocument/2006/relationships" xmlns:p="http://schemas.openxmlformats.org/presentationml/2006/main">
+  <p:cSld>
+    <p:spTree>
+      <p:nvGrpSpPr>
+        <p:cNvPr id="1" name=""/>
+        <p:cNvGrpSpPr/>
+        <p:nvPr/>
+      </p:nvGrpSpPr>
+      <p:grpSpPr>
+        <a:xfrm>
+          <a:off x="0" y="0"/>
+          <a:ext cx="0" cy="0"/>
+          <a:chOff x="0" y="0"/>
+          <a:chExt cx="0" cy="0"/>
+        </a:xfrm>
+      </p:grpSpPr>
+      <p:sp>
+        <p:nvSpPr>
+          <p:cNvPr id="2" name="Slide Image Placeholder 1"/>
+          <p:cNvSpPr>
+            <a:spLocks noGrp="1" noRot="1" noChangeAspect="1"/>
+          </p:cNvSpPr>
+          <p:nvPr>
+            <p:ph type="sldImg"/>
+          </p:nvPr>
+        </p:nvSpPr>
+        <p:spPr/>
+      </p:sp>
+      <p:sp>
+        <p:nvSpPr>
+          <p:cNvPr id="3" name="Notes Placeholder 2"/>
+          <p:cNvSpPr>
+            <a:spLocks noGrp="1"/>
+          </p:cNvSpPr>
+          <p:nvPr>
+            <p:ph type="body" idx="1"/>
+          </p:nvPr>
+        </p:nvSpPr>
+        <p:spPr/>
+        <p:txBody>
+          <a:bodyPr/>
+          <a:lstStyle/>
+          <a:p>
+            <a:endParaRPr lang="en-DE"/>
+          </a:p>
+        </p:txBody>
+      </p:sp>
+      <p:sp>
+        <p:nvSpPr>
+          <p:cNvPr id="4" name="Slide Number Placeholder 3"/>
+          <p:cNvSpPr>
+            <a:spLocks noGrp="1"/>
+          </p:cNvSpPr>
+          <p:nvPr>
+            <p:ph type="sldNum" sz="quarter" idx="5"/>
+          </p:nvPr>
+        </p:nvSpPr>
+        <p:spPr/>
+        <p:txBody>
+          <a:bodyPr/>
+          <a:lstStyle/>
+          <a:p>
+            <a:fld id="{9200DD5E-38F3-4021-BB8A-F5D2D445ACDA}" type="slidenum">
+              <a:rPr lang="en-DE" smtClean="0"/>
+              <a:t>13</a:t>
+            </a:fld>
+            <a:endParaRPr lang="en-DE"/>
+          </a:p>
+        </p:txBody>
+      </p:sp>
+    </p:spTree>
+    <p:extLst>
+      <p:ext uri="{BB962C8B-B14F-4D97-AF65-F5344CB8AC3E}">
+        <p14:creationId xmlns:p14="http://schemas.microsoft.com/office/powerpoint/2010/main" val="318081203"/>
       </p:ext>
     </p:extLst>
   </p:cSld>
@@ -758,7 +1095,7 @@
           <a:bodyPr/>
           <a:lstStyle/>
           <a:p>
-            <a:endParaRPr lang="en-DE" dirty="0"/>
+            <a:endParaRPr lang="en-DE"/>
           </a:p>
         </p:txBody>
       </p:sp>
@@ -779,7 +1116,7 @@
           <a:p>
             <a:fld id="{9200DD5E-38F3-4021-BB8A-F5D2D445ACDA}" type="slidenum">
               <a:rPr lang="en-DE" smtClean="0"/>
-              <a:t>4</a:t>
+              <a:t>2</a:t>
             </a:fld>
             <a:endParaRPr lang="en-DE"/>
           </a:p>
@@ -788,7 +1125,7 @@
     </p:spTree>
     <p:extLst>
       <p:ext uri="{BB962C8B-B14F-4D97-AF65-F5344CB8AC3E}">
-        <p14:creationId xmlns:p14="http://schemas.microsoft.com/office/powerpoint/2010/main" val="3673071180"/>
+        <p14:creationId xmlns:p14="http://schemas.microsoft.com/office/powerpoint/2010/main" val="3233180128"/>
       </p:ext>
     </p:extLst>
   </p:cSld>
@@ -863,7 +1200,7 @@
           <a:p>
             <a:fld id="{9200DD5E-38F3-4021-BB8A-F5D2D445ACDA}" type="slidenum">
               <a:rPr lang="en-DE" smtClean="0"/>
-              <a:t>5</a:t>
+              <a:t>3</a:t>
             </a:fld>
             <a:endParaRPr lang="en-DE"/>
           </a:p>
@@ -872,7 +1209,7 @@
     </p:spTree>
     <p:extLst>
       <p:ext uri="{BB962C8B-B14F-4D97-AF65-F5344CB8AC3E}">
-        <p14:creationId xmlns:p14="http://schemas.microsoft.com/office/powerpoint/2010/main" val="246968943"/>
+        <p14:creationId xmlns:p14="http://schemas.microsoft.com/office/powerpoint/2010/main" val="3535760707"/>
       </p:ext>
     </p:extLst>
   </p:cSld>
@@ -947,7 +1284,7 @@
           <a:p>
             <a:fld id="{9200DD5E-38F3-4021-BB8A-F5D2D445ACDA}" type="slidenum">
               <a:rPr lang="en-DE" smtClean="0"/>
-              <a:t>6</a:t>
+              <a:t>4</a:t>
             </a:fld>
             <a:endParaRPr lang="en-DE"/>
           </a:p>
@@ -956,7 +1293,7 @@
     </p:spTree>
     <p:extLst>
       <p:ext uri="{BB962C8B-B14F-4D97-AF65-F5344CB8AC3E}">
-        <p14:creationId xmlns:p14="http://schemas.microsoft.com/office/powerpoint/2010/main" val="4004977166"/>
+        <p14:creationId xmlns:p14="http://schemas.microsoft.com/office/powerpoint/2010/main" val="3673071180"/>
       </p:ext>
     </p:extLst>
   </p:cSld>
@@ -1031,6 +1368,174 @@
           <a:p>
             <a:fld id="{9200DD5E-38F3-4021-BB8A-F5D2D445ACDA}" type="slidenum">
               <a:rPr lang="en-DE" smtClean="0"/>
+              <a:t>5</a:t>
+            </a:fld>
+            <a:endParaRPr lang="en-DE"/>
+          </a:p>
+        </p:txBody>
+      </p:sp>
+    </p:spTree>
+    <p:extLst>
+      <p:ext uri="{BB962C8B-B14F-4D97-AF65-F5344CB8AC3E}">
+        <p14:creationId xmlns:p14="http://schemas.microsoft.com/office/powerpoint/2010/main" val="246968943"/>
+      </p:ext>
+    </p:extLst>
+  </p:cSld>
+  <p:clrMapOvr>
+    <a:masterClrMapping/>
+  </p:clrMapOvr>
+</p:notes>
+</file>
+
+<file path=ppt/notesSlides/notesSlide6.xml><?xml version="1.0" encoding="utf-8"?>
+<p:notes xmlns:a="http://schemas.openxmlformats.org/drawingml/2006/main" xmlns:r="http://schemas.openxmlformats.org/officeDocument/2006/relationships" xmlns:p="http://schemas.openxmlformats.org/presentationml/2006/main">
+  <p:cSld>
+    <p:spTree>
+      <p:nvGrpSpPr>
+        <p:cNvPr id="1" name=""/>
+        <p:cNvGrpSpPr/>
+        <p:nvPr/>
+      </p:nvGrpSpPr>
+      <p:grpSpPr>
+        <a:xfrm>
+          <a:off x="0" y="0"/>
+          <a:ext cx="0" cy="0"/>
+          <a:chOff x="0" y="0"/>
+          <a:chExt cx="0" cy="0"/>
+        </a:xfrm>
+      </p:grpSpPr>
+      <p:sp>
+        <p:nvSpPr>
+          <p:cNvPr id="2" name="Slide Image Placeholder 1"/>
+          <p:cNvSpPr>
+            <a:spLocks noGrp="1" noRot="1" noChangeAspect="1"/>
+          </p:cNvSpPr>
+          <p:nvPr>
+            <p:ph type="sldImg"/>
+          </p:nvPr>
+        </p:nvSpPr>
+        <p:spPr/>
+      </p:sp>
+      <p:sp>
+        <p:nvSpPr>
+          <p:cNvPr id="3" name="Notes Placeholder 2"/>
+          <p:cNvSpPr>
+            <a:spLocks noGrp="1"/>
+          </p:cNvSpPr>
+          <p:nvPr>
+            <p:ph type="body" idx="1"/>
+          </p:nvPr>
+        </p:nvSpPr>
+        <p:spPr/>
+        <p:txBody>
+          <a:bodyPr/>
+          <a:lstStyle/>
+          <a:p>
+            <a:endParaRPr lang="en-DE" dirty="0"/>
+          </a:p>
+        </p:txBody>
+      </p:sp>
+      <p:sp>
+        <p:nvSpPr>
+          <p:cNvPr id="4" name="Slide Number Placeholder 3"/>
+          <p:cNvSpPr>
+            <a:spLocks noGrp="1"/>
+          </p:cNvSpPr>
+          <p:nvPr>
+            <p:ph type="sldNum" sz="quarter" idx="5"/>
+          </p:nvPr>
+        </p:nvSpPr>
+        <p:spPr/>
+        <p:txBody>
+          <a:bodyPr/>
+          <a:lstStyle/>
+          <a:p>
+            <a:fld id="{9200DD5E-38F3-4021-BB8A-F5D2D445ACDA}" type="slidenum">
+              <a:rPr lang="en-DE" smtClean="0"/>
+              <a:t>6</a:t>
+            </a:fld>
+            <a:endParaRPr lang="en-DE"/>
+          </a:p>
+        </p:txBody>
+      </p:sp>
+    </p:spTree>
+    <p:extLst>
+      <p:ext uri="{BB962C8B-B14F-4D97-AF65-F5344CB8AC3E}">
+        <p14:creationId xmlns:p14="http://schemas.microsoft.com/office/powerpoint/2010/main" val="557573218"/>
+      </p:ext>
+    </p:extLst>
+  </p:cSld>
+  <p:clrMapOvr>
+    <a:masterClrMapping/>
+  </p:clrMapOvr>
+</p:notes>
+</file>
+
+<file path=ppt/notesSlides/notesSlide7.xml><?xml version="1.0" encoding="utf-8"?>
+<p:notes xmlns:a="http://schemas.openxmlformats.org/drawingml/2006/main" xmlns:r="http://schemas.openxmlformats.org/officeDocument/2006/relationships" xmlns:p="http://schemas.openxmlformats.org/presentationml/2006/main">
+  <p:cSld>
+    <p:spTree>
+      <p:nvGrpSpPr>
+        <p:cNvPr id="1" name=""/>
+        <p:cNvGrpSpPr/>
+        <p:nvPr/>
+      </p:nvGrpSpPr>
+      <p:grpSpPr>
+        <a:xfrm>
+          <a:off x="0" y="0"/>
+          <a:ext cx="0" cy="0"/>
+          <a:chOff x="0" y="0"/>
+          <a:chExt cx="0" cy="0"/>
+        </a:xfrm>
+      </p:grpSpPr>
+      <p:sp>
+        <p:nvSpPr>
+          <p:cNvPr id="2" name="Slide Image Placeholder 1"/>
+          <p:cNvSpPr>
+            <a:spLocks noGrp="1" noRot="1" noChangeAspect="1"/>
+          </p:cNvSpPr>
+          <p:nvPr>
+            <p:ph type="sldImg"/>
+          </p:nvPr>
+        </p:nvSpPr>
+        <p:spPr/>
+      </p:sp>
+      <p:sp>
+        <p:nvSpPr>
+          <p:cNvPr id="3" name="Notes Placeholder 2"/>
+          <p:cNvSpPr>
+            <a:spLocks noGrp="1"/>
+          </p:cNvSpPr>
+          <p:nvPr>
+            <p:ph type="body" idx="1"/>
+          </p:nvPr>
+        </p:nvSpPr>
+        <p:spPr/>
+        <p:txBody>
+          <a:bodyPr/>
+          <a:lstStyle/>
+          <a:p>
+            <a:endParaRPr lang="en-DE" dirty="0"/>
+          </a:p>
+        </p:txBody>
+      </p:sp>
+      <p:sp>
+        <p:nvSpPr>
+          <p:cNvPr id="4" name="Slide Number Placeholder 3"/>
+          <p:cNvSpPr>
+            <a:spLocks noGrp="1"/>
+          </p:cNvSpPr>
+          <p:nvPr>
+            <p:ph type="sldNum" sz="quarter" idx="5"/>
+          </p:nvPr>
+        </p:nvSpPr>
+        <p:spPr/>
+        <p:txBody>
+          <a:bodyPr/>
+          <a:lstStyle/>
+          <a:p>
+            <a:fld id="{9200DD5E-38F3-4021-BB8A-F5D2D445ACDA}" type="slidenum">
+              <a:rPr lang="en-DE" smtClean="0"/>
               <a:t>7</a:t>
             </a:fld>
             <a:endParaRPr lang="en-DE"/>
@@ -1041,6 +1546,174 @@
     <p:extLst>
       <p:ext uri="{BB962C8B-B14F-4D97-AF65-F5344CB8AC3E}">
         <p14:creationId xmlns:p14="http://schemas.microsoft.com/office/powerpoint/2010/main" val="2566245906"/>
+      </p:ext>
+    </p:extLst>
+  </p:cSld>
+  <p:clrMapOvr>
+    <a:masterClrMapping/>
+  </p:clrMapOvr>
+</p:notes>
+</file>
+
+<file path=ppt/notesSlides/notesSlide8.xml><?xml version="1.0" encoding="utf-8"?>
+<p:notes xmlns:a="http://schemas.openxmlformats.org/drawingml/2006/main" xmlns:r="http://schemas.openxmlformats.org/officeDocument/2006/relationships" xmlns:p="http://schemas.openxmlformats.org/presentationml/2006/main">
+  <p:cSld>
+    <p:spTree>
+      <p:nvGrpSpPr>
+        <p:cNvPr id="1" name=""/>
+        <p:cNvGrpSpPr/>
+        <p:nvPr/>
+      </p:nvGrpSpPr>
+      <p:grpSpPr>
+        <a:xfrm>
+          <a:off x="0" y="0"/>
+          <a:ext cx="0" cy="0"/>
+          <a:chOff x="0" y="0"/>
+          <a:chExt cx="0" cy="0"/>
+        </a:xfrm>
+      </p:grpSpPr>
+      <p:sp>
+        <p:nvSpPr>
+          <p:cNvPr id="2" name="Slide Image Placeholder 1"/>
+          <p:cNvSpPr>
+            <a:spLocks noGrp="1" noRot="1" noChangeAspect="1"/>
+          </p:cNvSpPr>
+          <p:nvPr>
+            <p:ph type="sldImg"/>
+          </p:nvPr>
+        </p:nvSpPr>
+        <p:spPr/>
+      </p:sp>
+      <p:sp>
+        <p:nvSpPr>
+          <p:cNvPr id="3" name="Notes Placeholder 2"/>
+          <p:cNvSpPr>
+            <a:spLocks noGrp="1"/>
+          </p:cNvSpPr>
+          <p:nvPr>
+            <p:ph type="body" idx="1"/>
+          </p:nvPr>
+        </p:nvSpPr>
+        <p:spPr/>
+        <p:txBody>
+          <a:bodyPr/>
+          <a:lstStyle/>
+          <a:p>
+            <a:endParaRPr lang="en-DE"/>
+          </a:p>
+        </p:txBody>
+      </p:sp>
+      <p:sp>
+        <p:nvSpPr>
+          <p:cNvPr id="4" name="Slide Number Placeholder 3"/>
+          <p:cNvSpPr>
+            <a:spLocks noGrp="1"/>
+          </p:cNvSpPr>
+          <p:nvPr>
+            <p:ph type="sldNum" sz="quarter" idx="5"/>
+          </p:nvPr>
+        </p:nvSpPr>
+        <p:spPr/>
+        <p:txBody>
+          <a:bodyPr/>
+          <a:lstStyle/>
+          <a:p>
+            <a:fld id="{9200DD5E-38F3-4021-BB8A-F5D2D445ACDA}" type="slidenum">
+              <a:rPr lang="en-DE" smtClean="0"/>
+              <a:t>8</a:t>
+            </a:fld>
+            <a:endParaRPr lang="en-DE"/>
+          </a:p>
+        </p:txBody>
+      </p:sp>
+    </p:spTree>
+    <p:extLst>
+      <p:ext uri="{BB962C8B-B14F-4D97-AF65-F5344CB8AC3E}">
+        <p14:creationId xmlns:p14="http://schemas.microsoft.com/office/powerpoint/2010/main" val="1159666407"/>
+      </p:ext>
+    </p:extLst>
+  </p:cSld>
+  <p:clrMapOvr>
+    <a:masterClrMapping/>
+  </p:clrMapOvr>
+</p:notes>
+</file>
+
+<file path=ppt/notesSlides/notesSlide9.xml><?xml version="1.0" encoding="utf-8"?>
+<p:notes xmlns:a="http://schemas.openxmlformats.org/drawingml/2006/main" xmlns:r="http://schemas.openxmlformats.org/officeDocument/2006/relationships" xmlns:p="http://schemas.openxmlformats.org/presentationml/2006/main">
+  <p:cSld>
+    <p:spTree>
+      <p:nvGrpSpPr>
+        <p:cNvPr id="1" name=""/>
+        <p:cNvGrpSpPr/>
+        <p:nvPr/>
+      </p:nvGrpSpPr>
+      <p:grpSpPr>
+        <a:xfrm>
+          <a:off x="0" y="0"/>
+          <a:ext cx="0" cy="0"/>
+          <a:chOff x="0" y="0"/>
+          <a:chExt cx="0" cy="0"/>
+        </a:xfrm>
+      </p:grpSpPr>
+      <p:sp>
+        <p:nvSpPr>
+          <p:cNvPr id="2" name="Slide Image Placeholder 1"/>
+          <p:cNvSpPr>
+            <a:spLocks noGrp="1" noRot="1" noChangeAspect="1"/>
+          </p:cNvSpPr>
+          <p:nvPr>
+            <p:ph type="sldImg"/>
+          </p:nvPr>
+        </p:nvSpPr>
+        <p:spPr/>
+      </p:sp>
+      <p:sp>
+        <p:nvSpPr>
+          <p:cNvPr id="3" name="Notes Placeholder 2"/>
+          <p:cNvSpPr>
+            <a:spLocks noGrp="1"/>
+          </p:cNvSpPr>
+          <p:nvPr>
+            <p:ph type="body" idx="1"/>
+          </p:nvPr>
+        </p:nvSpPr>
+        <p:spPr/>
+        <p:txBody>
+          <a:bodyPr/>
+          <a:lstStyle/>
+          <a:p>
+            <a:endParaRPr lang="en-DE"/>
+          </a:p>
+        </p:txBody>
+      </p:sp>
+      <p:sp>
+        <p:nvSpPr>
+          <p:cNvPr id="4" name="Slide Number Placeholder 3"/>
+          <p:cNvSpPr>
+            <a:spLocks noGrp="1"/>
+          </p:cNvSpPr>
+          <p:nvPr>
+            <p:ph type="sldNum" sz="quarter" idx="5"/>
+          </p:nvPr>
+        </p:nvSpPr>
+        <p:spPr/>
+        <p:txBody>
+          <a:bodyPr/>
+          <a:lstStyle/>
+          <a:p>
+            <a:fld id="{9200DD5E-38F3-4021-BB8A-F5D2D445ACDA}" type="slidenum">
+              <a:rPr lang="en-DE" smtClean="0"/>
+              <a:t>9</a:t>
+            </a:fld>
+            <a:endParaRPr lang="en-DE"/>
+          </a:p>
+        </p:txBody>
+      </p:sp>
+    </p:spTree>
+    <p:extLst>
+      <p:ext uri="{BB962C8B-B14F-4D97-AF65-F5344CB8AC3E}">
+        <p14:creationId xmlns:p14="http://schemas.microsoft.com/office/powerpoint/2010/main" val="1705868777"/>
       </p:ext>
     </p:extLst>
   </p:cSld>
@@ -1199,8 +1872,9 @@
           <a:p>
             <a:r>
               <a:rPr lang="en-DE"/>
-              <a:t>16.06.2025</a:t>
-            </a:r>
+              <a:t>16.06.2026</a:t>
+            </a:r>
+            <a:endParaRPr lang="en-DE" dirty="0"/>
           </a:p>
         </p:txBody>
       </p:sp>
@@ -1226,10 +1900,18 @@
           <a:lstStyle/>
           <a:p>
             <a:r>
-              <a:rPr lang="en-US"/>
-              <a:t>MAgPIE25 Workshop &amp; Stories </a:t>
-            </a:r>
-            <a:endParaRPr lang="en-DE"/>
+              <a:rPr lang="en-US" dirty="0"/>
+              <a:t>MAgPIE2</a:t>
+            </a:r>
+            <a:r>
+              <a:rPr lang="en-DE" dirty="0"/>
+              <a:t>6</a:t>
+            </a:r>
+            <a:r>
+              <a:rPr lang="en-US" dirty="0"/>
+              <a:t> Workshop &amp; Stories </a:t>
+            </a:r>
+            <a:endParaRPr lang="en-DE" dirty="0"/>
           </a:p>
         </p:txBody>
       </p:sp>
@@ -1402,8 +2084,9 @@
           <a:p>
             <a:r>
               <a:rPr lang="en-DE"/>
-              <a:t>16.06.2025</a:t>
-            </a:r>
+              <a:t>16.06.2026</a:t>
+            </a:r>
+            <a:endParaRPr lang="en-DE" dirty="0"/>
           </a:p>
         </p:txBody>
       </p:sp>
@@ -1429,10 +2112,18 @@
           <a:lstStyle/>
           <a:p>
             <a:r>
-              <a:rPr lang="en-US"/>
-              <a:t>MAgPIE25 Workshop &amp; Stories </a:t>
-            </a:r>
-            <a:endParaRPr lang="en-DE"/>
+              <a:rPr lang="en-US" dirty="0"/>
+              <a:t>MAgPIE2</a:t>
+            </a:r>
+            <a:r>
+              <a:rPr lang="en-DE" dirty="0"/>
+              <a:t>6</a:t>
+            </a:r>
+            <a:r>
+              <a:rPr lang="en-US" dirty="0"/>
+              <a:t> Workshop &amp; Stories </a:t>
+            </a:r>
+            <a:endParaRPr lang="en-DE" dirty="0"/>
           </a:p>
         </p:txBody>
       </p:sp>
@@ -1615,8 +2306,9 @@
           <a:p>
             <a:r>
               <a:rPr lang="en-DE"/>
-              <a:t>16.06.2025</a:t>
-            </a:r>
+              <a:t>16.06.2026</a:t>
+            </a:r>
+            <a:endParaRPr lang="en-DE" dirty="0"/>
           </a:p>
         </p:txBody>
       </p:sp>
@@ -1642,10 +2334,18 @@
           <a:lstStyle/>
           <a:p>
             <a:r>
-              <a:rPr lang="en-US"/>
-              <a:t>MAgPIE25 Workshop &amp; Stories </a:t>
-            </a:r>
-            <a:endParaRPr lang="en-DE"/>
+              <a:rPr lang="en-US" dirty="0"/>
+              <a:t>MAgPIE2</a:t>
+            </a:r>
+            <a:r>
+              <a:rPr lang="en-DE" dirty="0"/>
+              <a:t>6</a:t>
+            </a:r>
+            <a:r>
+              <a:rPr lang="en-US" dirty="0"/>
+              <a:t> Workshop &amp; Stories </a:t>
+            </a:r>
+            <a:endParaRPr lang="en-DE" dirty="0"/>
           </a:p>
         </p:txBody>
       </p:sp>
@@ -2392,8 +3092,9 @@
           <a:p>
             <a:r>
               <a:rPr lang="en-DE"/>
-              <a:t>16.06.2025</a:t>
-            </a:r>
+              <a:t>16.06.2026</a:t>
+            </a:r>
+            <a:endParaRPr lang="en-DE" dirty="0"/>
           </a:p>
         </p:txBody>
       </p:sp>
@@ -2419,10 +3120,18 @@
           <a:lstStyle/>
           <a:p>
             <a:r>
-              <a:rPr lang="en-US"/>
-              <a:t>MAgPIE25 Workshop &amp; Stories </a:t>
-            </a:r>
-            <a:endParaRPr lang="en-DE"/>
+              <a:rPr lang="en-US" dirty="0"/>
+              <a:t>MAgPIE2</a:t>
+            </a:r>
+            <a:r>
+              <a:rPr lang="en-DE" dirty="0"/>
+              <a:t>6</a:t>
+            </a:r>
+            <a:r>
+              <a:rPr lang="en-US" dirty="0"/>
+              <a:t> Workshop &amp; Stories </a:t>
+            </a:r>
+            <a:endParaRPr lang="en-DE" dirty="0"/>
           </a:p>
         </p:txBody>
       </p:sp>
@@ -2783,10 +3492,10 @@
       </p:pic>
       <p:sp>
         <p:nvSpPr>
-          <p:cNvPr id="13" name="Date Placeholder 2">
-            <a:extLst>
-              <a:ext uri="{FF2B5EF4-FFF2-40B4-BE49-F238E27FC236}">
-                <a16:creationId xmlns:a16="http://schemas.microsoft.com/office/drawing/2014/main" id="{FA6196C5-DD7D-4D63-857A-3579B5CF1A20}"/>
+          <p:cNvPr id="2" name="Date Placeholder 1">
+            <a:extLst>
+              <a:ext uri="{FF2B5EF4-FFF2-40B4-BE49-F238E27FC236}">
+                <a16:creationId xmlns:a16="http://schemas.microsoft.com/office/drawing/2014/main" id="{085CC368-6522-4F1D-97F9-6D15392A075A}"/>
               </a:ext>
             </a:extLst>
           </p:cNvPr>
@@ -2797,29 +3506,25 @@
             <p:ph type="dt" sz="half" idx="10"/>
           </p:nvPr>
         </p:nvSpPr>
-        <p:spPr>
-          <a:xfrm>
-            <a:off x="442912" y="6335518"/>
-            <a:ext cx="2743200" cy="365125"/>
-          </a:xfrm>
-        </p:spPr>
+        <p:spPr/>
         <p:txBody>
           <a:bodyPr/>
           <a:lstStyle/>
           <a:p>
             <a:r>
               <a:rPr lang="en-DE"/>
-              <a:t>16.06.2025</a:t>
-            </a:r>
-          </a:p>
-        </p:txBody>
-      </p:sp>
-      <p:sp>
-        <p:nvSpPr>
-          <p:cNvPr id="14" name="Footer Placeholder 3">
-            <a:extLst>
-              <a:ext uri="{FF2B5EF4-FFF2-40B4-BE49-F238E27FC236}">
-                <a16:creationId xmlns:a16="http://schemas.microsoft.com/office/drawing/2014/main" id="{6A22193E-0AC5-44D5-B9CF-BCC800BA8860}"/>
+              <a:t>16.06.2026</a:t>
+            </a:r>
+            <a:endParaRPr lang="en-DE" dirty="0"/>
+          </a:p>
+        </p:txBody>
+      </p:sp>
+      <p:sp>
+        <p:nvSpPr>
+          <p:cNvPr id="3" name="Footer Placeholder 2">
+            <a:extLst>
+              <a:ext uri="{FF2B5EF4-FFF2-40B4-BE49-F238E27FC236}">
+                <a16:creationId xmlns:a16="http://schemas.microsoft.com/office/drawing/2014/main" id="{F4966A44-3161-4959-9C88-4B9DD6B81872}"/>
               </a:ext>
             </a:extLst>
           </p:cNvPr>
@@ -2830,30 +3535,33 @@
             <p:ph type="ftr" sz="quarter" idx="11"/>
           </p:nvPr>
         </p:nvSpPr>
-        <p:spPr>
-          <a:xfrm>
-            <a:off x="4038600" y="6356350"/>
-            <a:ext cx="4114800" cy="365125"/>
-          </a:xfrm>
-        </p:spPr>
+        <p:spPr/>
         <p:txBody>
           <a:bodyPr/>
           <a:lstStyle/>
           <a:p>
             <a:r>
               <a:rPr lang="en-US"/>
-              <a:t>MAgPIE25 Workshop &amp; Stories </a:t>
-            </a:r>
-            <a:endParaRPr lang="en-DE"/>
-          </a:p>
-        </p:txBody>
-      </p:sp>
-      <p:sp>
-        <p:nvSpPr>
-          <p:cNvPr id="15" name="Slide Number Placeholder 4">
-            <a:extLst>
-              <a:ext uri="{FF2B5EF4-FFF2-40B4-BE49-F238E27FC236}">
-                <a16:creationId xmlns:a16="http://schemas.microsoft.com/office/drawing/2014/main" id="{29C238C5-9C8B-4751-88EB-E27C25E01754}"/>
+              <a:t>MAgPIE2</a:t>
+            </a:r>
+            <a:r>
+              <a:rPr lang="en-DE"/>
+              <a:t>6</a:t>
+            </a:r>
+            <a:r>
+              <a:rPr lang="en-US"/>
+              <a:t> Workshop &amp; Stories </a:t>
+            </a:r>
+            <a:endParaRPr lang="en-DE" dirty="0"/>
+          </a:p>
+        </p:txBody>
+      </p:sp>
+      <p:sp>
+        <p:nvSpPr>
+          <p:cNvPr id="4" name="Slide Number Placeholder 3">
+            <a:extLst>
+              <a:ext uri="{FF2B5EF4-FFF2-40B4-BE49-F238E27FC236}">
+                <a16:creationId xmlns:a16="http://schemas.microsoft.com/office/drawing/2014/main" id="{C6A85796-BF6A-4DFA-AF7C-3690D5690160}"/>
               </a:ext>
             </a:extLst>
           </p:cNvPr>
@@ -2864,12 +3572,7 @@
             <p:ph type="sldNum" sz="quarter" idx="12"/>
           </p:nvPr>
         </p:nvSpPr>
-        <p:spPr>
-          <a:xfrm>
-            <a:off x="8610600" y="6356350"/>
-            <a:ext cx="2743200" cy="365125"/>
-          </a:xfrm>
-        </p:spPr>
+        <p:spPr/>
         <p:txBody>
           <a:bodyPr/>
           <a:lstStyle/>
@@ -3034,8 +3737,9 @@
           <a:p>
             <a:r>
               <a:rPr lang="en-DE"/>
-              <a:t>16.06.2025</a:t>
-            </a:r>
+              <a:t>16.06.2026</a:t>
+            </a:r>
+            <a:endParaRPr lang="en-DE" dirty="0"/>
           </a:p>
         </p:txBody>
       </p:sp>
@@ -3061,10 +3765,18 @@
           <a:lstStyle/>
           <a:p>
             <a:r>
-              <a:rPr lang="en-US"/>
-              <a:t>MAgPIE25 Workshop &amp; Stories </a:t>
-            </a:r>
-            <a:endParaRPr lang="en-DE"/>
+              <a:rPr lang="en-US" dirty="0"/>
+              <a:t>MAgPIE2</a:t>
+            </a:r>
+            <a:r>
+              <a:rPr lang="en-DE" dirty="0"/>
+              <a:t>6</a:t>
+            </a:r>
+            <a:r>
+              <a:rPr lang="en-US" dirty="0"/>
+              <a:t> Workshop &amp; Stories </a:t>
+            </a:r>
+            <a:endParaRPr lang="en-DE" dirty="0"/>
           </a:p>
         </p:txBody>
       </p:sp>
@@ -3313,8 +4025,9 @@
           <a:p>
             <a:r>
               <a:rPr lang="en-DE"/>
-              <a:t>16.06.2025</a:t>
-            </a:r>
+              <a:t>16.06.2026</a:t>
+            </a:r>
+            <a:endParaRPr lang="en-DE" dirty="0"/>
           </a:p>
         </p:txBody>
       </p:sp>
@@ -3340,10 +4053,18 @@
           <a:lstStyle/>
           <a:p>
             <a:r>
-              <a:rPr lang="en-US"/>
-              <a:t>MAgPIE25 Workshop &amp; Stories </a:t>
-            </a:r>
-            <a:endParaRPr lang="en-DE"/>
+              <a:rPr lang="en-US" dirty="0"/>
+              <a:t>MAgPIE2</a:t>
+            </a:r>
+            <a:r>
+              <a:rPr lang="en-DE" dirty="0"/>
+              <a:t>6</a:t>
+            </a:r>
+            <a:r>
+              <a:rPr lang="en-US" dirty="0"/>
+              <a:t> Workshop &amp; Stories </a:t>
+            </a:r>
+            <a:endParaRPr lang="en-DE" dirty="0"/>
           </a:p>
         </p:txBody>
       </p:sp>
@@ -3584,8 +4305,9 @@
           <a:p>
             <a:r>
               <a:rPr lang="en-DE"/>
-              <a:t>16.06.2025</a:t>
-            </a:r>
+              <a:t>16.06.2026</a:t>
+            </a:r>
+            <a:endParaRPr lang="en-DE" dirty="0"/>
           </a:p>
         </p:txBody>
       </p:sp>
@@ -3612,9 +4334,9 @@
           <a:p>
             <a:r>
               <a:rPr lang="en-US"/>
-              <a:t>MAgPIE25 Workshop &amp; Stories </a:t>
-            </a:r>
-            <a:endParaRPr lang="en-DE"/>
+              <a:t>MAgPIE26 Workshop &amp; Stories </a:t>
+            </a:r>
+            <a:endParaRPr lang="en-DE" dirty="0"/>
           </a:p>
         </p:txBody>
       </p:sp>
@@ -4002,8 +4724,9 @@
           <a:p>
             <a:r>
               <a:rPr lang="en-DE"/>
-              <a:t>16.06.2025</a:t>
-            </a:r>
+              <a:t>16.06.2026</a:t>
+            </a:r>
+            <a:endParaRPr lang="en-DE" dirty="0"/>
           </a:p>
         </p:txBody>
       </p:sp>
@@ -4029,10 +4752,18 @@
           <a:lstStyle/>
           <a:p>
             <a:r>
-              <a:rPr lang="en-US"/>
-              <a:t>MAgPIE25 Workshop &amp; Stories </a:t>
-            </a:r>
-            <a:endParaRPr lang="en-DE"/>
+              <a:rPr lang="en-US" dirty="0"/>
+              <a:t>MAgPIE2</a:t>
+            </a:r>
+            <a:r>
+              <a:rPr lang="en-DE" dirty="0"/>
+              <a:t>6</a:t>
+            </a:r>
+            <a:r>
+              <a:rPr lang="en-US" dirty="0"/>
+              <a:t> Workshop &amp; Stories </a:t>
+            </a:r>
+            <a:endParaRPr lang="en-DE" dirty="0"/>
           </a:p>
         </p:txBody>
       </p:sp>
@@ -4147,8 +4878,9 @@
           <a:p>
             <a:r>
               <a:rPr lang="en-DE"/>
-              <a:t>16.06.2025</a:t>
-            </a:r>
+              <a:t>16.06.2026</a:t>
+            </a:r>
+            <a:endParaRPr lang="en-DE" dirty="0"/>
           </a:p>
         </p:txBody>
       </p:sp>
@@ -4174,10 +4906,18 @@
           <a:lstStyle/>
           <a:p>
             <a:r>
-              <a:rPr lang="en-US"/>
-              <a:t>MAgPIE25 Workshop &amp; Stories </a:t>
-            </a:r>
-            <a:endParaRPr lang="en-DE"/>
+              <a:rPr lang="en-US" dirty="0"/>
+              <a:t>MAgPIE2</a:t>
+            </a:r>
+            <a:r>
+              <a:rPr lang="en-DE" dirty="0"/>
+              <a:t>6</a:t>
+            </a:r>
+            <a:r>
+              <a:rPr lang="en-US" dirty="0"/>
+              <a:t> Workshop &amp; Stories </a:t>
+            </a:r>
+            <a:endParaRPr lang="en-DE" dirty="0"/>
           </a:p>
         </p:txBody>
       </p:sp>
@@ -4263,8 +5003,9 @@
           <a:p>
             <a:r>
               <a:rPr lang="en-DE"/>
-              <a:t>16.06.2025</a:t>
-            </a:r>
+              <a:t>16.06.2026</a:t>
+            </a:r>
+            <a:endParaRPr lang="en-DE" dirty="0"/>
           </a:p>
         </p:txBody>
       </p:sp>
@@ -4290,10 +5031,18 @@
           <a:lstStyle/>
           <a:p>
             <a:r>
-              <a:rPr lang="en-US"/>
-              <a:t>MAgPIE25 Workshop &amp; Stories </a:t>
-            </a:r>
-            <a:endParaRPr lang="en-DE"/>
+              <a:rPr lang="en-US" dirty="0"/>
+              <a:t>MAgPIE2</a:t>
+            </a:r>
+            <a:r>
+              <a:rPr lang="en-DE" dirty="0"/>
+              <a:t>6</a:t>
+            </a:r>
+            <a:r>
+              <a:rPr lang="en-US" dirty="0"/>
+              <a:t> Workshop &amp; Stories </a:t>
+            </a:r>
+            <a:endParaRPr lang="en-DE" dirty="0"/>
           </a:p>
         </p:txBody>
       </p:sp>
@@ -4579,8 +5328,9 @@
           <a:p>
             <a:r>
               <a:rPr lang="en-DE"/>
-              <a:t>16.06.2025</a:t>
-            </a:r>
+              <a:t>16.06.2026</a:t>
+            </a:r>
+            <a:endParaRPr lang="en-DE" dirty="0"/>
           </a:p>
         </p:txBody>
       </p:sp>
@@ -4606,10 +5356,18 @@
           <a:lstStyle/>
           <a:p>
             <a:r>
-              <a:rPr lang="en-US"/>
-              <a:t>MAgPIE25 Workshop &amp; Stories </a:t>
-            </a:r>
-            <a:endParaRPr lang="en-DE"/>
+              <a:rPr lang="en-US" dirty="0"/>
+              <a:t>MAgPIE2</a:t>
+            </a:r>
+            <a:r>
+              <a:rPr lang="en-DE" dirty="0"/>
+              <a:t>6</a:t>
+            </a:r>
+            <a:r>
+              <a:rPr lang="en-US" dirty="0"/>
+              <a:t> Workshop &amp; Stories </a:t>
+            </a:r>
+            <a:endParaRPr lang="en-DE" dirty="0"/>
           </a:p>
         </p:txBody>
       </p:sp>
@@ -4871,8 +5629,9 @@
           <a:p>
             <a:r>
               <a:rPr lang="en-DE"/>
-              <a:t>16.06.2025</a:t>
-            </a:r>
+              <a:t>16.06.2026</a:t>
+            </a:r>
+            <a:endParaRPr lang="en-DE" dirty="0"/>
           </a:p>
         </p:txBody>
       </p:sp>
@@ -4898,10 +5657,18 @@
           <a:lstStyle/>
           <a:p>
             <a:r>
-              <a:rPr lang="en-US"/>
-              <a:t>MAgPIE25 Workshop &amp; Stories </a:t>
-            </a:r>
-            <a:endParaRPr lang="en-DE"/>
+              <a:rPr lang="en-US" dirty="0"/>
+              <a:t>MAgPIE2</a:t>
+            </a:r>
+            <a:r>
+              <a:rPr lang="en-DE" dirty="0"/>
+              <a:t>6</a:t>
+            </a:r>
+            <a:r>
+              <a:rPr lang="en-US" dirty="0"/>
+              <a:t> Workshop &amp; Stories </a:t>
+            </a:r>
+            <a:endParaRPr lang="en-DE" dirty="0"/>
           </a:p>
         </p:txBody>
       </p:sp>
@@ -5117,7 +5884,7 @@
           <a:p>
             <a:r>
               <a:rPr lang="en-DE"/>
-              <a:t>16.06.2025</a:t>
+              <a:t>16.06.2026</a:t>
             </a:r>
             <a:endParaRPr lang="en-DE" dirty="0"/>
           </a:p>
@@ -5152,10 +5919,11 @@
           <a:bodyPr vert="horz" lIns="91440" tIns="45720" rIns="91440" bIns="45720" rtlCol="0" anchor="ctr"/>
           <a:lstStyle>
             <a:lvl1pPr algn="ctr">
-              <a:defRPr sz="1200">
+              <a:defRPr sz="1400" b="1">
                 <a:solidFill>
                   <a:schemeClr val="tx1">
-                    <a:tint val="75000"/>
+                    <a:lumMod val="50000"/>
+                    <a:lumOff val="50000"/>
                   </a:schemeClr>
                 </a:solidFill>
               </a:defRPr>
@@ -5163,10 +5931,18 @@
           </a:lstStyle>
           <a:p>
             <a:r>
-              <a:rPr lang="en-US"/>
-              <a:t>MAgPIE25 Workshop &amp; Stories </a:t>
-            </a:r>
-            <a:endParaRPr lang="en-DE"/>
+              <a:rPr lang="en-US" dirty="0"/>
+              <a:t>MAgPIE2</a:t>
+            </a:r>
+            <a:r>
+              <a:rPr lang="en-DE" dirty="0"/>
+              <a:t>6</a:t>
+            </a:r>
+            <a:r>
+              <a:rPr lang="en-US" dirty="0"/>
+              <a:t> Workshop &amp; Stories </a:t>
+            </a:r>
+            <a:endParaRPr lang="en-DE" dirty="0"/>
           </a:p>
         </p:txBody>
       </p:sp>
@@ -5609,49 +6385,13 @@
         </p:spPr>
         <p:txBody>
           <a:bodyPr>
-            <a:normAutofit fontScale="55000" lnSpcReduction="20000"/>
+            <a:noAutofit/>
           </a:bodyPr>
           <a:lstStyle/>
           <a:p>
             <a:r>
-              <a:rPr lang="de-DE" dirty="0" err="1"/>
-              <a:t>How</a:t>
-            </a:r>
-            <a:r>
-              <a:rPr lang="de-DE" dirty="0"/>
-              <a:t> do </a:t>
-            </a:r>
-            <a:r>
-              <a:rPr lang="de-DE" dirty="0" err="1"/>
-              <a:t>the</a:t>
-            </a:r>
-            <a:r>
-              <a:rPr lang="de-DE" dirty="0"/>
-              <a:t> </a:t>
-            </a:r>
-            <a:r>
-              <a:rPr lang="de-DE" dirty="0" err="1"/>
-              <a:t>magpie</a:t>
-            </a:r>
-            <a:r>
-              <a:rPr lang="de-DE" dirty="0"/>
-              <a:t> </a:t>
-            </a:r>
-            <a:r>
-              <a:rPr lang="de-DE" dirty="0" err="1"/>
-              <a:t>folder</a:t>
-            </a:r>
-            <a:r>
-              <a:rPr lang="de-DE" dirty="0"/>
-              <a:t> and code </a:t>
-            </a:r>
-            <a:r>
-              <a:rPr lang="de-DE" dirty="0" err="1"/>
-              <a:t>look</a:t>
-            </a:r>
-            <a:r>
-              <a:rPr lang="de-DE" dirty="0"/>
-              <a:t> like?</a:t>
+              <a:rPr lang="de-DE" sz="3000" dirty="0"/>
+              <a:t>MAgPIE Workshop 2026</a:t>
             </a:r>
           </a:p>
         </p:txBody>
@@ -5675,60 +6415,50 @@
         <p:spPr/>
         <p:txBody>
           <a:bodyPr>
-            <a:normAutofit fontScale="70000" lnSpcReduction="20000"/>
+            <a:normAutofit/>
           </a:bodyPr>
           <a:lstStyle/>
           <a:p>
             <a:r>
-              <a:rPr lang="en-US" b="1" dirty="0"/>
+              <a:rPr lang="en-US" sz="2400" b="1" dirty="0"/>
               <a:t>Presenter:</a:t>
             </a:r>
             <a:r>
-              <a:rPr lang="en-US" dirty="0"/>
+              <a:rPr lang="en-US" sz="2400" dirty="0"/>
               <a:t> </a:t>
             </a:r>
             <a:r>
-              <a:rPr lang="en-DE" dirty="0"/>
+              <a:rPr lang="en-DE" sz="2400" dirty="0"/>
               <a:t>Isabelle Weindl</a:t>
             </a:r>
-            <a:endParaRPr lang="en-US" dirty="0"/>
-          </a:p>
-          <a:p>
-            <a:r>
-              <a:rPr lang="en-DE" dirty="0" err="1"/>
-              <a:t>weindl</a:t>
-            </a:r>
-            <a:r>
-              <a:rPr lang="en-US" dirty="0"/>
-              <a:t>@pik-potsdam.de</a:t>
-            </a:r>
-          </a:p>
-          <a:p>
-            <a:r>
-              <a:rPr lang="en-DE" dirty="0"/>
+            <a:endParaRPr lang="en-US" sz="2400" dirty="0"/>
+          </a:p>
+          <a:p>
+            <a:r>
+              <a:rPr lang="en-DE" sz="2400" dirty="0"/>
               <a:t>June</a:t>
             </a:r>
             <a:r>
-              <a:rPr lang="en-US" dirty="0"/>
+              <a:rPr lang="en-US" sz="2400" dirty="0"/>
               <a:t> 1</a:t>
             </a:r>
             <a:r>
-              <a:rPr lang="en-DE" dirty="0"/>
+              <a:rPr lang="en-DE" sz="2400" dirty="0"/>
               <a:t>6</a:t>
             </a:r>
             <a:r>
-              <a:rPr lang="en-US" dirty="0"/>
+              <a:rPr lang="en-US" sz="2400" dirty="0"/>
               <a:t>, 202</a:t>
             </a:r>
             <a:r>
-              <a:rPr lang="en-DE" dirty="0"/>
-              <a:t>5</a:t>
-            </a:r>
-            <a:r>
-              <a:rPr lang="en-US" dirty="0"/>
+              <a:rPr lang="en-DE" sz="2400" dirty="0"/>
+              <a:t>6</a:t>
+            </a:r>
+            <a:r>
+              <a:rPr lang="en-US" sz="2400" dirty="0"/>
               <a:t> </a:t>
             </a:r>
-            <a:endParaRPr lang="de-DE" dirty="0"/>
+            <a:endParaRPr lang="de-DE" sz="2400" dirty="0"/>
           </a:p>
           <a:p>
             <a:endParaRPr lang="de-DE" dirty="0"/>
@@ -5938,14 +6668,19 @@
             <p:ph type="dt" sz="half" idx="10"/>
           </p:nvPr>
         </p:nvSpPr>
-        <p:spPr/>
+        <p:spPr>
+          <a:xfrm>
+            <a:off x="442912" y="6335518"/>
+            <a:ext cx="2743200" cy="365125"/>
+          </a:xfrm>
+        </p:spPr>
         <p:txBody>
           <a:bodyPr/>
           <a:lstStyle/>
           <a:p>
             <a:r>
               <a:rPr lang="en-DE"/>
-              <a:t>16.06.2025</a:t>
+              <a:t>16.06.2026</a:t>
             </a:r>
           </a:p>
         </p:txBody>
@@ -5966,14 +6701,19 @@
             <p:ph type="ftr" sz="quarter" idx="11"/>
           </p:nvPr>
         </p:nvSpPr>
-        <p:spPr/>
+        <p:spPr>
+          <a:xfrm>
+            <a:off x="4038600" y="6356350"/>
+            <a:ext cx="4114800" cy="365125"/>
+          </a:xfrm>
+        </p:spPr>
         <p:txBody>
           <a:bodyPr/>
           <a:lstStyle/>
           <a:p>
             <a:r>
               <a:rPr lang="en-US"/>
-              <a:t>MAgPIE25 Workshop &amp; Stories </a:t>
+              <a:t>MAgPIE26 Workshop &amp; Stories </a:t>
             </a:r>
             <a:endParaRPr lang="en-DE" dirty="0"/>
           </a:p>
@@ -5995,7 +6735,12 @@
             <p:ph type="sldNum" sz="quarter" idx="12"/>
           </p:nvPr>
         </p:nvSpPr>
-        <p:spPr/>
+        <p:spPr>
+          <a:xfrm>
+            <a:off x="8610600" y="6356350"/>
+            <a:ext cx="2743200" cy="365125"/>
+          </a:xfrm>
+        </p:spPr>
         <p:txBody>
           <a:bodyPr/>
           <a:lstStyle/>
@@ -6023,7 +6768,7 @@
           <p:nvPr/>
         </p:nvPicPr>
         <p:blipFill>
-          <a:blip r:embed="rId2">
+          <a:blip r:embed="rId3">
             <a:extLst>
               <a:ext uri="{28A0092B-C50C-407E-A947-70E740481C1C}">
                 <a14:useLocalDpi xmlns:a14="http://schemas.microsoft.com/office/drawing/2010/main" val="0"/>
@@ -6036,8 +6781,8 @@
         </p:blipFill>
         <p:spPr>
           <a:xfrm>
-            <a:off x="588221" y="2106473"/>
-            <a:ext cx="3552631" cy="3910279"/>
+            <a:off x="534924" y="1822557"/>
+            <a:ext cx="2708801" cy="4444483"/>
           </a:xfrm>
           <a:prstGeom prst="rect">
             <a:avLst/>
@@ -6181,11 +6926,11 @@
             </a:r>
             <a:r>
               <a:rPr lang="de-DE" sz="2800" b="1" dirty="0"/>
-              <a:t> (</a:t>
-            </a:r>
-            <a:r>
-              <a:rPr lang="de-DE" sz="2800" b="1" dirty="0" err="1"/>
-              <a:t>done</a:t>
+              <a:t> </a:t>
+            </a:r>
+            <a:r>
+              <a:rPr lang="en-DE" sz="2800" b="1" dirty="0"/>
+              <a:t>(created</a:t>
             </a:r>
             <a:r>
               <a:rPr lang="de-DE" sz="2800" b="1" dirty="0"/>
@@ -6222,20 +6967,20 @@
           <p:nvPr/>
         </p:nvPicPr>
         <p:blipFill rotWithShape="1">
-          <a:blip r:embed="rId3">
+          <a:blip r:embed="rId4">
             <a:extLst>
               <a:ext uri="{28A0092B-C50C-407E-A947-70E740481C1C}">
                 <a14:useLocalDpi xmlns:a14="http://schemas.microsoft.com/office/drawing/2010/main" val="0"/>
               </a:ext>
             </a:extLst>
           </a:blip>
-          <a:srcRect t="41217"/>
+          <a:srcRect t="41218" r="46907" b="-556"/>
           <a:stretch/>
         </p:blipFill>
         <p:spPr>
           <a:xfrm>
-            <a:off x="4488927" y="2791326"/>
-            <a:ext cx="7308577" cy="376716"/>
+            <a:off x="5251037" y="2570494"/>
+            <a:ext cx="3880373" cy="380272"/>
           </a:xfrm>
           <a:prstGeom prst="rect">
             <a:avLst/>
@@ -6314,8 +7059,8 @@
         </p:nvCxnSpPr>
         <p:spPr>
           <a:xfrm flipV="1">
-            <a:off x="3657599" y="2760630"/>
-            <a:ext cx="805539" cy="1926405"/>
+            <a:off x="3657599" y="2546747"/>
+            <a:ext cx="1566864" cy="2134792"/>
           </a:xfrm>
           <a:prstGeom prst="line">
             <a:avLst/>
@@ -6357,8 +7102,8 @@
         </p:nvCxnSpPr>
         <p:spPr>
           <a:xfrm flipV="1">
-            <a:off x="3657599" y="3171598"/>
-            <a:ext cx="805539" cy="1663038"/>
+            <a:off x="3657599" y="2953147"/>
+            <a:ext cx="1591057" cy="1883870"/>
           </a:xfrm>
           <a:prstGeom prst="line">
             <a:avLst/>
@@ -6636,7 +7381,7 @@
           <p:cNvPr id="3" name="Title 2">
             <a:extLst>
               <a:ext uri="{FF2B5EF4-FFF2-40B4-BE49-F238E27FC236}">
-                <a16:creationId xmlns:a16="http://schemas.microsoft.com/office/drawing/2014/main" id="{F8A07FAD-A3A4-4B9F-9E99-0D81C84AAE87}"/>
+                <a16:creationId xmlns:a16="http://schemas.microsoft.com/office/drawing/2014/main" id="{F60D6D32-56DA-431C-BB89-EBA807F1626A}"/>
               </a:ext>
             </a:extLst>
           </p:cNvPr>
@@ -6649,16 +7394,62 @@
         </p:nvSpPr>
         <p:spPr/>
         <p:txBody>
-          <a:bodyPr>
-            <a:normAutofit/>
-          </a:bodyPr>
+          <a:bodyPr/>
           <a:lstStyle/>
           <a:p>
             <a:r>
-              <a:rPr lang="en-US" sz="3200" dirty="0"/>
-              <a:t>Brief exercise</a:t>
-            </a:r>
-            <a:endParaRPr lang="en-DE" sz="3200" dirty="0"/>
+              <a:rPr lang="en-DE" altLang="de-DE" sz="2800" dirty="0"/>
+              <a:t>MAgPIE environment: </a:t>
+            </a:r>
+            <a:r>
+              <a:rPr lang="de-DE" altLang="de-DE" sz="2800" dirty="0"/>
+              <a:t>p</a:t>
+            </a:r>
+            <a:r>
+              <a:rPr lang="en-DE" altLang="de-DE" sz="2800" dirty="0"/>
+              <a:t>r</a:t>
+            </a:r>
+            <a:r>
+              <a:rPr lang="de-DE" altLang="de-DE" sz="2800" dirty="0"/>
+              <a:t>e</a:t>
+            </a:r>
+            <a:r>
+              <a:rPr lang="en-DE" altLang="de-DE" sz="2800" dirty="0"/>
+              <a:t>- </a:t>
+            </a:r>
+            <a:r>
+              <a:rPr lang="de-DE" altLang="de-DE" sz="2800" dirty="0"/>
+              <a:t>a</a:t>
+            </a:r>
+            <a:r>
+              <a:rPr lang="en-DE" altLang="de-DE" sz="2800" dirty="0"/>
+              <a:t>n</a:t>
+            </a:r>
+            <a:r>
+              <a:rPr lang="de-DE" altLang="de-DE" sz="2800" dirty="0"/>
+              <a:t>d</a:t>
+            </a:r>
+            <a:r>
+              <a:rPr lang="en-DE" altLang="de-DE" sz="2800" dirty="0"/>
+              <a:t> </a:t>
+            </a:r>
+            <a:r>
+              <a:rPr lang="de-DE" altLang="de-DE" sz="2800" dirty="0"/>
+              <a:t>p</a:t>
+            </a:r>
+            <a:r>
+              <a:rPr lang="en-DE" altLang="de-DE" sz="2800" dirty="0"/>
+              <a:t>o</a:t>
+            </a:r>
+            <a:r>
+              <a:rPr lang="de-DE" altLang="de-DE" sz="2800" dirty="0"/>
+              <a:t>s</a:t>
+            </a:r>
+            <a:r>
+              <a:rPr lang="en-DE" altLang="de-DE" sz="2800" dirty="0" err="1"/>
+              <a:t>tprocessing</a:t>
+            </a:r>
+            <a:endParaRPr lang="en-DE" dirty="0"/>
           </a:p>
         </p:txBody>
       </p:sp>
@@ -6667,7 +7458,7 @@
           <p:cNvPr id="4" name="Date Placeholder 3">
             <a:extLst>
               <a:ext uri="{FF2B5EF4-FFF2-40B4-BE49-F238E27FC236}">
-                <a16:creationId xmlns:a16="http://schemas.microsoft.com/office/drawing/2014/main" id="{B1457F58-C5CA-4326-A73B-34EF6DB5C2B3}"/>
+                <a16:creationId xmlns:a16="http://schemas.microsoft.com/office/drawing/2014/main" id="{201D3725-D987-4A86-B6A3-4ABE50FF3CF6}"/>
               </a:ext>
             </a:extLst>
           </p:cNvPr>
@@ -6685,8 +7476,9 @@
           <a:p>
             <a:r>
               <a:rPr lang="en-DE"/>
-              <a:t>16.06.2025</a:t>
-            </a:r>
+              <a:t>16.06.2026</a:t>
+            </a:r>
+            <a:endParaRPr lang="en-DE" dirty="0"/>
           </a:p>
         </p:txBody>
       </p:sp>
@@ -6695,7 +7487,7 @@
           <p:cNvPr id="5" name="Footer Placeholder 4">
             <a:extLst>
               <a:ext uri="{FF2B5EF4-FFF2-40B4-BE49-F238E27FC236}">
-                <a16:creationId xmlns:a16="http://schemas.microsoft.com/office/drawing/2014/main" id="{08E27823-4349-40E0-A2FC-763FD8AFDA00}"/>
+                <a16:creationId xmlns:a16="http://schemas.microsoft.com/office/drawing/2014/main" id="{577BC667-A71D-4850-9810-D0928E1E1825}"/>
               </a:ext>
             </a:extLst>
           </p:cNvPr>
@@ -6713,7 +7505,15 @@
           <a:p>
             <a:r>
               <a:rPr lang="en-US"/>
-              <a:t>MAgPIE25 Workshop &amp; Stories </a:t>
+              <a:t>MAgPIE2</a:t>
+            </a:r>
+            <a:r>
+              <a:rPr lang="en-DE"/>
+              <a:t>6</a:t>
+            </a:r>
+            <a:r>
+              <a:rPr lang="en-US"/>
+              <a:t> Workshop &amp; Stories </a:t>
             </a:r>
             <a:endParaRPr lang="en-DE" dirty="0"/>
           </a:p>
@@ -6724,7 +7524,7 @@
           <p:cNvPr id="6" name="Slide Number Placeholder 5">
             <a:extLst>
               <a:ext uri="{FF2B5EF4-FFF2-40B4-BE49-F238E27FC236}">
-                <a16:creationId xmlns:a16="http://schemas.microsoft.com/office/drawing/2014/main" id="{F58EB891-045F-42BA-97B1-2EB49A950F12}"/>
+                <a16:creationId xmlns:a16="http://schemas.microsoft.com/office/drawing/2014/main" id="{3B7655EB-3B94-44A6-B9CF-1459FD7745BC}"/>
               </a:ext>
             </a:extLst>
           </p:cNvPr>
@@ -6744,6 +7544,2135 @@
               <a:rPr lang="en-DE" smtClean="0"/>
               <a:t>11</a:t>
             </a:fld>
+            <a:endParaRPr lang="en-DE"/>
+          </a:p>
+        </p:txBody>
+      </p:sp>
+      <p:sp>
+        <p:nvSpPr>
+          <p:cNvPr id="35" name="Rounded Rectangle 3">
+            <a:extLst>
+              <a:ext uri="{FF2B5EF4-FFF2-40B4-BE49-F238E27FC236}">
+                <a16:creationId xmlns:a16="http://schemas.microsoft.com/office/drawing/2014/main" id="{043455FB-A1D3-4C79-9165-09B5570634F5}"/>
+              </a:ext>
+            </a:extLst>
+          </p:cNvPr>
+          <p:cNvSpPr/>
+          <p:nvPr/>
+        </p:nvSpPr>
+        <p:spPr>
+          <a:xfrm>
+            <a:off x="4967118" y="3844248"/>
+            <a:ext cx="2238690" cy="1228845"/>
+          </a:xfrm>
+          <a:prstGeom prst="roundRect">
+            <a:avLst/>
+          </a:prstGeom>
+          <a:solidFill>
+            <a:schemeClr val="tx2">
+              <a:lumMod val="75000"/>
+              <a:alpha val="60000"/>
+            </a:schemeClr>
+          </a:solidFill>
+          <a:ln>
+            <a:noFill/>
+          </a:ln>
+        </p:spPr>
+        <p:style>
+          <a:lnRef idx="2">
+            <a:schemeClr val="accent1">
+              <a:shade val="50000"/>
+            </a:schemeClr>
+          </a:lnRef>
+          <a:fillRef idx="1">
+            <a:schemeClr val="accent1"/>
+          </a:fillRef>
+          <a:effectRef idx="0">
+            <a:schemeClr val="accent1"/>
+          </a:effectRef>
+          <a:fontRef idx="minor">
+            <a:schemeClr val="lt1"/>
+          </a:fontRef>
+        </p:style>
+        <p:txBody>
+          <a:bodyPr rtlCol="0" anchor="ctr"/>
+          <a:lstStyle/>
+          <a:p>
+            <a:pPr algn="ctr"/>
+            <a:r>
+              <a:rPr lang="en-DE" dirty="0"/>
+              <a:t>M</a:t>
+            </a:r>
+            <a:r>
+              <a:rPr lang="en-US" dirty="0"/>
+              <a:t>A</a:t>
+            </a:r>
+            <a:r>
+              <a:rPr lang="en-DE" dirty="0"/>
+              <a:t>g</a:t>
+            </a:r>
+            <a:r>
+              <a:rPr lang="en-US" dirty="0"/>
+              <a:t>P</a:t>
+            </a:r>
+            <a:r>
+              <a:rPr lang="en-DE" dirty="0"/>
+              <a:t>I</a:t>
+            </a:r>
+            <a:r>
+              <a:rPr lang="en-US" dirty="0"/>
+              <a:t>E</a:t>
+            </a:r>
+            <a:r>
+              <a:rPr lang="de-DE" dirty="0"/>
+              <a:t> </a:t>
+            </a:r>
+            <a:r>
+              <a:rPr lang="de-DE" dirty="0" err="1"/>
+              <a:t>optimization</a:t>
+            </a:r>
+            <a:endParaRPr lang="de-DE" dirty="0"/>
+          </a:p>
+        </p:txBody>
+      </p:sp>
+      <p:cxnSp>
+        <p:nvCxnSpPr>
+          <p:cNvPr id="36" name="Straight Connector 35">
+            <a:extLst>
+              <a:ext uri="{FF2B5EF4-FFF2-40B4-BE49-F238E27FC236}">
+                <a16:creationId xmlns:a16="http://schemas.microsoft.com/office/drawing/2014/main" id="{379A46EB-B2A4-451B-8633-3723C8DFF2A6}"/>
+              </a:ext>
+            </a:extLst>
+          </p:cNvPr>
+          <p:cNvCxnSpPr/>
+          <p:nvPr/>
+        </p:nvCxnSpPr>
+        <p:spPr>
+          <a:xfrm flipH="1">
+            <a:off x="4267895" y="1460102"/>
+            <a:ext cx="16288" cy="4417695"/>
+          </a:xfrm>
+          <a:prstGeom prst="line">
+            <a:avLst/>
+          </a:prstGeom>
+          <a:ln>
+            <a:solidFill>
+              <a:schemeClr val="tx1"/>
+            </a:solidFill>
+            <a:prstDash val="lgDash"/>
+          </a:ln>
+        </p:spPr>
+        <p:style>
+          <a:lnRef idx="1">
+            <a:schemeClr val="accent1"/>
+          </a:lnRef>
+          <a:fillRef idx="0">
+            <a:schemeClr val="accent1"/>
+          </a:fillRef>
+          <a:effectRef idx="0">
+            <a:schemeClr val="accent1"/>
+          </a:effectRef>
+          <a:fontRef idx="minor">
+            <a:schemeClr val="tx1"/>
+          </a:fontRef>
+        </p:style>
+      </p:cxnSp>
+      <p:cxnSp>
+        <p:nvCxnSpPr>
+          <p:cNvPr id="37" name="Straight Connector 36">
+            <a:extLst>
+              <a:ext uri="{FF2B5EF4-FFF2-40B4-BE49-F238E27FC236}">
+                <a16:creationId xmlns:a16="http://schemas.microsoft.com/office/drawing/2014/main" id="{ABB25EB6-42C0-4ACF-A3A3-E1EAEC25A9C2}"/>
+              </a:ext>
+            </a:extLst>
+          </p:cNvPr>
+          <p:cNvCxnSpPr/>
+          <p:nvPr/>
+        </p:nvCxnSpPr>
+        <p:spPr>
+          <a:xfrm flipH="1">
+            <a:off x="7972429" y="1414450"/>
+            <a:ext cx="21320" cy="4366423"/>
+          </a:xfrm>
+          <a:prstGeom prst="line">
+            <a:avLst/>
+          </a:prstGeom>
+          <a:ln>
+            <a:solidFill>
+              <a:schemeClr val="tx1"/>
+            </a:solidFill>
+            <a:prstDash val="lgDash"/>
+          </a:ln>
+        </p:spPr>
+        <p:style>
+          <a:lnRef idx="1">
+            <a:schemeClr val="accent1"/>
+          </a:lnRef>
+          <a:fillRef idx="0">
+            <a:schemeClr val="accent1"/>
+          </a:fillRef>
+          <a:effectRef idx="0">
+            <a:schemeClr val="accent1"/>
+          </a:effectRef>
+          <a:fontRef idx="minor">
+            <a:schemeClr val="tx1"/>
+          </a:fontRef>
+        </p:style>
+      </p:cxnSp>
+      <p:sp>
+        <p:nvSpPr>
+          <p:cNvPr id="38" name="Rounded Rectangle 9">
+            <a:extLst>
+              <a:ext uri="{FF2B5EF4-FFF2-40B4-BE49-F238E27FC236}">
+                <a16:creationId xmlns:a16="http://schemas.microsoft.com/office/drawing/2014/main" id="{68E7A493-8E95-4E28-A2D8-8A4732EFADFC}"/>
+              </a:ext>
+            </a:extLst>
+          </p:cNvPr>
+          <p:cNvSpPr/>
+          <p:nvPr/>
+        </p:nvSpPr>
+        <p:spPr>
+          <a:xfrm>
+            <a:off x="2175401" y="2103416"/>
+            <a:ext cx="923544" cy="560642"/>
+          </a:xfrm>
+          <a:prstGeom prst="roundRect">
+            <a:avLst/>
+          </a:prstGeom>
+          <a:solidFill>
+            <a:schemeClr val="accent1">
+              <a:lumMod val="75000"/>
+              <a:alpha val="60000"/>
+            </a:schemeClr>
+          </a:solidFill>
+          <a:ln>
+            <a:noFill/>
+          </a:ln>
+        </p:spPr>
+        <p:style>
+          <a:lnRef idx="2">
+            <a:schemeClr val="accent1">
+              <a:shade val="50000"/>
+            </a:schemeClr>
+          </a:lnRef>
+          <a:fillRef idx="1">
+            <a:schemeClr val="accent1"/>
+          </a:fillRef>
+          <a:effectRef idx="0">
+            <a:schemeClr val="accent1"/>
+          </a:effectRef>
+          <a:fontRef idx="minor">
+            <a:schemeClr val="lt1"/>
+          </a:fontRef>
+        </p:style>
+        <p:txBody>
+          <a:bodyPr rtlCol="0" anchor="ctr"/>
+          <a:lstStyle/>
+          <a:p>
+            <a:pPr algn="ctr"/>
+            <a:r>
+              <a:rPr lang="de-DE" sz="1050" b="1" dirty="0">
+                <a:solidFill>
+                  <a:schemeClr val="tx1"/>
+                </a:solidFill>
+              </a:rPr>
+              <a:t>Source </a:t>
+            </a:r>
+            <a:r>
+              <a:rPr lang="de-DE" sz="1050" b="1" dirty="0" err="1">
+                <a:solidFill>
+                  <a:schemeClr val="tx1"/>
+                </a:solidFill>
+              </a:rPr>
+              <a:t>files</a:t>
+            </a:r>
+            <a:r>
+              <a:rPr lang="de-DE" sz="1050" b="1" dirty="0">
+                <a:solidFill>
+                  <a:schemeClr val="tx1"/>
+                </a:solidFill>
+              </a:rPr>
+              <a:t> </a:t>
+            </a:r>
+            <a:r>
+              <a:rPr lang="de-DE" sz="1050" b="1" dirty="0" err="1">
+                <a:solidFill>
+                  <a:schemeClr val="tx1"/>
+                </a:solidFill>
+              </a:rPr>
+              <a:t>of</a:t>
+            </a:r>
+            <a:r>
+              <a:rPr lang="de-DE" sz="1050" b="1" dirty="0">
+                <a:solidFill>
+                  <a:schemeClr val="tx1"/>
+                </a:solidFill>
+              </a:rPr>
+              <a:t> </a:t>
+            </a:r>
+            <a:r>
+              <a:rPr lang="de-DE" sz="1050" b="1" dirty="0" err="1">
+                <a:solidFill>
+                  <a:schemeClr val="tx1"/>
+                </a:solidFill>
+              </a:rPr>
+              <a:t>input</a:t>
+            </a:r>
+            <a:r>
+              <a:rPr lang="de-DE" sz="1050" b="1" dirty="0">
+                <a:solidFill>
+                  <a:schemeClr val="tx1"/>
+                </a:solidFill>
+              </a:rPr>
+              <a:t> </a:t>
+            </a:r>
+            <a:r>
+              <a:rPr lang="de-DE" sz="1050" b="1" dirty="0" err="1">
+                <a:solidFill>
+                  <a:schemeClr val="tx1"/>
+                </a:solidFill>
+              </a:rPr>
+              <a:t>data</a:t>
+            </a:r>
+            <a:endParaRPr lang="de-DE" sz="1050" b="1" dirty="0">
+              <a:solidFill>
+                <a:schemeClr val="tx1"/>
+              </a:solidFill>
+            </a:endParaRPr>
+          </a:p>
+        </p:txBody>
+      </p:sp>
+      <p:cxnSp>
+        <p:nvCxnSpPr>
+          <p:cNvPr id="39" name="Straight Arrow Connector 38">
+            <a:extLst>
+              <a:ext uri="{FF2B5EF4-FFF2-40B4-BE49-F238E27FC236}">
+                <a16:creationId xmlns:a16="http://schemas.microsoft.com/office/drawing/2014/main" id="{95B4B293-DA76-4ACE-B7C4-5BF2F7167236}"/>
+              </a:ext>
+            </a:extLst>
+          </p:cNvPr>
+          <p:cNvCxnSpPr>
+            <a:cxnSpLocks/>
+          </p:cNvCxnSpPr>
+          <p:nvPr/>
+        </p:nvCxnSpPr>
+        <p:spPr>
+          <a:xfrm>
+            <a:off x="2666748" y="2818147"/>
+            <a:ext cx="0" cy="1320699"/>
+          </a:xfrm>
+          <a:prstGeom prst="straightConnector1">
+            <a:avLst/>
+          </a:prstGeom>
+          <a:ln>
+            <a:solidFill>
+              <a:schemeClr val="tx1"/>
+            </a:solidFill>
+            <a:tailEnd type="triangle"/>
+          </a:ln>
+        </p:spPr>
+        <p:style>
+          <a:lnRef idx="1">
+            <a:schemeClr val="accent1"/>
+          </a:lnRef>
+          <a:fillRef idx="0">
+            <a:schemeClr val="accent1"/>
+          </a:fillRef>
+          <a:effectRef idx="0">
+            <a:schemeClr val="accent1"/>
+          </a:effectRef>
+          <a:fontRef idx="minor">
+            <a:schemeClr val="tx1"/>
+          </a:fontRef>
+        </p:style>
+      </p:cxnSp>
+      <p:sp>
+        <p:nvSpPr>
+          <p:cNvPr id="40" name="Rounded Rectangle 15">
+            <a:extLst>
+              <a:ext uri="{FF2B5EF4-FFF2-40B4-BE49-F238E27FC236}">
+                <a16:creationId xmlns:a16="http://schemas.microsoft.com/office/drawing/2014/main" id="{5D19B42B-3876-4D16-B6C4-4B0CED7A1D5E}"/>
+              </a:ext>
+            </a:extLst>
+          </p:cNvPr>
+          <p:cNvSpPr/>
+          <p:nvPr/>
+        </p:nvSpPr>
+        <p:spPr>
+          <a:xfrm>
+            <a:off x="2175401" y="4392284"/>
+            <a:ext cx="923544" cy="560642"/>
+          </a:xfrm>
+          <a:prstGeom prst="roundRect">
+            <a:avLst/>
+          </a:prstGeom>
+          <a:solidFill>
+            <a:schemeClr val="accent1">
+              <a:lumMod val="75000"/>
+              <a:alpha val="60000"/>
+            </a:schemeClr>
+          </a:solidFill>
+          <a:ln>
+            <a:noFill/>
+          </a:ln>
+        </p:spPr>
+        <p:style>
+          <a:lnRef idx="2">
+            <a:schemeClr val="accent1">
+              <a:shade val="50000"/>
+            </a:schemeClr>
+          </a:lnRef>
+          <a:fillRef idx="1">
+            <a:schemeClr val="accent1"/>
+          </a:fillRef>
+          <a:effectRef idx="0">
+            <a:schemeClr val="accent1"/>
+          </a:effectRef>
+          <a:fontRef idx="minor">
+            <a:schemeClr val="lt1"/>
+          </a:fontRef>
+        </p:style>
+        <p:txBody>
+          <a:bodyPr rtlCol="0" anchor="ctr"/>
+          <a:lstStyle/>
+          <a:p>
+            <a:pPr algn="ctr"/>
+            <a:r>
+              <a:rPr lang="en-DE" sz="1050" b="1" dirty="0">
+                <a:solidFill>
+                  <a:schemeClr val="tx1"/>
+                </a:solidFill>
+              </a:rPr>
+              <a:t>MAgPIE</a:t>
+            </a:r>
+            <a:r>
+              <a:rPr lang="de-DE" sz="1050" b="1" dirty="0">
+                <a:solidFill>
+                  <a:schemeClr val="tx1"/>
+                </a:solidFill>
+              </a:rPr>
+              <a:t> </a:t>
+            </a:r>
+            <a:r>
+              <a:rPr lang="de-DE" sz="1050" b="1" dirty="0" err="1">
+                <a:solidFill>
+                  <a:schemeClr val="tx1"/>
+                </a:solidFill>
+              </a:rPr>
+              <a:t>input</a:t>
+            </a:r>
+            <a:r>
+              <a:rPr lang="de-DE" sz="1050" b="1" dirty="0">
+                <a:solidFill>
+                  <a:schemeClr val="tx1"/>
+                </a:solidFill>
+              </a:rPr>
+              <a:t> </a:t>
+            </a:r>
+            <a:r>
+              <a:rPr lang="de-DE" sz="1050" b="1" dirty="0" err="1">
+                <a:solidFill>
+                  <a:schemeClr val="tx1"/>
+                </a:solidFill>
+              </a:rPr>
+              <a:t>data</a:t>
+            </a:r>
+            <a:endParaRPr lang="de-DE" sz="1050" b="1" dirty="0">
+              <a:solidFill>
+                <a:schemeClr val="tx1"/>
+              </a:solidFill>
+            </a:endParaRPr>
+          </a:p>
+        </p:txBody>
+      </p:sp>
+      <p:sp>
+        <p:nvSpPr>
+          <p:cNvPr id="42" name="Rounded Rectangle 20">
+            <a:extLst>
+              <a:ext uri="{FF2B5EF4-FFF2-40B4-BE49-F238E27FC236}">
+                <a16:creationId xmlns:a16="http://schemas.microsoft.com/office/drawing/2014/main" id="{AE42DF40-AC92-4F5A-AF12-4BA0510C6AAC}"/>
+              </a:ext>
+            </a:extLst>
+          </p:cNvPr>
+          <p:cNvSpPr/>
+          <p:nvPr/>
+        </p:nvSpPr>
+        <p:spPr>
+          <a:xfrm>
+            <a:off x="895353" y="2702977"/>
+            <a:ext cx="1280729" cy="1137336"/>
+          </a:xfrm>
+          <a:prstGeom prst="roundRect">
+            <a:avLst/>
+          </a:prstGeom>
+          <a:solidFill>
+            <a:schemeClr val="tx2">
+              <a:lumMod val="75000"/>
+              <a:alpha val="60000"/>
+            </a:schemeClr>
+          </a:solidFill>
+          <a:ln>
+            <a:noFill/>
+          </a:ln>
+        </p:spPr>
+        <p:style>
+          <a:lnRef idx="2">
+            <a:schemeClr val="accent1">
+              <a:shade val="50000"/>
+            </a:schemeClr>
+          </a:lnRef>
+          <a:fillRef idx="1">
+            <a:schemeClr val="accent1"/>
+          </a:fillRef>
+          <a:effectRef idx="0">
+            <a:schemeClr val="accent1"/>
+          </a:effectRef>
+          <a:fontRef idx="minor">
+            <a:schemeClr val="lt1"/>
+          </a:fontRef>
+        </p:style>
+        <p:txBody>
+          <a:bodyPr rtlCol="0" anchor="ctr"/>
+          <a:lstStyle/>
+          <a:p>
+            <a:pPr algn="ctr"/>
+            <a:r>
+              <a:rPr lang="de-DE" sz="1050" b="1" dirty="0">
+                <a:solidFill>
+                  <a:schemeClr val="bg1"/>
+                </a:solidFill>
+              </a:rPr>
+              <a:t>R </a:t>
+            </a:r>
+            <a:r>
+              <a:rPr lang="de-DE" sz="1050" b="1" dirty="0" err="1">
+                <a:solidFill>
+                  <a:schemeClr val="bg1"/>
+                </a:solidFill>
+              </a:rPr>
+              <a:t>librar</a:t>
+            </a:r>
+            <a:r>
+              <a:rPr lang="en-DE" sz="1050" b="1" dirty="0" err="1">
+                <a:solidFill>
+                  <a:schemeClr val="bg1"/>
+                </a:solidFill>
+              </a:rPr>
+              <a:t>i</a:t>
+            </a:r>
+            <a:r>
+              <a:rPr lang="en-US" sz="1050" b="1" dirty="0">
+                <a:solidFill>
+                  <a:schemeClr val="bg1"/>
+                </a:solidFill>
+              </a:rPr>
+              <a:t>e</a:t>
+            </a:r>
+            <a:r>
+              <a:rPr lang="en-DE" sz="1050" b="1" dirty="0">
+                <a:solidFill>
+                  <a:schemeClr val="bg1"/>
+                </a:solidFill>
+              </a:rPr>
+              <a:t>s</a:t>
+            </a:r>
+            <a:r>
+              <a:rPr lang="de-DE" sz="1050" b="1" dirty="0">
+                <a:solidFill>
+                  <a:schemeClr val="bg1"/>
+                </a:solidFill>
+              </a:rPr>
+              <a:t>: </a:t>
+            </a:r>
+            <a:r>
+              <a:rPr lang="de-DE" sz="1050" b="1" dirty="0" err="1">
+                <a:solidFill>
+                  <a:schemeClr val="bg1"/>
+                </a:solidFill>
+              </a:rPr>
+              <a:t>mrmagpie</a:t>
+            </a:r>
+            <a:r>
+              <a:rPr lang="de-DE" sz="1050" b="1" dirty="0">
+                <a:solidFill>
+                  <a:schemeClr val="bg1"/>
+                </a:solidFill>
+              </a:rPr>
+              <a:t>, </a:t>
+            </a:r>
+            <a:r>
+              <a:rPr lang="de-DE" sz="1050" b="1" dirty="0" err="1">
+                <a:solidFill>
+                  <a:schemeClr val="bg1"/>
+                </a:solidFill>
+              </a:rPr>
+              <a:t>mrland</a:t>
+            </a:r>
+            <a:r>
+              <a:rPr lang="de-DE" sz="1050" b="1" dirty="0">
+                <a:solidFill>
+                  <a:schemeClr val="bg1"/>
+                </a:solidFill>
+              </a:rPr>
+              <a:t>, </a:t>
+            </a:r>
+            <a:r>
+              <a:rPr lang="de-DE" sz="1050" b="1" dirty="0" err="1">
+                <a:solidFill>
+                  <a:schemeClr val="bg1"/>
+                </a:solidFill>
+              </a:rPr>
+              <a:t>mrlandcore</a:t>
+            </a:r>
+            <a:r>
+              <a:rPr lang="de-DE" sz="1050" b="1" dirty="0">
+                <a:solidFill>
+                  <a:schemeClr val="bg1"/>
+                </a:solidFill>
+              </a:rPr>
+              <a:t>, </a:t>
+            </a:r>
+            <a:r>
+              <a:rPr lang="de-DE" sz="1050" b="1" dirty="0" err="1">
+                <a:solidFill>
+                  <a:schemeClr val="bg1"/>
+                </a:solidFill>
+              </a:rPr>
+              <a:t>mrsoil</a:t>
+            </a:r>
+            <a:r>
+              <a:rPr lang="de-DE" sz="1050" b="1" dirty="0">
+                <a:solidFill>
+                  <a:schemeClr val="bg1"/>
+                </a:solidFill>
+              </a:rPr>
+              <a:t>, </a:t>
+            </a:r>
+            <a:r>
+              <a:rPr lang="de-DE" sz="1050" b="1" dirty="0" err="1">
+                <a:solidFill>
+                  <a:schemeClr val="bg1"/>
+                </a:solidFill>
+              </a:rPr>
+              <a:t>mrwater</a:t>
+            </a:r>
+            <a:r>
+              <a:rPr lang="de-DE" sz="1050" b="1" dirty="0">
+                <a:solidFill>
+                  <a:schemeClr val="bg1"/>
+                </a:solidFill>
+              </a:rPr>
+              <a:t>, </a:t>
+            </a:r>
+            <a:r>
+              <a:rPr lang="de-DE" sz="1050" b="1" dirty="0" err="1">
+                <a:solidFill>
+                  <a:schemeClr val="bg1"/>
+                </a:solidFill>
+              </a:rPr>
+              <a:t>mrfactors</a:t>
+            </a:r>
+            <a:r>
+              <a:rPr lang="de-DE" sz="1050" b="1" dirty="0">
+                <a:solidFill>
+                  <a:schemeClr val="bg1"/>
+                </a:solidFill>
+              </a:rPr>
+              <a:t>.</a:t>
+            </a:r>
+          </a:p>
+        </p:txBody>
+      </p:sp>
+      <p:sp>
+        <p:nvSpPr>
+          <p:cNvPr id="44" name="TextBox 43">
+            <a:extLst>
+              <a:ext uri="{FF2B5EF4-FFF2-40B4-BE49-F238E27FC236}">
+                <a16:creationId xmlns:a16="http://schemas.microsoft.com/office/drawing/2014/main" id="{8C9C5F6A-766E-4C31-BC2A-9274A3D6B464}"/>
+              </a:ext>
+            </a:extLst>
+          </p:cNvPr>
+          <p:cNvSpPr txBox="1"/>
+          <p:nvPr/>
+        </p:nvSpPr>
+        <p:spPr>
+          <a:xfrm>
+            <a:off x="778032" y="3705702"/>
+            <a:ext cx="1844145" cy="784830"/>
+          </a:xfrm>
+          <a:prstGeom prst="rect">
+            <a:avLst/>
+          </a:prstGeom>
+          <a:noFill/>
+        </p:spPr>
+        <p:txBody>
+          <a:bodyPr wrap="square" rtlCol="0">
+            <a:spAutoFit/>
+          </a:bodyPr>
+          <a:lstStyle/>
+          <a:p>
+            <a:endParaRPr lang="de-DE" sz="900" b="1" dirty="0"/>
+          </a:p>
+          <a:p>
+            <a:r>
+              <a:rPr lang="de-DE" sz="900" dirty="0">
+                <a:hlinkClick r:id="rId3"/>
+              </a:rPr>
+              <a:t>https://github.com/pik-piam/</a:t>
+            </a:r>
+            <a:endParaRPr lang="de-DE" sz="900" dirty="0"/>
+          </a:p>
+          <a:p>
+            <a:r>
+              <a:rPr lang="en-DE" sz="900" dirty="0" err="1"/>
+              <a:t>mr</a:t>
+            </a:r>
+            <a:r>
+              <a:rPr lang="en-US" sz="900" dirty="0"/>
+              <a:t>m</a:t>
+            </a:r>
+            <a:r>
+              <a:rPr lang="en-DE" sz="900" dirty="0"/>
+              <a:t>a</a:t>
+            </a:r>
+            <a:r>
+              <a:rPr lang="en-US" sz="900" dirty="0"/>
+              <a:t>g</a:t>
+            </a:r>
+            <a:r>
+              <a:rPr lang="en-DE" sz="900" dirty="0"/>
+              <a:t>p</a:t>
+            </a:r>
+            <a:r>
+              <a:rPr lang="en-US" sz="900" dirty="0" err="1"/>
+              <a:t>i</a:t>
+            </a:r>
+            <a:r>
+              <a:rPr lang="en-DE" sz="900" dirty="0"/>
+              <a:t>e: </a:t>
+            </a:r>
+            <a:r>
+              <a:rPr lang="en-US" sz="900" dirty="0" err="1">
+                <a:hlinkClick r:id="rId4" tooltip="fullCELLULARMAGPIE.R"/>
+              </a:rPr>
+              <a:t>fullCELLULARMAGPIE.R</a:t>
+            </a:r>
+            <a:endParaRPr lang="en-US" sz="900" dirty="0"/>
+          </a:p>
+          <a:p>
+            <a:r>
+              <a:rPr lang="en-DE" sz="900" dirty="0" err="1"/>
+              <a:t>mr</a:t>
+            </a:r>
+            <a:r>
+              <a:rPr lang="en-US" sz="900" dirty="0"/>
+              <a:t>l</a:t>
+            </a:r>
+            <a:r>
+              <a:rPr lang="en-DE" sz="900" dirty="0"/>
+              <a:t>a</a:t>
+            </a:r>
+            <a:r>
+              <a:rPr lang="en-US" sz="900" dirty="0"/>
+              <a:t>n</a:t>
+            </a:r>
+            <a:r>
+              <a:rPr lang="en-DE" sz="900" dirty="0"/>
+              <a:t>d: </a:t>
+            </a:r>
+            <a:r>
+              <a:rPr lang="en-US" sz="900" dirty="0" err="1">
+                <a:hlinkClick r:id="rId5" tooltip="fullMAGPIE.R"/>
+              </a:rPr>
+              <a:t>fullMAGPIE.R</a:t>
+            </a:r>
+            <a:endParaRPr lang="en-US" sz="900" dirty="0"/>
+          </a:p>
+          <a:p>
+            <a:endParaRPr lang="de-DE" sz="900" dirty="0"/>
+          </a:p>
+        </p:txBody>
+      </p:sp>
+      <p:sp>
+        <p:nvSpPr>
+          <p:cNvPr id="45" name="TextBox 44">
+            <a:extLst>
+              <a:ext uri="{FF2B5EF4-FFF2-40B4-BE49-F238E27FC236}">
+                <a16:creationId xmlns:a16="http://schemas.microsoft.com/office/drawing/2014/main" id="{9DCF1179-E0D7-45F9-AED8-C2616A872DE9}"/>
+              </a:ext>
+            </a:extLst>
+          </p:cNvPr>
+          <p:cNvSpPr txBox="1"/>
+          <p:nvPr/>
+        </p:nvSpPr>
+        <p:spPr>
+          <a:xfrm>
+            <a:off x="1797582" y="934139"/>
+            <a:ext cx="1475399" cy="923330"/>
+          </a:xfrm>
+          <a:prstGeom prst="rect">
+            <a:avLst/>
+          </a:prstGeom>
+          <a:noFill/>
+        </p:spPr>
+        <p:txBody>
+          <a:bodyPr wrap="square" rtlCol="0">
+            <a:spAutoFit/>
+          </a:bodyPr>
+          <a:lstStyle/>
+          <a:p>
+            <a:pPr algn="ctr"/>
+            <a:r>
+              <a:rPr lang="de-DE" b="1" dirty="0" err="1"/>
+              <a:t>Pre-processing</a:t>
+            </a:r>
+            <a:r>
+              <a:rPr lang="de-DE" b="1" dirty="0"/>
+              <a:t> </a:t>
+            </a:r>
+          </a:p>
+          <a:p>
+            <a:pPr algn="ctr"/>
+            <a:r>
+              <a:rPr lang="de-DE" b="1" dirty="0"/>
+              <a:t>(R-Code)</a:t>
+            </a:r>
+          </a:p>
+        </p:txBody>
+      </p:sp>
+      <p:sp>
+        <p:nvSpPr>
+          <p:cNvPr id="46" name="TextBox 45">
+            <a:extLst>
+              <a:ext uri="{FF2B5EF4-FFF2-40B4-BE49-F238E27FC236}">
+                <a16:creationId xmlns:a16="http://schemas.microsoft.com/office/drawing/2014/main" id="{60E72577-CC3B-473E-93C6-2A836B024FE6}"/>
+              </a:ext>
+            </a:extLst>
+          </p:cNvPr>
+          <p:cNvSpPr txBox="1"/>
+          <p:nvPr/>
+        </p:nvSpPr>
+        <p:spPr>
+          <a:xfrm>
+            <a:off x="5311426" y="1013983"/>
+            <a:ext cx="1475399" cy="646331"/>
+          </a:xfrm>
+          <a:prstGeom prst="rect">
+            <a:avLst/>
+          </a:prstGeom>
+          <a:noFill/>
+        </p:spPr>
+        <p:txBody>
+          <a:bodyPr wrap="square" rtlCol="0">
+            <a:spAutoFit/>
+          </a:bodyPr>
+          <a:lstStyle/>
+          <a:p>
+            <a:pPr algn="ctr"/>
+            <a:r>
+              <a:rPr lang="de-DE" b="1" dirty="0" err="1"/>
+              <a:t>Optimization</a:t>
+            </a:r>
+            <a:r>
+              <a:rPr lang="de-DE" b="1" dirty="0"/>
+              <a:t> </a:t>
+            </a:r>
+          </a:p>
+          <a:p>
+            <a:pPr algn="ctr"/>
+            <a:r>
+              <a:rPr lang="de-DE" b="1" dirty="0"/>
+              <a:t>(GAMS-Code)</a:t>
+            </a:r>
+          </a:p>
+        </p:txBody>
+      </p:sp>
+      <p:sp>
+        <p:nvSpPr>
+          <p:cNvPr id="47" name="TextBox 46">
+            <a:extLst>
+              <a:ext uri="{FF2B5EF4-FFF2-40B4-BE49-F238E27FC236}">
+                <a16:creationId xmlns:a16="http://schemas.microsoft.com/office/drawing/2014/main" id="{E0E142E1-5C82-4EDA-BF72-F7178A8E2079}"/>
+              </a:ext>
+            </a:extLst>
+          </p:cNvPr>
+          <p:cNvSpPr txBox="1"/>
+          <p:nvPr/>
+        </p:nvSpPr>
+        <p:spPr>
+          <a:xfrm>
+            <a:off x="8525763" y="887792"/>
+            <a:ext cx="1475399" cy="923330"/>
+          </a:xfrm>
+          <a:prstGeom prst="rect">
+            <a:avLst/>
+          </a:prstGeom>
+          <a:noFill/>
+        </p:spPr>
+        <p:txBody>
+          <a:bodyPr wrap="square" rtlCol="0">
+            <a:spAutoFit/>
+          </a:bodyPr>
+          <a:lstStyle/>
+          <a:p>
+            <a:pPr algn="ctr"/>
+            <a:r>
+              <a:rPr lang="de-DE" b="1" dirty="0"/>
+              <a:t>Post-</a:t>
+            </a:r>
+            <a:r>
+              <a:rPr lang="de-DE" b="1" dirty="0" err="1"/>
+              <a:t>processing</a:t>
+            </a:r>
+            <a:r>
+              <a:rPr lang="de-DE" b="1" dirty="0"/>
+              <a:t> (R-Code)</a:t>
+            </a:r>
+          </a:p>
+        </p:txBody>
+      </p:sp>
+      <p:cxnSp>
+        <p:nvCxnSpPr>
+          <p:cNvPr id="48" name="Straight Arrow Connector 47">
+            <a:extLst>
+              <a:ext uri="{FF2B5EF4-FFF2-40B4-BE49-F238E27FC236}">
+                <a16:creationId xmlns:a16="http://schemas.microsoft.com/office/drawing/2014/main" id="{6D673EE9-C33B-4525-8D1C-504C6447BE29}"/>
+              </a:ext>
+            </a:extLst>
+          </p:cNvPr>
+          <p:cNvCxnSpPr/>
+          <p:nvPr/>
+        </p:nvCxnSpPr>
+        <p:spPr>
+          <a:xfrm>
+            <a:off x="7466591" y="4518486"/>
+            <a:ext cx="1136329" cy="0"/>
+          </a:xfrm>
+          <a:prstGeom prst="straightConnector1">
+            <a:avLst/>
+          </a:prstGeom>
+          <a:ln>
+            <a:solidFill>
+              <a:schemeClr val="tx1"/>
+            </a:solidFill>
+            <a:tailEnd type="triangle"/>
+          </a:ln>
+        </p:spPr>
+        <p:style>
+          <a:lnRef idx="1">
+            <a:schemeClr val="accent1"/>
+          </a:lnRef>
+          <a:fillRef idx="0">
+            <a:schemeClr val="accent1"/>
+          </a:fillRef>
+          <a:effectRef idx="0">
+            <a:schemeClr val="accent1"/>
+          </a:effectRef>
+          <a:fontRef idx="minor">
+            <a:schemeClr val="tx1"/>
+          </a:fontRef>
+        </p:style>
+      </p:cxnSp>
+      <p:sp>
+        <p:nvSpPr>
+          <p:cNvPr id="49" name="Rounded Rectangle 35">
+            <a:extLst>
+              <a:ext uri="{FF2B5EF4-FFF2-40B4-BE49-F238E27FC236}">
+                <a16:creationId xmlns:a16="http://schemas.microsoft.com/office/drawing/2014/main" id="{7E85BF95-D55C-4BCD-B13B-C56D1BBF99B7}"/>
+              </a:ext>
+            </a:extLst>
+          </p:cNvPr>
+          <p:cNvSpPr/>
+          <p:nvPr/>
+        </p:nvSpPr>
+        <p:spPr>
+          <a:xfrm>
+            <a:off x="8822499" y="4291315"/>
+            <a:ext cx="923544" cy="560642"/>
+          </a:xfrm>
+          <a:prstGeom prst="roundRect">
+            <a:avLst/>
+          </a:prstGeom>
+          <a:solidFill>
+            <a:schemeClr val="accent1">
+              <a:lumMod val="75000"/>
+              <a:alpha val="60000"/>
+            </a:schemeClr>
+          </a:solidFill>
+          <a:ln>
+            <a:noFill/>
+          </a:ln>
+        </p:spPr>
+        <p:style>
+          <a:lnRef idx="2">
+            <a:schemeClr val="accent1">
+              <a:shade val="50000"/>
+            </a:schemeClr>
+          </a:lnRef>
+          <a:fillRef idx="1">
+            <a:schemeClr val="accent1"/>
+          </a:fillRef>
+          <a:effectRef idx="0">
+            <a:schemeClr val="accent1"/>
+          </a:effectRef>
+          <a:fontRef idx="minor">
+            <a:schemeClr val="lt1"/>
+          </a:fontRef>
+        </p:style>
+        <p:txBody>
+          <a:bodyPr rtlCol="0" anchor="ctr"/>
+          <a:lstStyle/>
+          <a:p>
+            <a:pPr algn="ctr"/>
+            <a:r>
+              <a:rPr lang="de-DE" sz="1050" b="1" dirty="0" err="1">
+                <a:solidFill>
+                  <a:schemeClr val="tx1"/>
+                </a:solidFill>
+              </a:rPr>
+              <a:t>fulldata.gdx</a:t>
+            </a:r>
+            <a:endParaRPr lang="de-DE" sz="1050" b="1" dirty="0">
+              <a:solidFill>
+                <a:schemeClr val="tx1"/>
+              </a:solidFill>
+            </a:endParaRPr>
+          </a:p>
+        </p:txBody>
+      </p:sp>
+      <p:sp>
+        <p:nvSpPr>
+          <p:cNvPr id="50" name="Rounded Rectangle 36">
+            <a:extLst>
+              <a:ext uri="{FF2B5EF4-FFF2-40B4-BE49-F238E27FC236}">
+                <a16:creationId xmlns:a16="http://schemas.microsoft.com/office/drawing/2014/main" id="{2FF063F4-4CCB-433D-B4C7-EC20105619DF}"/>
+              </a:ext>
+            </a:extLst>
+          </p:cNvPr>
+          <p:cNvSpPr/>
+          <p:nvPr/>
+        </p:nvSpPr>
+        <p:spPr>
+          <a:xfrm>
+            <a:off x="8841347" y="2227241"/>
+            <a:ext cx="923544" cy="560642"/>
+          </a:xfrm>
+          <a:prstGeom prst="roundRect">
+            <a:avLst/>
+          </a:prstGeom>
+          <a:solidFill>
+            <a:schemeClr val="accent1">
+              <a:lumMod val="75000"/>
+              <a:alpha val="60000"/>
+            </a:schemeClr>
+          </a:solidFill>
+          <a:ln>
+            <a:noFill/>
+          </a:ln>
+        </p:spPr>
+        <p:style>
+          <a:lnRef idx="2">
+            <a:schemeClr val="accent1">
+              <a:shade val="50000"/>
+            </a:schemeClr>
+          </a:lnRef>
+          <a:fillRef idx="1">
+            <a:schemeClr val="accent1"/>
+          </a:fillRef>
+          <a:effectRef idx="0">
+            <a:schemeClr val="accent1"/>
+          </a:effectRef>
+          <a:fontRef idx="minor">
+            <a:schemeClr val="lt1"/>
+          </a:fontRef>
+        </p:style>
+        <p:txBody>
+          <a:bodyPr rtlCol="0" anchor="ctr"/>
+          <a:lstStyle/>
+          <a:p>
+            <a:pPr algn="ctr"/>
+            <a:r>
+              <a:rPr lang="de-DE" sz="1050" b="1" dirty="0" err="1">
+                <a:solidFill>
+                  <a:schemeClr val="tx1"/>
+                </a:solidFill>
+              </a:rPr>
+              <a:t>output</a:t>
+            </a:r>
+            <a:r>
+              <a:rPr lang="de-DE" sz="1050" b="1" dirty="0">
+                <a:solidFill>
+                  <a:schemeClr val="tx1"/>
+                </a:solidFill>
+              </a:rPr>
+              <a:t> </a:t>
+            </a:r>
+            <a:r>
+              <a:rPr lang="de-DE" sz="1050" b="1" dirty="0" err="1">
+                <a:solidFill>
+                  <a:schemeClr val="tx1"/>
+                </a:solidFill>
+              </a:rPr>
+              <a:t>table</a:t>
+            </a:r>
+            <a:endParaRPr lang="de-DE" sz="1050" b="1" dirty="0">
+              <a:solidFill>
+                <a:schemeClr val="tx1"/>
+              </a:solidFill>
+            </a:endParaRPr>
+          </a:p>
+          <a:p>
+            <a:pPr algn="ctr"/>
+            <a:r>
+              <a:rPr lang="de-DE" sz="1050" b="1" dirty="0">
+                <a:solidFill>
+                  <a:schemeClr val="tx1"/>
+                </a:solidFill>
+              </a:rPr>
+              <a:t>.</a:t>
+            </a:r>
+            <a:r>
+              <a:rPr lang="de-DE" sz="1050" b="1" dirty="0" err="1">
+                <a:solidFill>
+                  <a:schemeClr val="tx1"/>
+                </a:solidFill>
+              </a:rPr>
+              <a:t>mif</a:t>
+            </a:r>
+            <a:endParaRPr lang="de-DE" sz="1050" b="1" dirty="0">
+              <a:solidFill>
+                <a:schemeClr val="tx1"/>
+              </a:solidFill>
+            </a:endParaRPr>
+          </a:p>
+        </p:txBody>
+      </p:sp>
+      <p:cxnSp>
+        <p:nvCxnSpPr>
+          <p:cNvPr id="51" name="Straight Arrow Connector 50">
+            <a:extLst>
+              <a:ext uri="{FF2B5EF4-FFF2-40B4-BE49-F238E27FC236}">
+                <a16:creationId xmlns:a16="http://schemas.microsoft.com/office/drawing/2014/main" id="{CE0EB912-E6FB-4BD2-9ECB-3FD3DBE1F43C}"/>
+              </a:ext>
+            </a:extLst>
+          </p:cNvPr>
+          <p:cNvCxnSpPr/>
+          <p:nvPr/>
+        </p:nvCxnSpPr>
+        <p:spPr>
+          <a:xfrm flipV="1">
+            <a:off x="9286446" y="2941972"/>
+            <a:ext cx="16675" cy="1196874"/>
+          </a:xfrm>
+          <a:prstGeom prst="straightConnector1">
+            <a:avLst/>
+          </a:prstGeom>
+          <a:ln>
+            <a:solidFill>
+              <a:schemeClr val="tx1"/>
+            </a:solidFill>
+            <a:tailEnd type="triangle"/>
+          </a:ln>
+        </p:spPr>
+        <p:style>
+          <a:lnRef idx="1">
+            <a:schemeClr val="accent1"/>
+          </a:lnRef>
+          <a:fillRef idx="0">
+            <a:schemeClr val="accent1"/>
+          </a:fillRef>
+          <a:effectRef idx="0">
+            <a:schemeClr val="accent1"/>
+          </a:effectRef>
+          <a:fontRef idx="minor">
+            <a:schemeClr val="tx1"/>
+          </a:fontRef>
+        </p:style>
+      </p:cxnSp>
+      <p:sp>
+        <p:nvSpPr>
+          <p:cNvPr id="52" name="Rounded Rectangle 22">
+            <a:extLst>
+              <a:ext uri="{FF2B5EF4-FFF2-40B4-BE49-F238E27FC236}">
+                <a16:creationId xmlns:a16="http://schemas.microsoft.com/office/drawing/2014/main" id="{13104EC6-E352-4C8A-B089-1439928B5450}"/>
+              </a:ext>
+            </a:extLst>
+          </p:cNvPr>
+          <p:cNvSpPr/>
+          <p:nvPr/>
+        </p:nvSpPr>
+        <p:spPr>
+          <a:xfrm>
+            <a:off x="8123067" y="3069696"/>
+            <a:ext cx="1043130" cy="521208"/>
+          </a:xfrm>
+          <a:prstGeom prst="roundRect">
+            <a:avLst/>
+          </a:prstGeom>
+          <a:solidFill>
+            <a:schemeClr val="tx2">
+              <a:lumMod val="75000"/>
+              <a:alpha val="60000"/>
+            </a:schemeClr>
+          </a:solidFill>
+          <a:ln>
+            <a:noFill/>
+          </a:ln>
+        </p:spPr>
+        <p:style>
+          <a:lnRef idx="2">
+            <a:schemeClr val="accent1">
+              <a:shade val="50000"/>
+            </a:schemeClr>
+          </a:lnRef>
+          <a:fillRef idx="1">
+            <a:schemeClr val="accent1"/>
+          </a:fillRef>
+          <a:effectRef idx="0">
+            <a:schemeClr val="accent1"/>
+          </a:effectRef>
+          <a:fontRef idx="minor">
+            <a:schemeClr val="lt1"/>
+          </a:fontRef>
+        </p:style>
+        <p:txBody>
+          <a:bodyPr rtlCol="0" anchor="ctr"/>
+          <a:lstStyle/>
+          <a:p>
+            <a:pPr algn="ctr"/>
+            <a:r>
+              <a:rPr lang="de-DE" sz="1050" b="1" dirty="0">
+                <a:solidFill>
+                  <a:schemeClr val="bg1"/>
+                </a:solidFill>
+              </a:rPr>
+              <a:t>R </a:t>
+            </a:r>
+            <a:r>
+              <a:rPr lang="de-DE" sz="1050" b="1" dirty="0" err="1">
+                <a:solidFill>
+                  <a:schemeClr val="bg1"/>
+                </a:solidFill>
+              </a:rPr>
+              <a:t>library</a:t>
+            </a:r>
+            <a:r>
+              <a:rPr lang="de-DE" sz="1050" b="1" dirty="0">
+                <a:solidFill>
+                  <a:schemeClr val="bg1"/>
+                </a:solidFill>
+              </a:rPr>
+              <a:t>: </a:t>
+            </a:r>
+            <a:r>
+              <a:rPr lang="en-DE" sz="1050" b="1" dirty="0">
+                <a:solidFill>
+                  <a:schemeClr val="bg1"/>
+                </a:solidFill>
+              </a:rPr>
+              <a:t>magpie4</a:t>
+            </a:r>
+            <a:endParaRPr lang="de-DE" sz="1050" b="1" dirty="0">
+              <a:solidFill>
+                <a:schemeClr val="bg1"/>
+              </a:solidFill>
+            </a:endParaRPr>
+          </a:p>
+        </p:txBody>
+      </p:sp>
+      <p:sp>
+        <p:nvSpPr>
+          <p:cNvPr id="53" name="TextBox 52">
+            <a:extLst>
+              <a:ext uri="{FF2B5EF4-FFF2-40B4-BE49-F238E27FC236}">
+                <a16:creationId xmlns:a16="http://schemas.microsoft.com/office/drawing/2014/main" id="{D0E2DE50-1ACB-4EDC-8F46-EE383DAFB77D}"/>
+              </a:ext>
+            </a:extLst>
+          </p:cNvPr>
+          <p:cNvSpPr txBox="1"/>
+          <p:nvPr/>
+        </p:nvSpPr>
+        <p:spPr>
+          <a:xfrm>
+            <a:off x="8123068" y="3621564"/>
+            <a:ext cx="1080135" cy="646331"/>
+          </a:xfrm>
+          <a:prstGeom prst="rect">
+            <a:avLst/>
+          </a:prstGeom>
+          <a:noFill/>
+        </p:spPr>
+        <p:txBody>
+          <a:bodyPr wrap="square" rtlCol="0">
+            <a:spAutoFit/>
+          </a:bodyPr>
+          <a:lstStyle/>
+          <a:p>
+            <a:r>
+              <a:rPr lang="de-DE" sz="900" dirty="0">
+                <a:hlinkClick r:id="rId6"/>
+              </a:rPr>
+              <a:t>https://github.com/pik-piam/magpie4</a:t>
+            </a:r>
+            <a:endParaRPr lang="de-DE" sz="900" dirty="0"/>
+          </a:p>
+          <a:p>
+            <a:r>
+              <a:rPr lang="de-DE" sz="900" dirty="0" err="1"/>
+              <a:t>getReport.R</a:t>
+            </a:r>
+            <a:endParaRPr lang="de-DE" sz="900" dirty="0"/>
+          </a:p>
+        </p:txBody>
+      </p:sp>
+      <p:sp>
+        <p:nvSpPr>
+          <p:cNvPr id="54" name="TextBox 53">
+            <a:extLst>
+              <a:ext uri="{FF2B5EF4-FFF2-40B4-BE49-F238E27FC236}">
+                <a16:creationId xmlns:a16="http://schemas.microsoft.com/office/drawing/2014/main" id="{3D3A2742-45C8-4B9A-8D09-6406FE7E1247}"/>
+              </a:ext>
+            </a:extLst>
+          </p:cNvPr>
+          <p:cNvSpPr txBox="1"/>
+          <p:nvPr/>
+        </p:nvSpPr>
+        <p:spPr>
+          <a:xfrm>
+            <a:off x="5546397" y="5149106"/>
+            <a:ext cx="1080135" cy="369332"/>
+          </a:xfrm>
+          <a:prstGeom prst="rect">
+            <a:avLst/>
+          </a:prstGeom>
+          <a:noFill/>
+        </p:spPr>
+        <p:txBody>
+          <a:bodyPr wrap="square" rtlCol="0">
+            <a:spAutoFit/>
+          </a:bodyPr>
+          <a:lstStyle/>
+          <a:p>
+            <a:r>
+              <a:rPr lang="de-DE" sz="900" dirty="0" err="1"/>
+              <a:t>output</a:t>
+            </a:r>
+            <a:r>
+              <a:rPr lang="de-DE" sz="900" dirty="0"/>
+              <a:t>/…/</a:t>
+            </a:r>
+            <a:r>
+              <a:rPr lang="de-DE" sz="900" dirty="0" err="1"/>
+              <a:t>full.gms</a:t>
+            </a:r>
+            <a:endParaRPr lang="de-DE" sz="900" dirty="0"/>
+          </a:p>
+          <a:p>
+            <a:endParaRPr lang="de-DE" sz="900" dirty="0"/>
+          </a:p>
+        </p:txBody>
+      </p:sp>
+      <p:sp>
+        <p:nvSpPr>
+          <p:cNvPr id="55" name="Rounded Rectangle 27">
+            <a:extLst>
+              <a:ext uri="{FF2B5EF4-FFF2-40B4-BE49-F238E27FC236}">
+                <a16:creationId xmlns:a16="http://schemas.microsoft.com/office/drawing/2014/main" id="{E8080301-25DD-49E4-AAE1-8B6EDBE7346D}"/>
+              </a:ext>
+            </a:extLst>
+          </p:cNvPr>
+          <p:cNvSpPr/>
+          <p:nvPr/>
+        </p:nvSpPr>
+        <p:spPr>
+          <a:xfrm>
+            <a:off x="5299133" y="2036227"/>
+            <a:ext cx="1593734" cy="1033469"/>
+          </a:xfrm>
+          <a:prstGeom prst="roundRect">
+            <a:avLst/>
+          </a:prstGeom>
+          <a:solidFill>
+            <a:schemeClr val="tx2">
+              <a:lumMod val="75000"/>
+              <a:alpha val="60000"/>
+            </a:schemeClr>
+          </a:solidFill>
+          <a:ln>
+            <a:noFill/>
+          </a:ln>
+        </p:spPr>
+        <p:style>
+          <a:lnRef idx="2">
+            <a:schemeClr val="accent1">
+              <a:shade val="50000"/>
+            </a:schemeClr>
+          </a:lnRef>
+          <a:fillRef idx="1">
+            <a:schemeClr val="accent1"/>
+          </a:fillRef>
+          <a:effectRef idx="0">
+            <a:schemeClr val="accent1"/>
+          </a:effectRef>
+          <a:fontRef idx="minor">
+            <a:schemeClr val="lt1"/>
+          </a:fontRef>
+        </p:style>
+        <p:txBody>
+          <a:bodyPr rtlCol="0" anchor="ctr"/>
+          <a:lstStyle/>
+          <a:p>
+            <a:pPr algn="ctr"/>
+            <a:r>
+              <a:rPr lang="en-DE" sz="1600" b="1" dirty="0">
+                <a:solidFill>
+                  <a:schemeClr val="bg1"/>
+                </a:solidFill>
+              </a:rPr>
+              <a:t>F</a:t>
+            </a:r>
+            <a:r>
+              <a:rPr lang="en-US" sz="1600" b="1" dirty="0">
+                <a:solidFill>
+                  <a:schemeClr val="bg1"/>
+                </a:solidFill>
+              </a:rPr>
+              <a:t>o</a:t>
+            </a:r>
+            <a:r>
+              <a:rPr lang="en-DE" sz="1600" b="1" dirty="0">
+                <a:solidFill>
+                  <a:schemeClr val="bg1"/>
+                </a:solidFill>
+              </a:rPr>
+              <a:t>o</a:t>
+            </a:r>
+            <a:r>
+              <a:rPr lang="en-US" sz="1600" b="1" dirty="0">
+                <a:solidFill>
+                  <a:schemeClr val="bg1"/>
+                </a:solidFill>
+              </a:rPr>
+              <a:t>d</a:t>
+            </a:r>
+            <a:r>
+              <a:rPr lang="en-DE" sz="1600" b="1" dirty="0">
+                <a:solidFill>
+                  <a:schemeClr val="bg1"/>
+                </a:solidFill>
+              </a:rPr>
+              <a:t> </a:t>
+            </a:r>
+            <a:r>
+              <a:rPr lang="en-US" sz="1600" b="1" dirty="0">
+                <a:solidFill>
+                  <a:schemeClr val="bg1"/>
+                </a:solidFill>
+              </a:rPr>
+              <a:t>d</a:t>
+            </a:r>
+            <a:r>
+              <a:rPr lang="en-DE" sz="1600" b="1" dirty="0">
+                <a:solidFill>
+                  <a:schemeClr val="bg1"/>
+                </a:solidFill>
+              </a:rPr>
+              <a:t>e</a:t>
+            </a:r>
+            <a:r>
+              <a:rPr lang="en-US" sz="1600" b="1" dirty="0">
+                <a:solidFill>
+                  <a:schemeClr val="bg1"/>
+                </a:solidFill>
+              </a:rPr>
+              <a:t>m</a:t>
+            </a:r>
+            <a:r>
+              <a:rPr lang="en-DE" sz="1600" b="1" dirty="0">
+                <a:solidFill>
+                  <a:schemeClr val="bg1"/>
+                </a:solidFill>
+              </a:rPr>
+              <a:t>a</a:t>
+            </a:r>
+            <a:r>
+              <a:rPr lang="en-US" sz="1600" b="1" dirty="0">
+                <a:solidFill>
+                  <a:schemeClr val="bg1"/>
+                </a:solidFill>
+              </a:rPr>
+              <a:t>n</a:t>
+            </a:r>
+            <a:r>
+              <a:rPr lang="en-DE" sz="1600" b="1" dirty="0">
+                <a:solidFill>
+                  <a:schemeClr val="bg1"/>
+                </a:solidFill>
+              </a:rPr>
+              <a:t>d </a:t>
+            </a:r>
+            <a:r>
+              <a:rPr lang="en-US" sz="1600" b="1" dirty="0">
+                <a:solidFill>
+                  <a:schemeClr val="bg1"/>
+                </a:solidFill>
+              </a:rPr>
+              <a:t>m</a:t>
+            </a:r>
+            <a:r>
+              <a:rPr lang="en-DE" sz="1600" b="1" dirty="0">
+                <a:solidFill>
+                  <a:schemeClr val="bg1"/>
+                </a:solidFill>
+              </a:rPr>
+              <a:t>o</a:t>
+            </a:r>
+            <a:r>
+              <a:rPr lang="en-US" sz="1600" b="1" dirty="0">
+                <a:solidFill>
+                  <a:schemeClr val="bg1"/>
+                </a:solidFill>
+              </a:rPr>
+              <a:t>d</a:t>
+            </a:r>
+            <a:r>
+              <a:rPr lang="en-DE" sz="1600" b="1" dirty="0">
+                <a:solidFill>
+                  <a:schemeClr val="bg1"/>
+                </a:solidFill>
+              </a:rPr>
+              <a:t>e</a:t>
+            </a:r>
+            <a:r>
+              <a:rPr lang="en-US" sz="1600" b="1" dirty="0">
+                <a:solidFill>
+                  <a:schemeClr val="bg1"/>
+                </a:solidFill>
+              </a:rPr>
+              <a:t>l</a:t>
+            </a:r>
+            <a:endParaRPr lang="de-DE" sz="1600" b="1" dirty="0">
+              <a:solidFill>
+                <a:schemeClr val="bg1"/>
+              </a:solidFill>
+            </a:endParaRPr>
+          </a:p>
+        </p:txBody>
+      </p:sp>
+      <p:cxnSp>
+        <p:nvCxnSpPr>
+          <p:cNvPr id="58" name="Straight Arrow Connector 57">
+            <a:extLst>
+              <a:ext uri="{FF2B5EF4-FFF2-40B4-BE49-F238E27FC236}">
+                <a16:creationId xmlns:a16="http://schemas.microsoft.com/office/drawing/2014/main" id="{3393DA14-76C0-431C-8829-12E90F0D11D0}"/>
+              </a:ext>
+            </a:extLst>
+          </p:cNvPr>
+          <p:cNvCxnSpPr/>
+          <p:nvPr/>
+        </p:nvCxnSpPr>
+        <p:spPr>
+          <a:xfrm>
+            <a:off x="3565478" y="4598573"/>
+            <a:ext cx="1136329" cy="0"/>
+          </a:xfrm>
+          <a:prstGeom prst="straightConnector1">
+            <a:avLst/>
+          </a:prstGeom>
+          <a:ln>
+            <a:solidFill>
+              <a:schemeClr val="tx1"/>
+            </a:solidFill>
+            <a:tailEnd type="triangle"/>
+          </a:ln>
+        </p:spPr>
+        <p:style>
+          <a:lnRef idx="1">
+            <a:schemeClr val="accent1"/>
+          </a:lnRef>
+          <a:fillRef idx="0">
+            <a:schemeClr val="accent1"/>
+          </a:fillRef>
+          <a:effectRef idx="0">
+            <a:schemeClr val="accent1"/>
+          </a:effectRef>
+          <a:fontRef idx="minor">
+            <a:schemeClr val="tx1"/>
+          </a:fontRef>
+        </p:style>
+      </p:cxnSp>
+      <p:sp>
+        <p:nvSpPr>
+          <p:cNvPr id="59" name="Rounded Rectangle 15">
+            <a:extLst>
+              <a:ext uri="{FF2B5EF4-FFF2-40B4-BE49-F238E27FC236}">
+                <a16:creationId xmlns:a16="http://schemas.microsoft.com/office/drawing/2014/main" id="{A6806462-F4B3-448A-9928-86AAA08451F8}"/>
+              </a:ext>
+            </a:extLst>
+          </p:cNvPr>
+          <p:cNvSpPr/>
+          <p:nvPr/>
+        </p:nvSpPr>
+        <p:spPr>
+          <a:xfrm>
+            <a:off x="1378363" y="5172605"/>
+            <a:ext cx="1894618" cy="717753"/>
+          </a:xfrm>
+          <a:prstGeom prst="roundRect">
+            <a:avLst/>
+          </a:prstGeom>
+          <a:solidFill>
+            <a:schemeClr val="accent1">
+              <a:lumMod val="75000"/>
+              <a:alpha val="60000"/>
+            </a:schemeClr>
+          </a:solidFill>
+          <a:ln>
+            <a:noFill/>
+          </a:ln>
+        </p:spPr>
+        <p:style>
+          <a:lnRef idx="2">
+            <a:schemeClr val="accent1">
+              <a:shade val="50000"/>
+            </a:schemeClr>
+          </a:lnRef>
+          <a:fillRef idx="1">
+            <a:schemeClr val="accent1"/>
+          </a:fillRef>
+          <a:effectRef idx="0">
+            <a:schemeClr val="accent1"/>
+          </a:effectRef>
+          <a:fontRef idx="minor">
+            <a:schemeClr val="lt1"/>
+          </a:fontRef>
+        </p:style>
+        <p:txBody>
+          <a:bodyPr rtlCol="0" anchor="ctr"/>
+          <a:lstStyle/>
+          <a:p>
+            <a:pPr algn="ctr"/>
+            <a:r>
+              <a:rPr lang="en-US" sz="1050" b="1" dirty="0">
+                <a:solidFill>
+                  <a:schemeClr val="tx1"/>
+                </a:solidFill>
+              </a:rPr>
+              <a:t>Global and other input data</a:t>
+            </a:r>
+            <a:r>
+              <a:rPr lang="en-DE" sz="1050" b="1" dirty="0">
+                <a:solidFill>
+                  <a:schemeClr val="tx1"/>
+                </a:solidFill>
+              </a:rPr>
+              <a:t> (“</a:t>
+            </a:r>
+            <a:r>
+              <a:rPr lang="en-US" sz="1050" b="1" dirty="0" err="1">
+                <a:solidFill>
+                  <a:schemeClr val="tx1"/>
+                </a:solidFill>
+              </a:rPr>
+              <a:t>additional_data_rev</a:t>
+            </a:r>
+            <a:r>
+              <a:rPr lang="en-DE" sz="1050" b="1" dirty="0">
+                <a:solidFill>
+                  <a:schemeClr val="tx1"/>
+                </a:solidFill>
+              </a:rPr>
+              <a:t>x</a:t>
+            </a:r>
+            <a:r>
+              <a:rPr lang="en-US" sz="1050" b="1" dirty="0">
+                <a:solidFill>
+                  <a:schemeClr val="tx1"/>
+                </a:solidFill>
+              </a:rPr>
+              <a:t>.</a:t>
+            </a:r>
+            <a:r>
+              <a:rPr lang="en-US" sz="1050" b="1" dirty="0" err="1">
+                <a:solidFill>
+                  <a:schemeClr val="tx1"/>
+                </a:solidFill>
+              </a:rPr>
+              <a:t>tgz</a:t>
+            </a:r>
+            <a:r>
+              <a:rPr lang="en-DE" sz="1050" b="1" dirty="0">
+                <a:solidFill>
+                  <a:schemeClr val="tx1"/>
+                </a:solidFill>
+              </a:rPr>
+              <a:t>”)</a:t>
+            </a:r>
+            <a:endParaRPr lang="de-DE" sz="1050" b="1" dirty="0">
+              <a:solidFill>
+                <a:schemeClr val="tx1"/>
+              </a:solidFill>
+            </a:endParaRPr>
+          </a:p>
+        </p:txBody>
+      </p:sp>
+      <p:sp>
+        <p:nvSpPr>
+          <p:cNvPr id="60" name="TextBox 59">
+            <a:extLst>
+              <a:ext uri="{FF2B5EF4-FFF2-40B4-BE49-F238E27FC236}">
+                <a16:creationId xmlns:a16="http://schemas.microsoft.com/office/drawing/2014/main" id="{6CCB58C3-3EEB-4472-8CD8-B8FE12103290}"/>
+              </a:ext>
+            </a:extLst>
+          </p:cNvPr>
+          <p:cNvSpPr txBox="1"/>
+          <p:nvPr/>
+        </p:nvSpPr>
+        <p:spPr>
+          <a:xfrm flipH="1">
+            <a:off x="3609792" y="4641471"/>
+            <a:ext cx="1278102" cy="769441"/>
+          </a:xfrm>
+          <a:prstGeom prst="rect">
+            <a:avLst/>
+          </a:prstGeom>
+          <a:solidFill>
+            <a:srgbClr val="F8F8F8"/>
+          </a:solidFill>
+        </p:spPr>
+        <p:txBody>
+          <a:bodyPr wrap="square" rtlCol="0">
+            <a:spAutoFit/>
+          </a:bodyPr>
+          <a:lstStyle/>
+          <a:p>
+            <a:r>
+              <a:rPr lang="de-DE" sz="1100" dirty="0"/>
+              <a:t>Do</a:t>
+            </a:r>
+            <a:r>
+              <a:rPr lang="en-DE" sz="1100" dirty="0"/>
+              <a:t>w</a:t>
+            </a:r>
+            <a:r>
+              <a:rPr lang="de-DE" sz="1100" dirty="0"/>
+              <a:t>n</a:t>
+            </a:r>
+            <a:r>
+              <a:rPr lang="en-DE" sz="1100" dirty="0"/>
+              <a:t>l</a:t>
+            </a:r>
+            <a:r>
+              <a:rPr lang="de-DE" sz="1100" dirty="0"/>
+              <a:t>o</a:t>
+            </a:r>
+            <a:r>
+              <a:rPr lang="en-DE" sz="1100" dirty="0"/>
+              <a:t>a</a:t>
+            </a:r>
+            <a:r>
+              <a:rPr lang="de-DE" sz="1100" dirty="0"/>
+              <a:t>d</a:t>
+            </a:r>
+            <a:r>
+              <a:rPr lang="en-DE" sz="1100" dirty="0"/>
+              <a:t>e</a:t>
+            </a:r>
+            <a:r>
+              <a:rPr lang="de-DE" sz="1100" dirty="0"/>
+              <a:t>d</a:t>
+            </a:r>
+            <a:r>
+              <a:rPr lang="en-DE" sz="1100" dirty="0"/>
+              <a:t> </a:t>
+            </a:r>
+            <a:r>
+              <a:rPr lang="de-DE" sz="1100" dirty="0"/>
+              <a:t>a</a:t>
+            </a:r>
+            <a:r>
+              <a:rPr lang="en-DE" sz="1100" dirty="0"/>
+              <a:t>n</a:t>
+            </a:r>
+            <a:r>
+              <a:rPr lang="de-DE" sz="1100" dirty="0"/>
+              <a:t>d</a:t>
+            </a:r>
+            <a:r>
+              <a:rPr lang="en-DE" sz="1100" dirty="0"/>
+              <a:t> </a:t>
+            </a:r>
+            <a:r>
+              <a:rPr lang="de-DE" sz="1100" dirty="0"/>
+              <a:t>d</a:t>
+            </a:r>
+            <a:r>
+              <a:rPr lang="en-DE" sz="1100" dirty="0" err="1"/>
+              <a:t>i</a:t>
+            </a:r>
+            <a:r>
+              <a:rPr lang="de-DE" sz="1100" dirty="0"/>
+              <a:t>s</a:t>
+            </a:r>
+            <a:r>
+              <a:rPr lang="en-DE" sz="1100" dirty="0"/>
+              <a:t>t</a:t>
+            </a:r>
+            <a:r>
+              <a:rPr lang="de-DE" sz="1100" dirty="0"/>
+              <a:t>r</a:t>
+            </a:r>
+            <a:r>
+              <a:rPr lang="en-DE" sz="1100" dirty="0" err="1"/>
+              <a:t>i</a:t>
+            </a:r>
+            <a:r>
+              <a:rPr lang="de-DE" sz="1100" dirty="0"/>
+              <a:t>b</a:t>
+            </a:r>
+            <a:r>
+              <a:rPr lang="en-DE" sz="1100" dirty="0"/>
+              <a:t>u</a:t>
+            </a:r>
+            <a:r>
+              <a:rPr lang="de-DE" sz="1100" dirty="0"/>
+              <a:t>t</a:t>
+            </a:r>
+            <a:r>
+              <a:rPr lang="en-DE" sz="1100" dirty="0"/>
+              <a:t>e</a:t>
+            </a:r>
+            <a:r>
+              <a:rPr lang="de-DE" sz="1100" dirty="0"/>
+              <a:t>d</a:t>
+            </a:r>
+            <a:r>
+              <a:rPr lang="en-DE" sz="1100" dirty="0"/>
+              <a:t> </a:t>
+            </a:r>
+            <a:r>
+              <a:rPr lang="de-DE" sz="1100" dirty="0"/>
+              <a:t>w</a:t>
+            </a:r>
+            <a:r>
+              <a:rPr lang="en-DE" sz="1100" dirty="0"/>
+              <a:t>h</a:t>
+            </a:r>
+            <a:r>
+              <a:rPr lang="de-DE" sz="1100" dirty="0"/>
+              <a:t>e</a:t>
+            </a:r>
+            <a:r>
+              <a:rPr lang="en-DE" sz="1100" dirty="0"/>
+              <a:t>n </a:t>
+            </a:r>
+            <a:r>
+              <a:rPr lang="de-DE" sz="1100" dirty="0" err="1"/>
+              <a:t>running</a:t>
+            </a:r>
+            <a:r>
+              <a:rPr lang="de-DE" sz="1100" dirty="0"/>
+              <a:t> </a:t>
+            </a:r>
+            <a:r>
+              <a:rPr lang="de-DE" sz="1100" dirty="0" err="1"/>
+              <a:t>the</a:t>
+            </a:r>
+            <a:r>
+              <a:rPr lang="de-DE" sz="1100" dirty="0"/>
+              <a:t> </a:t>
+            </a:r>
+            <a:r>
+              <a:rPr lang="de-DE" sz="1100" dirty="0" err="1"/>
+              <a:t>model</a:t>
+            </a:r>
+            <a:r>
+              <a:rPr lang="de-DE" sz="1100" dirty="0"/>
+              <a:t> </a:t>
+            </a:r>
+            <a:r>
+              <a:rPr lang="de-DE" sz="1100" dirty="0" err="1"/>
+              <a:t>for</a:t>
+            </a:r>
+            <a:r>
+              <a:rPr lang="de-DE" sz="1100" dirty="0"/>
+              <a:t> </a:t>
+            </a:r>
+            <a:r>
+              <a:rPr lang="de-DE" sz="1100" dirty="0" err="1"/>
+              <a:t>the</a:t>
+            </a:r>
+            <a:r>
+              <a:rPr lang="de-DE" sz="1100" dirty="0"/>
+              <a:t> </a:t>
+            </a:r>
+            <a:r>
+              <a:rPr lang="de-DE" sz="1100" dirty="0" err="1"/>
+              <a:t>first</a:t>
+            </a:r>
+            <a:r>
+              <a:rPr lang="de-DE" sz="1100" dirty="0"/>
+              <a:t> time</a:t>
+            </a:r>
+            <a:endParaRPr lang="en-DE" dirty="0"/>
+          </a:p>
+        </p:txBody>
+      </p:sp>
+      <p:cxnSp>
+        <p:nvCxnSpPr>
+          <p:cNvPr id="61" name="Straight Arrow Connector 60">
+            <a:extLst>
+              <a:ext uri="{FF2B5EF4-FFF2-40B4-BE49-F238E27FC236}">
+                <a16:creationId xmlns:a16="http://schemas.microsoft.com/office/drawing/2014/main" id="{AA7E19DF-2ACA-4D95-AFB0-2BAA4236CA6D}"/>
+              </a:ext>
+            </a:extLst>
+          </p:cNvPr>
+          <p:cNvCxnSpPr/>
+          <p:nvPr/>
+        </p:nvCxnSpPr>
+        <p:spPr>
+          <a:xfrm>
+            <a:off x="3591398" y="5500552"/>
+            <a:ext cx="1136329" cy="0"/>
+          </a:xfrm>
+          <a:prstGeom prst="straightConnector1">
+            <a:avLst/>
+          </a:prstGeom>
+          <a:ln>
+            <a:solidFill>
+              <a:schemeClr val="tx1"/>
+            </a:solidFill>
+            <a:tailEnd type="triangle"/>
+          </a:ln>
+        </p:spPr>
+        <p:style>
+          <a:lnRef idx="1">
+            <a:schemeClr val="accent1"/>
+          </a:lnRef>
+          <a:fillRef idx="0">
+            <a:schemeClr val="accent1"/>
+          </a:fillRef>
+          <a:effectRef idx="0">
+            <a:schemeClr val="accent1"/>
+          </a:effectRef>
+          <a:fontRef idx="minor">
+            <a:schemeClr val="tx1"/>
+          </a:fontRef>
+        </p:style>
+      </p:cxnSp>
+      <p:cxnSp>
+        <p:nvCxnSpPr>
+          <p:cNvPr id="66" name="Straight Arrow Connector 65">
+            <a:extLst>
+              <a:ext uri="{FF2B5EF4-FFF2-40B4-BE49-F238E27FC236}">
+                <a16:creationId xmlns:a16="http://schemas.microsoft.com/office/drawing/2014/main" id="{C3677674-FDE9-4AA8-80DA-F7433326FB3C}"/>
+              </a:ext>
+            </a:extLst>
+          </p:cNvPr>
+          <p:cNvCxnSpPr/>
+          <p:nvPr/>
+        </p:nvCxnSpPr>
+        <p:spPr>
+          <a:xfrm>
+            <a:off x="6086475" y="3137588"/>
+            <a:ext cx="0" cy="582823"/>
+          </a:xfrm>
+          <a:prstGeom prst="straightConnector1">
+            <a:avLst/>
+          </a:prstGeom>
+          <a:ln w="28575">
+            <a:solidFill>
+              <a:schemeClr val="tx1"/>
+            </a:solidFill>
+            <a:headEnd type="triangle"/>
+            <a:tailEnd type="triangle"/>
+          </a:ln>
+        </p:spPr>
+        <p:style>
+          <a:lnRef idx="1">
+            <a:schemeClr val="accent1"/>
+          </a:lnRef>
+          <a:fillRef idx="0">
+            <a:schemeClr val="accent1"/>
+          </a:fillRef>
+          <a:effectRef idx="0">
+            <a:schemeClr val="accent1"/>
+          </a:effectRef>
+          <a:fontRef idx="minor">
+            <a:schemeClr val="tx1"/>
+          </a:fontRef>
+        </p:style>
+      </p:cxnSp>
+    </p:spTree>
+    <p:extLst>
+      <p:ext uri="{BB962C8B-B14F-4D97-AF65-F5344CB8AC3E}">
+        <p14:creationId xmlns:p14="http://schemas.microsoft.com/office/powerpoint/2010/main" val="327518213"/>
+      </p:ext>
+    </p:extLst>
+  </p:cSld>
+  <p:clrMapOvr>
+    <a:masterClrMapping/>
+  </p:clrMapOvr>
+  <mc:AlternateContent xmlns:mc="http://schemas.openxmlformats.org/markup-compatibility/2006" xmlns:p14="http://schemas.microsoft.com/office/powerpoint/2010/main">
+    <mc:Choice Requires="p14">
+      <p:transition spd="med" p14:dur="700">
+        <p:fade/>
+      </p:transition>
+    </mc:Choice>
+    <mc:Fallback xmlns="">
+      <p:transition spd="med">
+        <p:fade/>
+      </p:transition>
+    </mc:Fallback>
+  </mc:AlternateContent>
+</p:sld>
+</file>
+
+<file path=ppt/slides/slide12.xml><?xml version="1.0" encoding="utf-8"?>
+<p:sld xmlns:a="http://schemas.openxmlformats.org/drawingml/2006/main" xmlns:r="http://schemas.openxmlformats.org/officeDocument/2006/relationships" xmlns:p="http://schemas.openxmlformats.org/presentationml/2006/main">
+  <p:cSld>
+    <p:spTree>
+      <p:nvGrpSpPr>
+        <p:cNvPr id="1" name=""/>
+        <p:cNvGrpSpPr/>
+        <p:nvPr/>
+      </p:nvGrpSpPr>
+      <p:grpSpPr>
+        <a:xfrm>
+          <a:off x="0" y="0"/>
+          <a:ext cx="0" cy="0"/>
+          <a:chOff x="0" y="0"/>
+          <a:chExt cx="0" cy="0"/>
+        </a:xfrm>
+      </p:grpSpPr>
+      <p:sp>
+        <p:nvSpPr>
+          <p:cNvPr id="3" name="Title 2">
+            <a:extLst>
+              <a:ext uri="{FF2B5EF4-FFF2-40B4-BE49-F238E27FC236}">
+                <a16:creationId xmlns:a16="http://schemas.microsoft.com/office/drawing/2014/main" id="{F8A07FAD-A3A4-4B9F-9E99-0D81C84AAE87}"/>
+              </a:ext>
+            </a:extLst>
+          </p:cNvPr>
+          <p:cNvSpPr>
+            <a:spLocks noGrp="1"/>
+          </p:cNvSpPr>
+          <p:nvPr>
+            <p:ph type="title"/>
+          </p:nvPr>
+        </p:nvSpPr>
+        <p:spPr/>
+        <p:txBody>
+          <a:bodyPr>
+            <a:normAutofit/>
+          </a:bodyPr>
+          <a:lstStyle/>
+          <a:p>
+            <a:r>
+              <a:rPr lang="en-US" sz="3200" dirty="0"/>
+              <a:t>Brief exercise</a:t>
+            </a:r>
+            <a:endParaRPr lang="en-DE" sz="3200" dirty="0"/>
+          </a:p>
+        </p:txBody>
+      </p:sp>
+      <p:sp>
+        <p:nvSpPr>
+          <p:cNvPr id="4" name="Date Placeholder 3">
+            <a:extLst>
+              <a:ext uri="{FF2B5EF4-FFF2-40B4-BE49-F238E27FC236}">
+                <a16:creationId xmlns:a16="http://schemas.microsoft.com/office/drawing/2014/main" id="{B1457F58-C5CA-4326-A73B-34EF6DB5C2B3}"/>
+              </a:ext>
+            </a:extLst>
+          </p:cNvPr>
+          <p:cNvSpPr>
+            <a:spLocks noGrp="1"/>
+          </p:cNvSpPr>
+          <p:nvPr>
+            <p:ph type="dt" sz="half" idx="10"/>
+          </p:nvPr>
+        </p:nvSpPr>
+        <p:spPr>
+          <a:xfrm>
+            <a:off x="442912" y="6335518"/>
+            <a:ext cx="2743200" cy="365125"/>
+          </a:xfrm>
+        </p:spPr>
+        <p:txBody>
+          <a:bodyPr/>
+          <a:lstStyle/>
+          <a:p>
+            <a:r>
+              <a:rPr lang="en-DE" dirty="0"/>
+              <a:t>16.06.2026</a:t>
+            </a:r>
+          </a:p>
+        </p:txBody>
+      </p:sp>
+      <p:sp>
+        <p:nvSpPr>
+          <p:cNvPr id="5" name="Footer Placeholder 4">
+            <a:extLst>
+              <a:ext uri="{FF2B5EF4-FFF2-40B4-BE49-F238E27FC236}">
+                <a16:creationId xmlns:a16="http://schemas.microsoft.com/office/drawing/2014/main" id="{08E27823-4349-40E0-A2FC-763FD8AFDA00}"/>
+              </a:ext>
+            </a:extLst>
+          </p:cNvPr>
+          <p:cNvSpPr>
+            <a:spLocks noGrp="1"/>
+          </p:cNvSpPr>
+          <p:nvPr>
+            <p:ph type="ftr" sz="quarter" idx="11"/>
+          </p:nvPr>
+        </p:nvSpPr>
+        <p:spPr>
+          <a:xfrm>
+            <a:off x="4038600" y="6356350"/>
+            <a:ext cx="4114800" cy="365125"/>
+          </a:xfrm>
+        </p:spPr>
+        <p:txBody>
+          <a:bodyPr/>
+          <a:lstStyle/>
+          <a:p>
+            <a:r>
+              <a:rPr lang="en-US"/>
+              <a:t>MAgPIE26 Workshop &amp; Stories </a:t>
+            </a:r>
+            <a:endParaRPr lang="en-DE" dirty="0"/>
+          </a:p>
+        </p:txBody>
+      </p:sp>
+      <p:sp>
+        <p:nvSpPr>
+          <p:cNvPr id="6" name="Slide Number Placeholder 5">
+            <a:extLst>
+              <a:ext uri="{FF2B5EF4-FFF2-40B4-BE49-F238E27FC236}">
+                <a16:creationId xmlns:a16="http://schemas.microsoft.com/office/drawing/2014/main" id="{F58EB891-045F-42BA-97B1-2EB49A950F12}"/>
+              </a:ext>
+            </a:extLst>
+          </p:cNvPr>
+          <p:cNvSpPr>
+            <a:spLocks noGrp="1"/>
+          </p:cNvSpPr>
+          <p:nvPr>
+            <p:ph type="sldNum" sz="quarter" idx="12"/>
+          </p:nvPr>
+        </p:nvSpPr>
+        <p:spPr>
+          <a:xfrm>
+            <a:off x="8610600" y="6356350"/>
+            <a:ext cx="2743200" cy="365125"/>
+          </a:xfrm>
+        </p:spPr>
+        <p:txBody>
+          <a:bodyPr/>
+          <a:lstStyle/>
+          <a:p>
+            <a:fld id="{92195745-EC9D-4E4A-A6A9-D21AC3595199}" type="slidenum">
+              <a:rPr lang="en-DE" smtClean="0"/>
+              <a:t>12</a:t>
+            </a:fld>
             <a:endParaRPr lang="en-DE" dirty="0"/>
           </a:p>
         </p:txBody>
@@ -6763,7 +9692,7 @@
         <p:spPr>
           <a:xfrm>
             <a:off x="360000" y="1200669"/>
-            <a:ext cx="10348105" cy="4832092"/>
+            <a:ext cx="10348105" cy="4401205"/>
           </a:xfrm>
           <a:prstGeom prst="rect">
             <a:avLst/>
@@ -6892,7 +9821,47 @@
                   </a:schemeClr>
                 </a:solidFill>
               </a:rPr>
-              <a:t>14_yield</a:t>
+              <a:t>1</a:t>
+            </a:r>
+            <a:r>
+              <a:rPr lang="en-DE" sz="2800" b="1" dirty="0">
+                <a:solidFill>
+                  <a:schemeClr val="accent2">
+                    <a:lumMod val="75000"/>
+                  </a:schemeClr>
+                </a:solidFill>
+              </a:rPr>
+              <a:t>3</a:t>
+            </a:r>
+            <a:r>
+              <a:rPr lang="de-DE" sz="2800" b="1" dirty="0">
+                <a:solidFill>
+                  <a:schemeClr val="accent2">
+                    <a:lumMod val="75000"/>
+                  </a:schemeClr>
+                </a:solidFill>
+              </a:rPr>
+              <a:t>_</a:t>
+            </a:r>
+            <a:r>
+              <a:rPr lang="en-DE" sz="2800" b="1" dirty="0">
+                <a:solidFill>
+                  <a:schemeClr val="accent2">
+                    <a:lumMod val="75000"/>
+                  </a:schemeClr>
+                </a:solidFill>
+              </a:rPr>
+              <a:t>t</a:t>
+            </a:r>
+            <a:r>
+              <a:rPr lang="en-US" sz="2800" b="1" dirty="0">
+                <a:solidFill>
+                  <a:schemeClr val="accent2">
+                    <a:lumMod val="75000"/>
+                  </a:schemeClr>
+                </a:solidFill>
+              </a:rPr>
+              <a:t>c</a:t>
             </a:r>
             <a:r>
               <a:rPr lang="de-DE" sz="2800" dirty="0"/>
@@ -6967,7 +9936,7 @@
                   </a:schemeClr>
                 </a:solidFill>
               </a:rPr>
-              <a:t>managementcalib_aug19 </a:t>
+              <a:t>endo_jan22 </a:t>
             </a:r>
             <a:r>
               <a:rPr lang="de-DE" sz="2800" dirty="0" err="1"/>
@@ -7034,13 +10003,7 @@
               <a:t> </a:t>
             </a:r>
             <a:r>
-              <a:rPr lang="de-DE" sz="2800" b="1" dirty="0" err="1">
-                <a:solidFill>
-                  <a:schemeClr val="accent2">
-                    <a:lumMod val="75000"/>
-                  </a:schemeClr>
-                </a:solidFill>
-              </a:rPr>
+              <a:rPr lang="de-DE" sz="2800" dirty="0" err="1"/>
               <a:t>only</a:t>
             </a:r>
             <a:r>
@@ -7105,19 +10068,39 @@
               <a:t>A </a:t>
             </a:r>
             <a:r>
-              <a:rPr lang="de-DE" sz="2800" dirty="0" err="1"/>
-              <a:t>processing</a:t>
-            </a:r>
-            <a:r>
-              <a:rPr lang="de-DE" sz="2800" dirty="0"/>
-              <a:t> </a:t>
-            </a:r>
-            <a:r>
-              <a:rPr lang="de-DE" sz="2800" dirty="0" err="1"/>
-              <a:t>parameter</a:t>
-            </a:r>
-            <a:r>
-              <a:rPr lang="de-DE" sz="2800" dirty="0"/>
+              <a:rPr lang="en-DE" sz="2800" dirty="0"/>
+              <a:t>v</a:t>
+            </a:r>
+            <a:r>
+              <a:rPr lang="en-US" sz="2800" dirty="0"/>
+              <a:t>a</a:t>
+            </a:r>
+            <a:r>
+              <a:rPr lang="en-DE" sz="2800" dirty="0"/>
+              <a:t>r</a:t>
+            </a:r>
+            <a:r>
+              <a:rPr lang="en-US" sz="2800" dirty="0" err="1"/>
+              <a:t>i</a:t>
+            </a:r>
+            <a:r>
+              <a:rPr lang="en-DE" sz="2800" dirty="0"/>
+              <a:t>a</a:t>
+            </a:r>
+            <a:r>
+              <a:rPr lang="en-US" sz="2800" dirty="0"/>
+              <a:t>b</a:t>
+            </a:r>
+            <a:r>
+              <a:rPr lang="en-DE" sz="2800" dirty="0"/>
+              <a:t>l</a:t>
+            </a:r>
+            <a:r>
+              <a:rPr lang="en-US" sz="2800" dirty="0"/>
+              <a:t>e</a:t>
+            </a:r>
+            <a:r>
+              <a:rPr lang="en-DE" sz="2800" dirty="0"/>
               <a:t> </a:t>
             </a:r>
             <a:r>
@@ -7126,17 +10109,7 @@
             </a:r>
             <a:r>
               <a:rPr lang="de-DE" sz="2800" dirty="0"/>
-              <a:t> </a:t>
-            </a:r>
-            <a:r>
-              <a:rPr lang="de-DE" sz="2800" b="1" dirty="0">
-                <a:solidFill>
-                  <a:schemeClr val="accent2">
-                    <a:lumMod val="75000"/>
-                  </a:schemeClr>
-                </a:solidFill>
-              </a:rPr>
-              <a:t>in </a:t>
+              <a:t> in </a:t>
             </a:r>
             <a:r>
               <a:rPr lang="de-DE" sz="2800" dirty="0" err="1"/>
@@ -7219,7 +10192,7 @@
           <p:nvPr/>
         </p:nvPicPr>
         <p:blipFill>
-          <a:blip r:embed="rId2"/>
+          <a:blip r:embed="rId3"/>
           <a:stretch>
             <a:fillRect/>
           </a:stretch>
@@ -7259,7 +10232,7 @@
 </p:sld>
 </file>
 
-<file path=ppt/slides/slide12.xml><?xml version="1.0" encoding="utf-8"?>
+<file path=ppt/slides/slide13.xml><?xml version="1.0" encoding="utf-8"?>
 <p:sld xmlns:a="http://schemas.openxmlformats.org/drawingml/2006/main" xmlns:r="http://schemas.openxmlformats.org/officeDocument/2006/relationships" xmlns:p="http://schemas.openxmlformats.org/presentationml/2006/main">
   <p:cSld>
     <p:spTree>
@@ -7330,16 +10303,6 @@
           <a:bodyPr/>
           <a:lstStyle/>
           <a:p>
-            <a:r>
-              <a:rPr lang="en-DE" dirty="0" err="1"/>
-              <a:t>weindl</a:t>
-            </a:r>
-            <a:r>
-              <a:rPr lang="de-DE" dirty="0"/>
-              <a:t>@pik-potsdam.de</a:t>
-            </a:r>
-          </a:p>
-          <a:p>
             <a:endParaRPr lang="de-DE" dirty="0"/>
           </a:p>
         </p:txBody>
@@ -7362,7 +10325,7 @@
             <a:fld id="{55B2154A-758F-4F3D-BA88-70B68E799C5A}" type="slidenum">
               <a:rPr lang="de-DE" smtClean="0"/>
               <a:pPr/>
-              <a:t>12</a:t>
+              <a:t>13</a:t>
             </a:fld>
             <a:endParaRPr lang="de-DE" dirty="0"/>
           </a:p>
@@ -7370,10 +10333,39 @@
       </p:sp>
       <p:sp>
         <p:nvSpPr>
-          <p:cNvPr id="2" name="Date Placeholder 1">
-            <a:extLst>
-              <a:ext uri="{FF2B5EF4-FFF2-40B4-BE49-F238E27FC236}">
-                <a16:creationId xmlns:a16="http://schemas.microsoft.com/office/drawing/2014/main" id="{9758412F-E896-4BCB-A41F-1101B824D7D9}"/>
+          <p:cNvPr id="3" name="Footer Placeholder 2">
+            <a:extLst>
+              <a:ext uri="{FF2B5EF4-FFF2-40B4-BE49-F238E27FC236}">
+                <a16:creationId xmlns:a16="http://schemas.microsoft.com/office/drawing/2014/main" id="{40F83CAC-EECF-43B8-ADEC-FBC016714771}"/>
+              </a:ext>
+            </a:extLst>
+          </p:cNvPr>
+          <p:cNvSpPr>
+            <a:spLocks noGrp="1"/>
+          </p:cNvSpPr>
+          <p:nvPr>
+            <p:ph type="ftr" sz="quarter" idx="11"/>
+          </p:nvPr>
+        </p:nvSpPr>
+        <p:spPr/>
+        <p:txBody>
+          <a:bodyPr/>
+          <a:lstStyle/>
+          <a:p>
+            <a:r>
+              <a:rPr lang="en-US"/>
+              <a:t>MAgPIE26 Workshop &amp; Stories </a:t>
+            </a:r>
+            <a:endParaRPr lang="en-DE"/>
+          </a:p>
+        </p:txBody>
+      </p:sp>
+      <p:sp>
+        <p:nvSpPr>
+          <p:cNvPr id="9" name="Date Placeholder 3">
+            <a:extLst>
+              <a:ext uri="{FF2B5EF4-FFF2-40B4-BE49-F238E27FC236}">
+                <a16:creationId xmlns:a16="http://schemas.microsoft.com/office/drawing/2014/main" id="{B410190D-6DD3-4031-8F00-25AC108AA24B}"/>
               </a:ext>
             </a:extLst>
           </p:cNvPr>
@@ -7384,44 +10376,20 @@
             <p:ph type="dt" sz="half" idx="10"/>
           </p:nvPr>
         </p:nvSpPr>
-        <p:spPr/>
+        <p:spPr>
+          <a:xfrm>
+            <a:off x="442912" y="6335518"/>
+            <a:ext cx="2743200" cy="365125"/>
+          </a:xfrm>
+        </p:spPr>
         <p:txBody>
           <a:bodyPr/>
           <a:lstStyle/>
           <a:p>
             <a:r>
-              <a:rPr lang="en-DE"/>
-              <a:t>16.06.2025</a:t>
-            </a:r>
-          </a:p>
-        </p:txBody>
-      </p:sp>
-      <p:sp>
-        <p:nvSpPr>
-          <p:cNvPr id="3" name="Footer Placeholder 2">
-            <a:extLst>
-              <a:ext uri="{FF2B5EF4-FFF2-40B4-BE49-F238E27FC236}">
-                <a16:creationId xmlns:a16="http://schemas.microsoft.com/office/drawing/2014/main" id="{40F83CAC-EECF-43B8-ADEC-FBC016714771}"/>
-              </a:ext>
-            </a:extLst>
-          </p:cNvPr>
-          <p:cNvSpPr>
-            <a:spLocks noGrp="1"/>
-          </p:cNvSpPr>
-          <p:nvPr>
-            <p:ph type="ftr" sz="quarter" idx="11"/>
-          </p:nvPr>
-        </p:nvSpPr>
-        <p:spPr/>
-        <p:txBody>
-          <a:bodyPr/>
-          <a:lstStyle/>
-          <a:p>
-            <a:r>
-              <a:rPr lang="en-US"/>
-              <a:t>MAgPIE25 Workshop &amp; Stories </a:t>
-            </a:r>
-            <a:endParaRPr lang="en-DE"/>
+              <a:rPr lang="en-DE" dirty="0"/>
+              <a:t>16.06.2026</a:t>
+            </a:r>
           </a:p>
         </p:txBody>
       </p:sp>
@@ -7617,6 +10585,25 @@
               </a:rPr>
               <a:t>Coding etiquette: Variable and parameter naming</a:t>
             </a:r>
+            <a:endParaRPr lang="en-DE" sz="2800" dirty="0">
+              <a:solidFill>
+                <a:schemeClr val="bg1"/>
+              </a:solidFill>
+            </a:endParaRPr>
+          </a:p>
+          <a:p>
+            <a:pPr>
+              <a:buFont typeface="Arial" panose="020B0604020202020204" pitchFamily="34" charset="0"/>
+              <a:buChar char="•"/>
+            </a:pPr>
+            <a:r>
+              <a:rPr lang="en-US" sz="2800" dirty="0">
+                <a:solidFill>
+                  <a:schemeClr val="bg1"/>
+                </a:solidFill>
+              </a:rPr>
+              <a:t>MAgPIE environment: pre- and postprocessing</a:t>
+            </a:r>
           </a:p>
           <a:p>
             <a:pPr>
@@ -7662,7 +10649,7 @@
           <a:p>
             <a:r>
               <a:rPr lang="en-DE"/>
-              <a:t>16.06.2025</a:t>
+              <a:t>16.06.2026</a:t>
             </a:r>
             <a:endParaRPr lang="en-DE" dirty="0"/>
           </a:p>
@@ -7691,7 +10678,7 @@
           <a:p>
             <a:r>
               <a:rPr lang="en-US"/>
-              <a:t>MAgPIE25 Workshop &amp; Stories </a:t>
+              <a:t>MAgPIE26 Workshop &amp; Stories </a:t>
             </a:r>
             <a:endParaRPr lang="en-DE" dirty="0"/>
           </a:p>
@@ -7952,6 +10939,55 @@
                       </p:childTnLst>
                     </p:cTn>
                   </p:par>
+                  <p:par>
+                    <p:cTn id="19" fill="hold">
+                      <p:stCondLst>
+                        <p:cond delay="indefinite"/>
+                      </p:stCondLst>
+                      <p:childTnLst>
+                        <p:par>
+                          <p:cTn id="20" fill="hold">
+                            <p:stCondLst>
+                              <p:cond delay="0"/>
+                            </p:stCondLst>
+                            <p:childTnLst>
+                              <p:par>
+                                <p:cTn id="21" presetID="1" presetClass="entr" presetSubtype="0" fill="hold" nodeType="clickEffect">
+                                  <p:stCondLst>
+                                    <p:cond delay="0"/>
+                                  </p:stCondLst>
+                                  <p:childTnLst>
+                                    <p:set>
+                                      <p:cBhvr>
+                                        <p:cTn id="22" dur="1" fill="hold">
+                                          <p:stCondLst>
+                                            <p:cond delay="0"/>
+                                          </p:stCondLst>
+                                        </p:cTn>
+                                        <p:tgtEl>
+                                          <p:spTgt spid="3">
+                                            <p:txEl>
+                                              <p:pRg st="5" end="5"/>
+                                            </p:txEl>
+                                          </p:spTgt>
+                                        </p:tgtEl>
+                                        <p:attrNameLst>
+                                          <p:attrName>style.visibility</p:attrName>
+                                        </p:attrNameLst>
+                                      </p:cBhvr>
+                                      <p:to>
+                                        <p:strVal val="visible"/>
+                                      </p:to>
+                                    </p:set>
+                                  </p:childTnLst>
+                                </p:cTn>
+                              </p:par>
+                            </p:childTnLst>
+                          </p:cTn>
+                        </p:par>
+                      </p:childTnLst>
+                    </p:cTn>
+                  </p:par>
                 </p:childTnLst>
               </p:cTn>
               <p:prevCondLst>
@@ -8194,14 +11230,19 @@
             <p:ph type="dt" sz="half" idx="10"/>
           </p:nvPr>
         </p:nvSpPr>
-        <p:spPr/>
+        <p:spPr>
+          <a:xfrm>
+            <a:off x="442912" y="6335518"/>
+            <a:ext cx="2743200" cy="365125"/>
+          </a:xfrm>
+        </p:spPr>
         <p:txBody>
           <a:bodyPr/>
           <a:lstStyle/>
           <a:p>
             <a:r>
-              <a:rPr lang="en-DE"/>
-              <a:t>16.06.2025</a:t>
+              <a:rPr lang="en-DE" dirty="0"/>
+              <a:t>16.06.2026</a:t>
             </a:r>
           </a:p>
         </p:txBody>
@@ -8222,16 +11263,21 @@
             <p:ph type="ftr" sz="quarter" idx="11"/>
           </p:nvPr>
         </p:nvSpPr>
-        <p:spPr/>
+        <p:spPr>
+          <a:xfrm>
+            <a:off x="4038600" y="6356350"/>
+            <a:ext cx="4114800" cy="365125"/>
+          </a:xfrm>
+        </p:spPr>
         <p:txBody>
           <a:bodyPr/>
           <a:lstStyle/>
           <a:p>
             <a:r>
               <a:rPr lang="en-US"/>
-              <a:t>MAgPIE25 Workshop &amp; Stories </a:t>
-            </a:r>
-            <a:endParaRPr lang="en-DE"/>
+              <a:t>MAgPIE26 Workshop &amp; Stories </a:t>
+            </a:r>
+            <a:endParaRPr lang="en-DE" dirty="0"/>
           </a:p>
         </p:txBody>
       </p:sp>
@@ -8251,7 +11297,12 @@
             <p:ph type="sldNum" sz="quarter" idx="12"/>
           </p:nvPr>
         </p:nvSpPr>
-        <p:spPr/>
+        <p:spPr>
+          <a:xfrm>
+            <a:off x="8610600" y="6356350"/>
+            <a:ext cx="2743200" cy="365125"/>
+          </a:xfrm>
+        </p:spPr>
         <p:txBody>
           <a:bodyPr/>
           <a:lstStyle/>
@@ -8807,7 +11858,7 @@
           <a:p>
             <a:r>
               <a:rPr lang="en-DE"/>
-              <a:t>16.06.2025</a:t>
+              <a:t>16.06.2026</a:t>
             </a:r>
           </a:p>
         </p:txBody>
@@ -8840,7 +11891,7 @@
           <a:p>
             <a:r>
               <a:rPr lang="en-US"/>
-              <a:t>MAgPIE25 Workshop &amp; Stories </a:t>
+              <a:t>MAgPIE26 Workshop &amp; Stories </a:t>
             </a:r>
             <a:endParaRPr lang="en-DE"/>
           </a:p>
@@ -10275,8 +13326,8 @@
         </p:nvSpPr>
         <p:spPr>
           <a:xfrm>
-            <a:off x="6415629" y="5673722"/>
-            <a:ext cx="5650597" cy="338554"/>
+            <a:off x="936449" y="6012075"/>
+            <a:ext cx="6056735" cy="338554"/>
           </a:xfrm>
           <a:prstGeom prst="rect">
             <a:avLst/>
@@ -10325,31 +13376,7 @@
               <a:rPr lang="en-US" sz="1600" u="sng" dirty="0">
                 <a:hlinkClick r:id="rId5"/>
               </a:rPr>
-              <a:t>https://rse.pik-potsdam.de/doc/magpie/4.</a:t>
-            </a:r>
-            <a:r>
-              <a:rPr lang="en-DE" sz="1600" u="sng" dirty="0">
-                <a:hlinkClick r:id="rId5"/>
-              </a:rPr>
-              <a:t>10</a:t>
-            </a:r>
-            <a:r>
-              <a:rPr lang="en-US" sz="1600" u="sng" dirty="0">
-                <a:hlinkClick r:id="rId5"/>
-              </a:rPr>
-              <a:t>.</a:t>
-            </a:r>
-            <a:r>
-              <a:rPr lang="en-DE" sz="1600" u="sng" dirty="0">
-                <a:hlinkClick r:id="rId5"/>
-              </a:rPr>
-              <a:t>1</a:t>
-            </a:r>
-            <a:r>
-              <a:rPr lang="en-US" sz="1600" u="sng" dirty="0">
-                <a:hlinkClick r:id="rId5"/>
-              </a:rPr>
-              <a:t>/</a:t>
+              <a:t>https://rse.pik-potsdam.de/doc/magpie/4.14.0/</a:t>
             </a:r>
             <a:endParaRPr lang="de-DE" sz="1600" b="1" dirty="0"/>
           </a:p>
@@ -10369,7 +13396,7 @@
         </p:nvSpPr>
         <p:spPr>
           <a:xfrm>
-            <a:off x="936449" y="5128819"/>
+            <a:off x="936449" y="4924280"/>
             <a:ext cx="4929810" cy="646331"/>
           </a:xfrm>
           <a:prstGeom prst="rect">
@@ -11508,6 +14535,121 @@
       </p:grpSpPr>
       <p:sp>
         <p:nvSpPr>
+          <p:cNvPr id="4" name="Date Placeholder 3">
+            <a:extLst>
+              <a:ext uri="{FF2B5EF4-FFF2-40B4-BE49-F238E27FC236}">
+                <a16:creationId xmlns:a16="http://schemas.microsoft.com/office/drawing/2014/main" id="{B1457F58-C5CA-4326-A73B-34EF6DB5C2B3}"/>
+              </a:ext>
+            </a:extLst>
+          </p:cNvPr>
+          <p:cNvSpPr>
+            <a:spLocks noGrp="1"/>
+          </p:cNvSpPr>
+          <p:nvPr>
+            <p:ph type="dt" sz="half" idx="10"/>
+          </p:nvPr>
+        </p:nvSpPr>
+        <p:spPr>
+          <a:xfrm>
+            <a:off x="442912" y="6335518"/>
+            <a:ext cx="2743200" cy="365125"/>
+          </a:xfrm>
+        </p:spPr>
+        <p:txBody>
+          <a:bodyPr/>
+          <a:lstStyle/>
+          <a:p>
+            <a:r>
+              <a:rPr lang="en-DE" dirty="0"/>
+              <a:t>16.06.2026</a:t>
+            </a:r>
+          </a:p>
+        </p:txBody>
+      </p:sp>
+      <p:sp>
+        <p:nvSpPr>
+          <p:cNvPr id="26" name="Rectangle 25">
+            <a:extLst>
+              <a:ext uri="{FF2B5EF4-FFF2-40B4-BE49-F238E27FC236}">
+                <a16:creationId xmlns:a16="http://schemas.microsoft.com/office/drawing/2014/main" id="{5CBB2934-F5D0-407E-815E-F92854059729}"/>
+              </a:ext>
+            </a:extLst>
+          </p:cNvPr>
+          <p:cNvSpPr/>
+          <p:nvPr/>
+        </p:nvSpPr>
+        <p:spPr>
+          <a:xfrm>
+            <a:off x="360000" y="6356350"/>
+            <a:ext cx="2103949" cy="340387"/>
+          </a:xfrm>
+          <a:prstGeom prst="rect">
+            <a:avLst/>
+          </a:prstGeom>
+          <a:solidFill>
+            <a:schemeClr val="bg1"/>
+          </a:solidFill>
+          <a:ln>
+            <a:noFill/>
+          </a:ln>
+        </p:spPr>
+        <p:style>
+          <a:lnRef idx="2">
+            <a:schemeClr val="accent1">
+              <a:shade val="50000"/>
+            </a:schemeClr>
+          </a:lnRef>
+          <a:fillRef idx="1">
+            <a:schemeClr val="accent1"/>
+          </a:fillRef>
+          <a:effectRef idx="0">
+            <a:schemeClr val="accent1"/>
+          </a:effectRef>
+          <a:fontRef idx="minor">
+            <a:schemeClr val="lt1"/>
+          </a:fontRef>
+        </p:style>
+        <p:txBody>
+          <a:bodyPr rtlCol="0" anchor="ctr"/>
+          <a:lstStyle/>
+          <a:p>
+            <a:pPr algn="ctr"/>
+            <a:endParaRPr lang="en-DE"/>
+          </a:p>
+        </p:txBody>
+      </p:sp>
+      <p:pic>
+        <p:nvPicPr>
+          <p:cNvPr id="8" name="Picture 7">
+            <a:extLst>
+              <a:ext uri="{FF2B5EF4-FFF2-40B4-BE49-F238E27FC236}">
+                <a16:creationId xmlns:a16="http://schemas.microsoft.com/office/drawing/2014/main" id="{A8782F17-9B4A-45D8-A7E7-BA47F2BF4D3B}"/>
+              </a:ext>
+            </a:extLst>
+          </p:cNvPr>
+          <p:cNvPicPr>
+            <a:picLocks noChangeAspect="1"/>
+          </p:cNvPicPr>
+          <p:nvPr/>
+        </p:nvPicPr>
+        <p:blipFill>
+          <a:blip r:embed="rId3"/>
+          <a:stretch>
+            <a:fillRect/>
+          </a:stretch>
+        </p:blipFill>
+        <p:spPr>
+          <a:xfrm>
+            <a:off x="863518" y="1920210"/>
+            <a:ext cx="2052439" cy="4929288"/>
+          </a:xfrm>
+          <a:prstGeom prst="rect">
+            <a:avLst/>
+          </a:prstGeom>
+        </p:spPr>
+      </p:pic>
+      <p:sp>
+        <p:nvSpPr>
           <p:cNvPr id="2" name="Content Placeholder 1">
             <a:extLst>
               <a:ext uri="{FF2B5EF4-FFF2-40B4-BE49-F238E27FC236}">
@@ -11586,7 +14728,7 @@
                     <a:lumMod val="50000"/>
                   </a:schemeClr>
                 </a:solidFill>
-                <a:hlinkClick r:id="rId3"/>
+                <a:hlinkClick r:id="rId4"/>
               </a:rPr>
               <a:t>https://github.com/magpiemodel/magpie.git</a:t>
             </a:r>
@@ -11643,34 +14785,6 @@
       </p:sp>
       <p:sp>
         <p:nvSpPr>
-          <p:cNvPr id="4" name="Date Placeholder 3">
-            <a:extLst>
-              <a:ext uri="{FF2B5EF4-FFF2-40B4-BE49-F238E27FC236}">
-                <a16:creationId xmlns:a16="http://schemas.microsoft.com/office/drawing/2014/main" id="{B1457F58-C5CA-4326-A73B-34EF6DB5C2B3}"/>
-              </a:ext>
-            </a:extLst>
-          </p:cNvPr>
-          <p:cNvSpPr>
-            <a:spLocks noGrp="1"/>
-          </p:cNvSpPr>
-          <p:nvPr>
-            <p:ph type="dt" sz="half" idx="10"/>
-          </p:nvPr>
-        </p:nvSpPr>
-        <p:spPr/>
-        <p:txBody>
-          <a:bodyPr/>
-          <a:lstStyle/>
-          <a:p>
-            <a:r>
-              <a:rPr lang="en-DE"/>
-              <a:t>16.06.2025</a:t>
-            </a:r>
-          </a:p>
-        </p:txBody>
-      </p:sp>
-      <p:sp>
-        <p:nvSpPr>
           <p:cNvPr id="5" name="Footer Placeholder 4">
             <a:extLst>
               <a:ext uri="{FF2B5EF4-FFF2-40B4-BE49-F238E27FC236}">
@@ -11685,14 +14799,19 @@
             <p:ph type="ftr" sz="quarter" idx="11"/>
           </p:nvPr>
         </p:nvSpPr>
-        <p:spPr/>
+        <p:spPr>
+          <a:xfrm>
+            <a:off x="4038600" y="6356350"/>
+            <a:ext cx="4114800" cy="365125"/>
+          </a:xfrm>
+        </p:spPr>
         <p:txBody>
           <a:bodyPr/>
           <a:lstStyle/>
           <a:p>
             <a:r>
               <a:rPr lang="en-US"/>
-              <a:t>MAgPIE25 Workshop &amp; Stories </a:t>
+              <a:t>MAgPIE26 Workshop &amp; Stories </a:t>
             </a:r>
             <a:endParaRPr lang="en-DE"/>
           </a:p>
@@ -11714,7 +14833,12 @@
             <p:ph type="sldNum" sz="quarter" idx="12"/>
           </p:nvPr>
         </p:nvSpPr>
-        <p:spPr/>
+        <p:spPr>
+          <a:xfrm>
+            <a:off x="8610600" y="6356350"/>
+            <a:ext cx="2743200" cy="365125"/>
+          </a:xfrm>
+        </p:spPr>
         <p:txBody>
           <a:bodyPr/>
           <a:lstStyle/>
@@ -11727,58 +14851,21 @@
           </a:p>
         </p:txBody>
       </p:sp>
-      <p:pic>
-        <p:nvPicPr>
-          <p:cNvPr id="7" name="Picture 6">
-            <a:extLst>
-              <a:ext uri="{FF2B5EF4-FFF2-40B4-BE49-F238E27FC236}">
-                <a16:creationId xmlns:a16="http://schemas.microsoft.com/office/drawing/2014/main" id="{9DE21963-491F-45D0-9DED-9134BE289222}"/>
-              </a:ext>
-            </a:extLst>
-          </p:cNvPr>
-          <p:cNvPicPr>
-            <a:picLocks noChangeAspect="1"/>
-          </p:cNvPicPr>
+      <p:sp>
+        <p:nvSpPr>
+          <p:cNvPr id="10" name="Rectangle 9">
+            <a:extLst>
+              <a:ext uri="{FF2B5EF4-FFF2-40B4-BE49-F238E27FC236}">
+                <a16:creationId xmlns:a16="http://schemas.microsoft.com/office/drawing/2014/main" id="{DD558CA3-0BAE-4D00-B14A-5F1704CA7613}"/>
+              </a:ext>
+            </a:extLst>
+          </p:cNvPr>
+          <p:cNvSpPr/>
           <p:nvPr/>
-        </p:nvPicPr>
-        <p:blipFill>
-          <a:blip r:embed="rId4">
-            <a:extLst>
-              <a:ext uri="{28A0092B-C50C-407E-A947-70E740481C1C}">
-                <a14:useLocalDpi xmlns:a14="http://schemas.microsoft.com/office/drawing/2010/main" val="0"/>
-              </a:ext>
-            </a:extLst>
-          </a:blip>
-          <a:stretch>
-            <a:fillRect/>
-          </a:stretch>
-        </p:blipFill>
+        </p:nvSpPr>
         <p:spPr>
           <a:xfrm>
-            <a:off x="539127" y="1895483"/>
-            <a:ext cx="4342051" cy="4577506"/>
-          </a:xfrm>
-          <a:prstGeom prst="rect">
-            <a:avLst/>
-          </a:prstGeom>
-          <a:noFill/>
-        </p:spPr>
-      </p:pic>
-      <p:sp>
-        <p:nvSpPr>
-          <p:cNvPr id="10" name="Rectangle 9">
-            <a:extLst>
-              <a:ext uri="{FF2B5EF4-FFF2-40B4-BE49-F238E27FC236}">
-                <a16:creationId xmlns:a16="http://schemas.microsoft.com/office/drawing/2014/main" id="{DD558CA3-0BAE-4D00-B14A-5F1704CA7613}"/>
-              </a:ext>
-            </a:extLst>
-          </p:cNvPr>
-          <p:cNvSpPr/>
-          <p:nvPr/>
-        </p:nvSpPr>
-        <p:spPr>
-          <a:xfrm>
-            <a:off x="604669" y="2882678"/>
+            <a:off x="604669" y="2673128"/>
             <a:ext cx="1859280" cy="152400"/>
           </a:xfrm>
           <a:prstGeom prst="rect">
@@ -11828,7 +14915,7 @@
           </p:cNvPicPr>
           <p:nvPr/>
         </p:nvPicPr>
-        <p:blipFill>
+        <p:blipFill rotWithShape="1">
           <a:blip r:embed="rId5">
             <a:extLst>
               <a:ext uri="{28A0092B-C50C-407E-A947-70E740481C1C}">
@@ -11836,14 +14923,13 @@
               </a:ext>
             </a:extLst>
           </a:blip>
-          <a:stretch>
-            <a:fillRect/>
-          </a:stretch>
+          <a:srcRect t="41607"/>
+          <a:stretch/>
         </p:blipFill>
         <p:spPr>
           <a:xfrm>
-            <a:off x="5810947" y="2481230"/>
-            <a:ext cx="4900394" cy="1989166"/>
+            <a:off x="6234006" y="1727200"/>
+            <a:ext cx="5159902" cy="2584178"/>
           </a:xfrm>
           <a:prstGeom prst="rect">
             <a:avLst/>
@@ -11867,8 +14953,8 @@
         </p:nvCxnSpPr>
         <p:spPr>
           <a:xfrm flipH="1">
-            <a:off x="451391" y="2958878"/>
-            <a:ext cx="153278" cy="1020573"/>
+            <a:off x="442912" y="2749328"/>
+            <a:ext cx="161757" cy="1230123"/>
           </a:xfrm>
           <a:prstGeom prst="line">
             <a:avLst/>
@@ -11954,7 +15040,7 @@
         </p:nvSpPr>
         <p:spPr>
           <a:xfrm>
-            <a:off x="577844" y="2601582"/>
+            <a:off x="577844" y="2312824"/>
             <a:ext cx="1859280" cy="152400"/>
           </a:xfrm>
           <a:prstGeom prst="rect">
@@ -12007,8 +15093,8 @@
         </p:nvCxnSpPr>
         <p:spPr>
           <a:xfrm>
-            <a:off x="2437124" y="2677782"/>
-            <a:ext cx="2837876" cy="1071683"/>
+            <a:off x="2437124" y="2389024"/>
+            <a:ext cx="2837876" cy="1356085"/>
           </a:xfrm>
           <a:prstGeom prst="line">
             <a:avLst/>
@@ -12108,8 +15194,8 @@
         </p:blipFill>
         <p:spPr>
           <a:xfrm>
-            <a:off x="5776073" y="2240593"/>
-            <a:ext cx="5838083" cy="1307439"/>
+            <a:off x="7093106" y="2072937"/>
+            <a:ext cx="2837876" cy="1276585"/>
           </a:xfrm>
           <a:prstGeom prst="rect">
             <a:avLst/>
@@ -12315,7 +15401,7 @@
         </p:nvSpPr>
         <p:spPr>
           <a:xfrm>
-            <a:off x="5810947" y="5410169"/>
+            <a:off x="5810947" y="5391119"/>
             <a:ext cx="5938141" cy="923330"/>
           </a:xfrm>
           <a:prstGeom prst="rect">
@@ -12643,13 +15729,13 @@
         </p:nvPicPr>
         <p:blipFill rotWithShape="1">
           <a:blip r:embed="rId7"/>
-          <a:srcRect r="58313" b="22159"/>
+          <a:srcRect r="58313" b="27995"/>
           <a:stretch/>
         </p:blipFill>
         <p:spPr>
           <a:xfrm>
             <a:off x="456846" y="4002209"/>
-            <a:ext cx="4731887" cy="1407960"/>
+            <a:ext cx="4731887" cy="1302407"/>
           </a:xfrm>
           <a:prstGeom prst="rect">
             <a:avLst/>
@@ -12694,8 +15780,8 @@
         </p:nvCxnSpPr>
         <p:spPr>
           <a:xfrm>
-            <a:off x="2463949" y="2958878"/>
-            <a:ext cx="2688781" cy="1043331"/>
+            <a:off x="2463949" y="2749328"/>
+            <a:ext cx="2733266" cy="1230123"/>
           </a:xfrm>
           <a:prstGeom prst="line">
             <a:avLst/>
@@ -12738,8 +15824,8 @@
         </p:nvCxnSpPr>
         <p:spPr>
           <a:xfrm flipH="1">
-            <a:off x="424440" y="2677782"/>
-            <a:ext cx="153404" cy="1096773"/>
+            <a:off x="411250" y="2389024"/>
+            <a:ext cx="166594" cy="1356085"/>
           </a:xfrm>
           <a:prstGeom prst="line">
             <a:avLst/>
@@ -13751,14 +16837,19 @@
             <p:ph type="dt" sz="half" idx="10"/>
           </p:nvPr>
         </p:nvSpPr>
-        <p:spPr/>
+        <p:spPr>
+          <a:xfrm>
+            <a:off x="442912" y="6335518"/>
+            <a:ext cx="2743200" cy="365125"/>
+          </a:xfrm>
+        </p:spPr>
         <p:txBody>
           <a:bodyPr/>
           <a:lstStyle/>
           <a:p>
             <a:r>
               <a:rPr lang="en-DE"/>
-              <a:t>16.06.2025</a:t>
+              <a:t>16.06.2026</a:t>
             </a:r>
           </a:p>
         </p:txBody>
@@ -13779,14 +16870,19 @@
             <p:ph type="ftr" sz="quarter" idx="11"/>
           </p:nvPr>
         </p:nvSpPr>
-        <p:spPr/>
+        <p:spPr>
+          <a:xfrm>
+            <a:off x="4038600" y="6356350"/>
+            <a:ext cx="4114800" cy="365125"/>
+          </a:xfrm>
+        </p:spPr>
         <p:txBody>
           <a:bodyPr/>
           <a:lstStyle/>
           <a:p>
             <a:r>
               <a:rPr lang="en-US"/>
-              <a:t>MAgPIE25 Workshop &amp; Stories </a:t>
+              <a:t>MAgPIE26 Workshop &amp; Stories </a:t>
             </a:r>
             <a:endParaRPr lang="en-DE"/>
           </a:p>
@@ -13808,7 +16904,12 @@
             <p:ph type="sldNum" sz="quarter" idx="12"/>
           </p:nvPr>
         </p:nvSpPr>
-        <p:spPr/>
+        <p:spPr>
+          <a:xfrm>
+            <a:off x="8610600" y="6356350"/>
+            <a:ext cx="2743200" cy="365125"/>
+          </a:xfrm>
+        </p:spPr>
         <p:txBody>
           <a:bodyPr/>
           <a:lstStyle/>
@@ -13835,7 +16936,7 @@
           </p:cNvPicPr>
           <p:nvPr/>
         </p:nvPicPr>
-        <p:blipFill>
+        <p:blipFill rotWithShape="1">
           <a:blip r:embed="rId3">
             <a:extLst>
               <a:ext uri="{28A0092B-C50C-407E-A947-70E740481C1C}">
@@ -13843,14 +16944,13 @@
               </a:ext>
             </a:extLst>
           </a:blip>
-          <a:stretch>
-            <a:fillRect/>
-          </a:stretch>
+          <a:srcRect r="54393"/>
+          <a:stretch/>
         </p:blipFill>
         <p:spPr>
           <a:xfrm>
-            <a:off x="1096500" y="2053684"/>
-            <a:ext cx="6264183" cy="1825390"/>
+            <a:off x="848851" y="2072194"/>
+            <a:ext cx="2856876" cy="1788370"/>
           </a:xfrm>
           <a:prstGeom prst="rect">
             <a:avLst/>
@@ -13871,7 +16971,7 @@
         </p:nvSpPr>
         <p:spPr>
           <a:xfrm>
-            <a:off x="6626352" y="2065285"/>
+            <a:off x="4667912" y="3087712"/>
             <a:ext cx="4458785" cy="369332"/>
           </a:xfrm>
           <a:prstGeom prst="rect">
@@ -13924,7 +17024,7 @@
         </p:nvSpPr>
         <p:spPr>
           <a:xfrm>
-            <a:off x="6626350" y="2666097"/>
+            <a:off x="4667913" y="2247965"/>
             <a:ext cx="4458785" cy="646331"/>
           </a:xfrm>
           <a:prstGeom prst="rect">
@@ -13976,7 +17076,7 @@
         </p:nvSpPr>
         <p:spPr>
           <a:xfrm>
-            <a:off x="6626351" y="3420661"/>
+            <a:off x="4667911" y="3695529"/>
             <a:ext cx="4458785" cy="646331"/>
           </a:xfrm>
           <a:prstGeom prst="rect">
@@ -14013,7 +17113,7 @@
                   <a:srgbClr val="C00000"/>
                 </a:solidFill>
               </a:rPr>
-              <a:t>modules.gms</a:t>
+              <a:t>module.gms</a:t>
             </a:r>
             <a:r>
               <a:rPr lang="en-US" b="1" dirty="0">
@@ -14046,9 +17146,9 @@
           <p:nvPr/>
         </p:nvCxnSpPr>
         <p:spPr>
-          <a:xfrm flipV="1">
-            <a:off x="5520436" y="2310224"/>
-            <a:ext cx="1030224" cy="174921"/>
+          <a:xfrm>
+            <a:off x="2367149" y="3138640"/>
+            <a:ext cx="2217851" cy="133738"/>
           </a:xfrm>
           <a:prstGeom prst="straightConnector1">
             <a:avLst/>
@@ -14083,8 +17183,8 @@
         </p:nvCxnSpPr>
         <p:spPr>
           <a:xfrm>
-            <a:off x="5676392" y="2909547"/>
-            <a:ext cx="819912" cy="0"/>
+            <a:off x="2367149" y="3490273"/>
+            <a:ext cx="2217850" cy="370291"/>
           </a:xfrm>
           <a:prstGeom prst="straightConnector1">
             <a:avLst/>
@@ -14103,50 +17203,6 @@
           </a:ln>
         </p:spPr>
       </p:cxnSp>
-      <p:sp>
-        <p:nvSpPr>
-          <p:cNvPr id="22" name="TextBox 21">
-            <a:extLst>
-              <a:ext uri="{FF2B5EF4-FFF2-40B4-BE49-F238E27FC236}">
-                <a16:creationId xmlns:a16="http://schemas.microsoft.com/office/drawing/2014/main" id="{8A1B7C4E-A5AD-4635-B1FB-782FCF033296}"/>
-              </a:ext>
-            </a:extLst>
-          </p:cNvPr>
-          <p:cNvSpPr txBox="1"/>
-          <p:nvPr/>
-        </p:nvSpPr>
-        <p:spPr>
-          <a:xfrm>
-            <a:off x="5337047" y="2369598"/>
-            <a:ext cx="625349" cy="1015663"/>
-          </a:xfrm>
-          <a:prstGeom prst="rect">
-            <a:avLst/>
-          </a:prstGeom>
-          <a:noFill/>
-        </p:spPr>
-        <p:txBody>
-          <a:bodyPr wrap="square" rtlCol="0">
-            <a:spAutoFit/>
-          </a:bodyPr>
-          <a:lstStyle/>
-          <a:p>
-            <a:r>
-              <a:rPr lang="en-US" sz="6000" dirty="0">
-                <a:solidFill>
-                  <a:srgbClr val="C00000"/>
-                </a:solidFill>
-              </a:rPr>
-              <a:t>}</a:t>
-            </a:r>
-            <a:endParaRPr lang="en-DE" sz="2400" dirty="0">
-              <a:solidFill>
-                <a:srgbClr val="C00000"/>
-              </a:solidFill>
-            </a:endParaRPr>
-          </a:p>
-        </p:txBody>
-      </p:sp>
       <p:cxnSp>
         <p:nvCxnSpPr>
           <p:cNvPr id="40" name="Straight Arrow Connector 39">
@@ -14162,9 +17218,9 @@
           <p:nvPr/>
         </p:nvCxnSpPr>
         <p:spPr>
-          <a:xfrm>
-            <a:off x="5481320" y="3367136"/>
-            <a:ext cx="1014984" cy="238399"/>
+          <a:xfrm flipV="1">
+            <a:off x="2367149" y="2429846"/>
+            <a:ext cx="2217852" cy="338377"/>
           </a:xfrm>
           <a:prstGeom prst="straightConnector1">
             <a:avLst/>
@@ -14262,14 +17318,586 @@
         </p:blipFill>
         <p:spPr>
           <a:xfrm>
-            <a:off x="1213849" y="1882586"/>
-            <a:ext cx="4931176" cy="185163"/>
+            <a:off x="993883" y="1882586"/>
+            <a:ext cx="4780558" cy="185163"/>
           </a:xfrm>
           <a:prstGeom prst="rect">
             <a:avLst/>
           </a:prstGeom>
         </p:spPr>
       </p:pic>
+      <p:sp>
+        <p:nvSpPr>
+          <p:cNvPr id="7" name="Right Brace 6">
+            <a:extLst>
+              <a:ext uri="{FF2B5EF4-FFF2-40B4-BE49-F238E27FC236}">
+                <a16:creationId xmlns:a16="http://schemas.microsoft.com/office/drawing/2014/main" id="{CF7FD47B-1E15-4508-AF7A-A67C20F7910C}"/>
+              </a:ext>
+            </a:extLst>
+          </p:cNvPr>
+          <p:cNvSpPr/>
+          <p:nvPr/>
+        </p:nvSpPr>
+        <p:spPr>
+          <a:xfrm>
+            <a:off x="1913018" y="2495507"/>
+            <a:ext cx="371219" cy="571453"/>
+          </a:xfrm>
+          <a:custGeom>
+            <a:avLst/>
+            <a:gdLst>
+              <a:gd name="connsiteX0" fmla="*/ 0 w 748030"/>
+              <a:gd name="connsiteY0" fmla="*/ 0 h 571453"/>
+              <a:gd name="connsiteX1" fmla="*/ 374015 w 748030"/>
+              <a:gd name="connsiteY1" fmla="*/ 66671 h 571453"/>
+              <a:gd name="connsiteX2" fmla="*/ 374015 w 748030"/>
+              <a:gd name="connsiteY2" fmla="*/ 219055 h 571453"/>
+              <a:gd name="connsiteX3" fmla="*/ 748030 w 748030"/>
+              <a:gd name="connsiteY3" fmla="*/ 285726 h 571453"/>
+              <a:gd name="connsiteX4" fmla="*/ 374015 w 748030"/>
+              <a:gd name="connsiteY4" fmla="*/ 352397 h 571453"/>
+              <a:gd name="connsiteX5" fmla="*/ 374015 w 748030"/>
+              <a:gd name="connsiteY5" fmla="*/ 504782 h 571453"/>
+              <a:gd name="connsiteX6" fmla="*/ 0 w 748030"/>
+              <a:gd name="connsiteY6" fmla="*/ 571453 h 571453"/>
+              <a:gd name="connsiteX7" fmla="*/ 0 w 748030"/>
+              <a:gd name="connsiteY7" fmla="*/ 0 h 571453"/>
+              <a:gd name="connsiteX0" fmla="*/ 0 w 748030"/>
+              <a:gd name="connsiteY0" fmla="*/ 0 h 571453"/>
+              <a:gd name="connsiteX1" fmla="*/ 374015 w 748030"/>
+              <a:gd name="connsiteY1" fmla="*/ 66671 h 571453"/>
+              <a:gd name="connsiteX2" fmla="*/ 374015 w 748030"/>
+              <a:gd name="connsiteY2" fmla="*/ 219055 h 571453"/>
+              <a:gd name="connsiteX3" fmla="*/ 748030 w 748030"/>
+              <a:gd name="connsiteY3" fmla="*/ 285726 h 571453"/>
+              <a:gd name="connsiteX4" fmla="*/ 374015 w 748030"/>
+              <a:gd name="connsiteY4" fmla="*/ 352397 h 571453"/>
+              <a:gd name="connsiteX5" fmla="*/ 374015 w 748030"/>
+              <a:gd name="connsiteY5" fmla="*/ 504782 h 571453"/>
+              <a:gd name="connsiteX6" fmla="*/ 0 w 748030"/>
+              <a:gd name="connsiteY6" fmla="*/ 571453 h 571453"/>
+              <a:gd name="connsiteX0" fmla="*/ 0 w 748030"/>
+              <a:gd name="connsiteY0" fmla="*/ 0 h 571453"/>
+              <a:gd name="connsiteX1" fmla="*/ 374015 w 748030"/>
+              <a:gd name="connsiteY1" fmla="*/ 66671 h 571453"/>
+              <a:gd name="connsiteX2" fmla="*/ 374015 w 748030"/>
+              <a:gd name="connsiteY2" fmla="*/ 219055 h 571453"/>
+              <a:gd name="connsiteX3" fmla="*/ 748030 w 748030"/>
+              <a:gd name="connsiteY3" fmla="*/ 285726 h 571453"/>
+              <a:gd name="connsiteX4" fmla="*/ 374015 w 748030"/>
+              <a:gd name="connsiteY4" fmla="*/ 352397 h 571453"/>
+              <a:gd name="connsiteX5" fmla="*/ 374015 w 748030"/>
+              <a:gd name="connsiteY5" fmla="*/ 504782 h 571453"/>
+              <a:gd name="connsiteX6" fmla="*/ 0 w 748030"/>
+              <a:gd name="connsiteY6" fmla="*/ 571453 h 571453"/>
+              <a:gd name="connsiteX7" fmla="*/ 0 w 748030"/>
+              <a:gd name="connsiteY7" fmla="*/ 0 h 571453"/>
+              <a:gd name="connsiteX0" fmla="*/ 0 w 748030"/>
+              <a:gd name="connsiteY0" fmla="*/ 0 h 571453"/>
+              <a:gd name="connsiteX1" fmla="*/ 374015 w 748030"/>
+              <a:gd name="connsiteY1" fmla="*/ 66671 h 571453"/>
+              <a:gd name="connsiteX2" fmla="*/ 374015 w 748030"/>
+              <a:gd name="connsiteY2" fmla="*/ 219055 h 571453"/>
+              <a:gd name="connsiteX3" fmla="*/ 595630 w 748030"/>
+              <a:gd name="connsiteY3" fmla="*/ 288107 h 571453"/>
+              <a:gd name="connsiteX4" fmla="*/ 374015 w 748030"/>
+              <a:gd name="connsiteY4" fmla="*/ 352397 h 571453"/>
+              <a:gd name="connsiteX5" fmla="*/ 374015 w 748030"/>
+              <a:gd name="connsiteY5" fmla="*/ 504782 h 571453"/>
+              <a:gd name="connsiteX6" fmla="*/ 0 w 748030"/>
+              <a:gd name="connsiteY6" fmla="*/ 571453 h 571453"/>
+              <a:gd name="connsiteX0" fmla="*/ 0 w 600392"/>
+              <a:gd name="connsiteY0" fmla="*/ 0 h 571453"/>
+              <a:gd name="connsiteX1" fmla="*/ 374015 w 600392"/>
+              <a:gd name="connsiteY1" fmla="*/ 66671 h 571453"/>
+              <a:gd name="connsiteX2" fmla="*/ 374015 w 600392"/>
+              <a:gd name="connsiteY2" fmla="*/ 219055 h 571453"/>
+              <a:gd name="connsiteX3" fmla="*/ 600392 w 600392"/>
+              <a:gd name="connsiteY3" fmla="*/ 285726 h 571453"/>
+              <a:gd name="connsiteX4" fmla="*/ 374015 w 600392"/>
+              <a:gd name="connsiteY4" fmla="*/ 352397 h 571453"/>
+              <a:gd name="connsiteX5" fmla="*/ 374015 w 600392"/>
+              <a:gd name="connsiteY5" fmla="*/ 504782 h 571453"/>
+              <a:gd name="connsiteX6" fmla="*/ 0 w 600392"/>
+              <a:gd name="connsiteY6" fmla="*/ 571453 h 571453"/>
+              <a:gd name="connsiteX7" fmla="*/ 0 w 600392"/>
+              <a:gd name="connsiteY7" fmla="*/ 0 h 571453"/>
+              <a:gd name="connsiteX0" fmla="*/ 0 w 600392"/>
+              <a:gd name="connsiteY0" fmla="*/ 0 h 571453"/>
+              <a:gd name="connsiteX1" fmla="*/ 374015 w 600392"/>
+              <a:gd name="connsiteY1" fmla="*/ 66671 h 571453"/>
+              <a:gd name="connsiteX2" fmla="*/ 374015 w 600392"/>
+              <a:gd name="connsiteY2" fmla="*/ 219055 h 571453"/>
+              <a:gd name="connsiteX3" fmla="*/ 595630 w 600392"/>
+              <a:gd name="connsiteY3" fmla="*/ 288107 h 571453"/>
+              <a:gd name="connsiteX4" fmla="*/ 374015 w 600392"/>
+              <a:gd name="connsiteY4" fmla="*/ 352397 h 571453"/>
+              <a:gd name="connsiteX5" fmla="*/ 374015 w 600392"/>
+              <a:gd name="connsiteY5" fmla="*/ 504782 h 571453"/>
+              <a:gd name="connsiteX6" fmla="*/ 0 w 600392"/>
+              <a:gd name="connsiteY6" fmla="*/ 571453 h 571453"/>
+              <a:gd name="connsiteX0" fmla="*/ 0 w 600392"/>
+              <a:gd name="connsiteY0" fmla="*/ 0 h 571453"/>
+              <a:gd name="connsiteX1" fmla="*/ 374015 w 600392"/>
+              <a:gd name="connsiteY1" fmla="*/ 66671 h 571453"/>
+              <a:gd name="connsiteX2" fmla="*/ 374015 w 600392"/>
+              <a:gd name="connsiteY2" fmla="*/ 219055 h 571453"/>
+              <a:gd name="connsiteX3" fmla="*/ 600392 w 600392"/>
+              <a:gd name="connsiteY3" fmla="*/ 285726 h 571453"/>
+              <a:gd name="connsiteX4" fmla="*/ 374015 w 600392"/>
+              <a:gd name="connsiteY4" fmla="*/ 352397 h 571453"/>
+              <a:gd name="connsiteX5" fmla="*/ 374015 w 600392"/>
+              <a:gd name="connsiteY5" fmla="*/ 504782 h 571453"/>
+              <a:gd name="connsiteX6" fmla="*/ 0 w 600392"/>
+              <a:gd name="connsiteY6" fmla="*/ 571453 h 571453"/>
+              <a:gd name="connsiteX7" fmla="*/ 0 w 600392"/>
+              <a:gd name="connsiteY7" fmla="*/ 0 h 571453"/>
+              <a:gd name="connsiteX0" fmla="*/ 0 w 600392"/>
+              <a:gd name="connsiteY0" fmla="*/ 0 h 571453"/>
+              <a:gd name="connsiteX1" fmla="*/ 374015 w 600392"/>
+              <a:gd name="connsiteY1" fmla="*/ 66671 h 571453"/>
+              <a:gd name="connsiteX2" fmla="*/ 374015 w 600392"/>
+              <a:gd name="connsiteY2" fmla="*/ 219055 h 571453"/>
+              <a:gd name="connsiteX3" fmla="*/ 595630 w 600392"/>
+              <a:gd name="connsiteY3" fmla="*/ 288107 h 571453"/>
+              <a:gd name="connsiteX4" fmla="*/ 374015 w 600392"/>
+              <a:gd name="connsiteY4" fmla="*/ 371447 h 571453"/>
+              <a:gd name="connsiteX5" fmla="*/ 374015 w 600392"/>
+              <a:gd name="connsiteY5" fmla="*/ 504782 h 571453"/>
+              <a:gd name="connsiteX6" fmla="*/ 0 w 600392"/>
+              <a:gd name="connsiteY6" fmla="*/ 571453 h 571453"/>
+              <a:gd name="connsiteX0" fmla="*/ 0 w 600392"/>
+              <a:gd name="connsiteY0" fmla="*/ 0 h 571453"/>
+              <a:gd name="connsiteX1" fmla="*/ 374015 w 600392"/>
+              <a:gd name="connsiteY1" fmla="*/ 66671 h 571453"/>
+              <a:gd name="connsiteX2" fmla="*/ 374015 w 600392"/>
+              <a:gd name="connsiteY2" fmla="*/ 219055 h 571453"/>
+              <a:gd name="connsiteX3" fmla="*/ 600392 w 600392"/>
+              <a:gd name="connsiteY3" fmla="*/ 285726 h 571453"/>
+              <a:gd name="connsiteX4" fmla="*/ 374015 w 600392"/>
+              <a:gd name="connsiteY4" fmla="*/ 352397 h 571453"/>
+              <a:gd name="connsiteX5" fmla="*/ 374015 w 600392"/>
+              <a:gd name="connsiteY5" fmla="*/ 504782 h 571453"/>
+              <a:gd name="connsiteX6" fmla="*/ 0 w 600392"/>
+              <a:gd name="connsiteY6" fmla="*/ 571453 h 571453"/>
+              <a:gd name="connsiteX7" fmla="*/ 0 w 600392"/>
+              <a:gd name="connsiteY7" fmla="*/ 0 h 571453"/>
+              <a:gd name="connsiteX0" fmla="*/ 0 w 600392"/>
+              <a:gd name="connsiteY0" fmla="*/ 0 h 571453"/>
+              <a:gd name="connsiteX1" fmla="*/ 374015 w 600392"/>
+              <a:gd name="connsiteY1" fmla="*/ 66671 h 571453"/>
+              <a:gd name="connsiteX2" fmla="*/ 371634 w 600392"/>
+              <a:gd name="connsiteY2" fmla="*/ 180955 h 571453"/>
+              <a:gd name="connsiteX3" fmla="*/ 595630 w 600392"/>
+              <a:gd name="connsiteY3" fmla="*/ 288107 h 571453"/>
+              <a:gd name="connsiteX4" fmla="*/ 374015 w 600392"/>
+              <a:gd name="connsiteY4" fmla="*/ 371447 h 571453"/>
+              <a:gd name="connsiteX5" fmla="*/ 374015 w 600392"/>
+              <a:gd name="connsiteY5" fmla="*/ 504782 h 571453"/>
+              <a:gd name="connsiteX6" fmla="*/ 0 w 600392"/>
+              <a:gd name="connsiteY6" fmla="*/ 571453 h 571453"/>
+              <a:gd name="connsiteX0" fmla="*/ 0 w 600392"/>
+              <a:gd name="connsiteY0" fmla="*/ 0 h 571453"/>
+              <a:gd name="connsiteX1" fmla="*/ 374015 w 600392"/>
+              <a:gd name="connsiteY1" fmla="*/ 66671 h 571453"/>
+              <a:gd name="connsiteX2" fmla="*/ 374015 w 600392"/>
+              <a:gd name="connsiteY2" fmla="*/ 219055 h 571453"/>
+              <a:gd name="connsiteX3" fmla="*/ 600392 w 600392"/>
+              <a:gd name="connsiteY3" fmla="*/ 285726 h 571453"/>
+              <a:gd name="connsiteX4" fmla="*/ 374015 w 600392"/>
+              <a:gd name="connsiteY4" fmla="*/ 352397 h 571453"/>
+              <a:gd name="connsiteX5" fmla="*/ 374015 w 600392"/>
+              <a:gd name="connsiteY5" fmla="*/ 504782 h 571453"/>
+              <a:gd name="connsiteX6" fmla="*/ 0 w 600392"/>
+              <a:gd name="connsiteY6" fmla="*/ 571453 h 571453"/>
+              <a:gd name="connsiteX7" fmla="*/ 0 w 600392"/>
+              <a:gd name="connsiteY7" fmla="*/ 0 h 571453"/>
+              <a:gd name="connsiteX0" fmla="*/ 0 w 600392"/>
+              <a:gd name="connsiteY0" fmla="*/ 0 h 571453"/>
+              <a:gd name="connsiteX1" fmla="*/ 374015 w 600392"/>
+              <a:gd name="connsiteY1" fmla="*/ 66671 h 571453"/>
+              <a:gd name="connsiteX2" fmla="*/ 371634 w 600392"/>
+              <a:gd name="connsiteY2" fmla="*/ 180955 h 571453"/>
+              <a:gd name="connsiteX3" fmla="*/ 502762 w 600392"/>
+              <a:gd name="connsiteY3" fmla="*/ 290488 h 571453"/>
+              <a:gd name="connsiteX4" fmla="*/ 374015 w 600392"/>
+              <a:gd name="connsiteY4" fmla="*/ 371447 h 571453"/>
+              <a:gd name="connsiteX5" fmla="*/ 374015 w 600392"/>
+              <a:gd name="connsiteY5" fmla="*/ 504782 h 571453"/>
+              <a:gd name="connsiteX6" fmla="*/ 0 w 600392"/>
+              <a:gd name="connsiteY6" fmla="*/ 571453 h 571453"/>
+              <a:gd name="connsiteX0" fmla="*/ 0 w 600392"/>
+              <a:gd name="connsiteY0" fmla="*/ 0 h 571453"/>
+              <a:gd name="connsiteX1" fmla="*/ 374015 w 600392"/>
+              <a:gd name="connsiteY1" fmla="*/ 66671 h 571453"/>
+              <a:gd name="connsiteX2" fmla="*/ 374015 w 600392"/>
+              <a:gd name="connsiteY2" fmla="*/ 219055 h 571453"/>
+              <a:gd name="connsiteX3" fmla="*/ 600392 w 600392"/>
+              <a:gd name="connsiteY3" fmla="*/ 285726 h 571453"/>
+              <a:gd name="connsiteX4" fmla="*/ 374015 w 600392"/>
+              <a:gd name="connsiteY4" fmla="*/ 352397 h 571453"/>
+              <a:gd name="connsiteX5" fmla="*/ 374015 w 600392"/>
+              <a:gd name="connsiteY5" fmla="*/ 504782 h 571453"/>
+              <a:gd name="connsiteX6" fmla="*/ 0 w 600392"/>
+              <a:gd name="connsiteY6" fmla="*/ 571453 h 571453"/>
+              <a:gd name="connsiteX7" fmla="*/ 0 w 600392"/>
+              <a:gd name="connsiteY7" fmla="*/ 0 h 571453"/>
+              <a:gd name="connsiteX0" fmla="*/ 0 w 600392"/>
+              <a:gd name="connsiteY0" fmla="*/ 0 h 571453"/>
+              <a:gd name="connsiteX1" fmla="*/ 374015 w 600392"/>
+              <a:gd name="connsiteY1" fmla="*/ 66671 h 571453"/>
+              <a:gd name="connsiteX2" fmla="*/ 371634 w 600392"/>
+              <a:gd name="connsiteY2" fmla="*/ 180955 h 571453"/>
+              <a:gd name="connsiteX3" fmla="*/ 457518 w 600392"/>
+              <a:gd name="connsiteY3" fmla="*/ 288107 h 571453"/>
+              <a:gd name="connsiteX4" fmla="*/ 374015 w 600392"/>
+              <a:gd name="connsiteY4" fmla="*/ 371447 h 571453"/>
+              <a:gd name="connsiteX5" fmla="*/ 374015 w 600392"/>
+              <a:gd name="connsiteY5" fmla="*/ 504782 h 571453"/>
+              <a:gd name="connsiteX6" fmla="*/ 0 w 600392"/>
+              <a:gd name="connsiteY6" fmla="*/ 571453 h 571453"/>
+              <a:gd name="connsiteX0" fmla="*/ 0 w 600392"/>
+              <a:gd name="connsiteY0" fmla="*/ 0 h 571453"/>
+              <a:gd name="connsiteX1" fmla="*/ 374015 w 600392"/>
+              <a:gd name="connsiteY1" fmla="*/ 66671 h 571453"/>
+              <a:gd name="connsiteX2" fmla="*/ 374015 w 600392"/>
+              <a:gd name="connsiteY2" fmla="*/ 245248 h 571453"/>
+              <a:gd name="connsiteX3" fmla="*/ 600392 w 600392"/>
+              <a:gd name="connsiteY3" fmla="*/ 285726 h 571453"/>
+              <a:gd name="connsiteX4" fmla="*/ 374015 w 600392"/>
+              <a:gd name="connsiteY4" fmla="*/ 352397 h 571453"/>
+              <a:gd name="connsiteX5" fmla="*/ 374015 w 600392"/>
+              <a:gd name="connsiteY5" fmla="*/ 504782 h 571453"/>
+              <a:gd name="connsiteX6" fmla="*/ 0 w 600392"/>
+              <a:gd name="connsiteY6" fmla="*/ 571453 h 571453"/>
+              <a:gd name="connsiteX7" fmla="*/ 0 w 600392"/>
+              <a:gd name="connsiteY7" fmla="*/ 0 h 571453"/>
+              <a:gd name="connsiteX0" fmla="*/ 0 w 600392"/>
+              <a:gd name="connsiteY0" fmla="*/ 0 h 571453"/>
+              <a:gd name="connsiteX1" fmla="*/ 374015 w 600392"/>
+              <a:gd name="connsiteY1" fmla="*/ 66671 h 571453"/>
+              <a:gd name="connsiteX2" fmla="*/ 371634 w 600392"/>
+              <a:gd name="connsiteY2" fmla="*/ 180955 h 571453"/>
+              <a:gd name="connsiteX3" fmla="*/ 457518 w 600392"/>
+              <a:gd name="connsiteY3" fmla="*/ 288107 h 571453"/>
+              <a:gd name="connsiteX4" fmla="*/ 374015 w 600392"/>
+              <a:gd name="connsiteY4" fmla="*/ 371447 h 571453"/>
+              <a:gd name="connsiteX5" fmla="*/ 374015 w 600392"/>
+              <a:gd name="connsiteY5" fmla="*/ 504782 h 571453"/>
+              <a:gd name="connsiteX6" fmla="*/ 0 w 600392"/>
+              <a:gd name="connsiteY6" fmla="*/ 571453 h 571453"/>
+              <a:gd name="connsiteX0" fmla="*/ 0 w 600394"/>
+              <a:gd name="connsiteY0" fmla="*/ 0 h 571453"/>
+              <a:gd name="connsiteX1" fmla="*/ 374015 w 600394"/>
+              <a:gd name="connsiteY1" fmla="*/ 66671 h 571453"/>
+              <a:gd name="connsiteX2" fmla="*/ 374015 w 600394"/>
+              <a:gd name="connsiteY2" fmla="*/ 245248 h 571453"/>
+              <a:gd name="connsiteX3" fmla="*/ 600392 w 600394"/>
+              <a:gd name="connsiteY3" fmla="*/ 285726 h 571453"/>
+              <a:gd name="connsiteX4" fmla="*/ 369252 w 600394"/>
+              <a:gd name="connsiteY4" fmla="*/ 326203 h 571453"/>
+              <a:gd name="connsiteX5" fmla="*/ 374015 w 600394"/>
+              <a:gd name="connsiteY5" fmla="*/ 504782 h 571453"/>
+              <a:gd name="connsiteX6" fmla="*/ 0 w 600394"/>
+              <a:gd name="connsiteY6" fmla="*/ 571453 h 571453"/>
+              <a:gd name="connsiteX7" fmla="*/ 0 w 600394"/>
+              <a:gd name="connsiteY7" fmla="*/ 0 h 571453"/>
+              <a:gd name="connsiteX0" fmla="*/ 0 w 600394"/>
+              <a:gd name="connsiteY0" fmla="*/ 0 h 571453"/>
+              <a:gd name="connsiteX1" fmla="*/ 374015 w 600394"/>
+              <a:gd name="connsiteY1" fmla="*/ 66671 h 571453"/>
+              <a:gd name="connsiteX2" fmla="*/ 371634 w 600394"/>
+              <a:gd name="connsiteY2" fmla="*/ 180955 h 571453"/>
+              <a:gd name="connsiteX3" fmla="*/ 457518 w 600394"/>
+              <a:gd name="connsiteY3" fmla="*/ 288107 h 571453"/>
+              <a:gd name="connsiteX4" fmla="*/ 374015 w 600394"/>
+              <a:gd name="connsiteY4" fmla="*/ 371447 h 571453"/>
+              <a:gd name="connsiteX5" fmla="*/ 374015 w 600394"/>
+              <a:gd name="connsiteY5" fmla="*/ 504782 h 571453"/>
+              <a:gd name="connsiteX6" fmla="*/ 0 w 600394"/>
+              <a:gd name="connsiteY6" fmla="*/ 571453 h 571453"/>
+              <a:gd name="connsiteX0" fmla="*/ 0 w 493239"/>
+              <a:gd name="connsiteY0" fmla="*/ 0 h 571453"/>
+              <a:gd name="connsiteX1" fmla="*/ 374015 w 493239"/>
+              <a:gd name="connsiteY1" fmla="*/ 66671 h 571453"/>
+              <a:gd name="connsiteX2" fmla="*/ 374015 w 493239"/>
+              <a:gd name="connsiteY2" fmla="*/ 245248 h 571453"/>
+              <a:gd name="connsiteX3" fmla="*/ 493236 w 493239"/>
+              <a:gd name="connsiteY3" fmla="*/ 285726 h 571453"/>
+              <a:gd name="connsiteX4" fmla="*/ 369252 w 493239"/>
+              <a:gd name="connsiteY4" fmla="*/ 326203 h 571453"/>
+              <a:gd name="connsiteX5" fmla="*/ 374015 w 493239"/>
+              <a:gd name="connsiteY5" fmla="*/ 504782 h 571453"/>
+              <a:gd name="connsiteX6" fmla="*/ 0 w 493239"/>
+              <a:gd name="connsiteY6" fmla="*/ 571453 h 571453"/>
+              <a:gd name="connsiteX7" fmla="*/ 0 w 493239"/>
+              <a:gd name="connsiteY7" fmla="*/ 0 h 571453"/>
+              <a:gd name="connsiteX0" fmla="*/ 0 w 493239"/>
+              <a:gd name="connsiteY0" fmla="*/ 0 h 571453"/>
+              <a:gd name="connsiteX1" fmla="*/ 374015 w 493239"/>
+              <a:gd name="connsiteY1" fmla="*/ 66671 h 571453"/>
+              <a:gd name="connsiteX2" fmla="*/ 371634 w 493239"/>
+              <a:gd name="connsiteY2" fmla="*/ 180955 h 571453"/>
+              <a:gd name="connsiteX3" fmla="*/ 457518 w 493239"/>
+              <a:gd name="connsiteY3" fmla="*/ 288107 h 571453"/>
+              <a:gd name="connsiteX4" fmla="*/ 374015 w 493239"/>
+              <a:gd name="connsiteY4" fmla="*/ 371447 h 571453"/>
+              <a:gd name="connsiteX5" fmla="*/ 374015 w 493239"/>
+              <a:gd name="connsiteY5" fmla="*/ 504782 h 571453"/>
+              <a:gd name="connsiteX6" fmla="*/ 0 w 493239"/>
+              <a:gd name="connsiteY6" fmla="*/ 571453 h 571453"/>
+              <a:gd name="connsiteX0" fmla="*/ 0 w 493239"/>
+              <a:gd name="connsiteY0" fmla="*/ 0 h 571453"/>
+              <a:gd name="connsiteX1" fmla="*/ 374015 w 493239"/>
+              <a:gd name="connsiteY1" fmla="*/ 66671 h 571453"/>
+              <a:gd name="connsiteX2" fmla="*/ 374015 w 493239"/>
+              <a:gd name="connsiteY2" fmla="*/ 245248 h 571453"/>
+              <a:gd name="connsiteX3" fmla="*/ 493236 w 493239"/>
+              <a:gd name="connsiteY3" fmla="*/ 285726 h 571453"/>
+              <a:gd name="connsiteX4" fmla="*/ 369252 w 493239"/>
+              <a:gd name="connsiteY4" fmla="*/ 326203 h 571453"/>
+              <a:gd name="connsiteX5" fmla="*/ 374015 w 493239"/>
+              <a:gd name="connsiteY5" fmla="*/ 504782 h 571453"/>
+              <a:gd name="connsiteX6" fmla="*/ 0 w 493239"/>
+              <a:gd name="connsiteY6" fmla="*/ 571453 h 571453"/>
+              <a:gd name="connsiteX7" fmla="*/ 0 w 493239"/>
+              <a:gd name="connsiteY7" fmla="*/ 0 h 571453"/>
+              <a:gd name="connsiteX0" fmla="*/ 0 w 493239"/>
+              <a:gd name="connsiteY0" fmla="*/ 0 h 571453"/>
+              <a:gd name="connsiteX1" fmla="*/ 374015 w 493239"/>
+              <a:gd name="connsiteY1" fmla="*/ 66671 h 571453"/>
+              <a:gd name="connsiteX2" fmla="*/ 371634 w 493239"/>
+              <a:gd name="connsiteY2" fmla="*/ 219055 h 571453"/>
+              <a:gd name="connsiteX3" fmla="*/ 457518 w 493239"/>
+              <a:gd name="connsiteY3" fmla="*/ 288107 h 571453"/>
+              <a:gd name="connsiteX4" fmla="*/ 374015 w 493239"/>
+              <a:gd name="connsiteY4" fmla="*/ 371447 h 571453"/>
+              <a:gd name="connsiteX5" fmla="*/ 374015 w 493239"/>
+              <a:gd name="connsiteY5" fmla="*/ 504782 h 571453"/>
+              <a:gd name="connsiteX6" fmla="*/ 0 w 493239"/>
+              <a:gd name="connsiteY6" fmla="*/ 571453 h 571453"/>
+              <a:gd name="connsiteX0" fmla="*/ 0 w 493239"/>
+              <a:gd name="connsiteY0" fmla="*/ 0 h 571453"/>
+              <a:gd name="connsiteX1" fmla="*/ 374015 w 493239"/>
+              <a:gd name="connsiteY1" fmla="*/ 66671 h 571453"/>
+              <a:gd name="connsiteX2" fmla="*/ 374015 w 493239"/>
+              <a:gd name="connsiteY2" fmla="*/ 245248 h 571453"/>
+              <a:gd name="connsiteX3" fmla="*/ 493236 w 493239"/>
+              <a:gd name="connsiteY3" fmla="*/ 285726 h 571453"/>
+              <a:gd name="connsiteX4" fmla="*/ 369252 w 493239"/>
+              <a:gd name="connsiteY4" fmla="*/ 326203 h 571453"/>
+              <a:gd name="connsiteX5" fmla="*/ 374015 w 493239"/>
+              <a:gd name="connsiteY5" fmla="*/ 504782 h 571453"/>
+              <a:gd name="connsiteX6" fmla="*/ 0 w 493239"/>
+              <a:gd name="connsiteY6" fmla="*/ 571453 h 571453"/>
+              <a:gd name="connsiteX7" fmla="*/ 0 w 493239"/>
+              <a:gd name="connsiteY7" fmla="*/ 0 h 571453"/>
+              <a:gd name="connsiteX0" fmla="*/ 0 w 493239"/>
+              <a:gd name="connsiteY0" fmla="*/ 0 h 571453"/>
+              <a:gd name="connsiteX1" fmla="*/ 374015 w 493239"/>
+              <a:gd name="connsiteY1" fmla="*/ 66671 h 571453"/>
+              <a:gd name="connsiteX2" fmla="*/ 371634 w 493239"/>
+              <a:gd name="connsiteY2" fmla="*/ 219055 h 571453"/>
+              <a:gd name="connsiteX3" fmla="*/ 457518 w 493239"/>
+              <a:gd name="connsiteY3" fmla="*/ 288107 h 571453"/>
+              <a:gd name="connsiteX4" fmla="*/ 374015 w 493239"/>
+              <a:gd name="connsiteY4" fmla="*/ 340491 h 571453"/>
+              <a:gd name="connsiteX5" fmla="*/ 374015 w 493239"/>
+              <a:gd name="connsiteY5" fmla="*/ 504782 h 571453"/>
+              <a:gd name="connsiteX6" fmla="*/ 0 w 493239"/>
+              <a:gd name="connsiteY6" fmla="*/ 571453 h 571453"/>
+              <a:gd name="connsiteX0" fmla="*/ 0 w 618552"/>
+              <a:gd name="connsiteY0" fmla="*/ 0 h 571453"/>
+              <a:gd name="connsiteX1" fmla="*/ 374015 w 618552"/>
+              <a:gd name="connsiteY1" fmla="*/ 66671 h 571453"/>
+              <a:gd name="connsiteX2" fmla="*/ 374015 w 618552"/>
+              <a:gd name="connsiteY2" fmla="*/ 245248 h 571453"/>
+              <a:gd name="connsiteX3" fmla="*/ 493236 w 618552"/>
+              <a:gd name="connsiteY3" fmla="*/ 285726 h 571453"/>
+              <a:gd name="connsiteX4" fmla="*/ 369252 w 618552"/>
+              <a:gd name="connsiteY4" fmla="*/ 326203 h 571453"/>
+              <a:gd name="connsiteX5" fmla="*/ 374015 w 618552"/>
+              <a:gd name="connsiteY5" fmla="*/ 504782 h 571453"/>
+              <a:gd name="connsiteX6" fmla="*/ 0 w 618552"/>
+              <a:gd name="connsiteY6" fmla="*/ 571453 h 571453"/>
+              <a:gd name="connsiteX7" fmla="*/ 0 w 618552"/>
+              <a:gd name="connsiteY7" fmla="*/ 0 h 571453"/>
+              <a:gd name="connsiteX0" fmla="*/ 0 w 618552"/>
+              <a:gd name="connsiteY0" fmla="*/ 0 h 571453"/>
+              <a:gd name="connsiteX1" fmla="*/ 374015 w 618552"/>
+              <a:gd name="connsiteY1" fmla="*/ 66671 h 571453"/>
+              <a:gd name="connsiteX2" fmla="*/ 371634 w 618552"/>
+              <a:gd name="connsiteY2" fmla="*/ 219055 h 571453"/>
+              <a:gd name="connsiteX3" fmla="*/ 618552 w 618552"/>
+              <a:gd name="connsiteY3" fmla="*/ 292869 h 571453"/>
+              <a:gd name="connsiteX4" fmla="*/ 374015 w 618552"/>
+              <a:gd name="connsiteY4" fmla="*/ 340491 h 571453"/>
+              <a:gd name="connsiteX5" fmla="*/ 374015 w 618552"/>
+              <a:gd name="connsiteY5" fmla="*/ 504782 h 571453"/>
+              <a:gd name="connsiteX6" fmla="*/ 0 w 618552"/>
+              <a:gd name="connsiteY6" fmla="*/ 571453 h 571453"/>
+              <a:gd name="connsiteX0" fmla="*/ 0 w 618552"/>
+              <a:gd name="connsiteY0" fmla="*/ 0 h 571453"/>
+              <a:gd name="connsiteX1" fmla="*/ 374015 w 618552"/>
+              <a:gd name="connsiteY1" fmla="*/ 66671 h 571453"/>
+              <a:gd name="connsiteX2" fmla="*/ 374015 w 618552"/>
+              <a:gd name="connsiteY2" fmla="*/ 245248 h 571453"/>
+              <a:gd name="connsiteX3" fmla="*/ 493236 w 618552"/>
+              <a:gd name="connsiteY3" fmla="*/ 285726 h 571453"/>
+              <a:gd name="connsiteX4" fmla="*/ 369252 w 618552"/>
+              <a:gd name="connsiteY4" fmla="*/ 326203 h 571453"/>
+              <a:gd name="connsiteX5" fmla="*/ 374015 w 618552"/>
+              <a:gd name="connsiteY5" fmla="*/ 504782 h 571453"/>
+              <a:gd name="connsiteX6" fmla="*/ 0 w 618552"/>
+              <a:gd name="connsiteY6" fmla="*/ 571453 h 571453"/>
+              <a:gd name="connsiteX7" fmla="*/ 0 w 618552"/>
+              <a:gd name="connsiteY7" fmla="*/ 0 h 571453"/>
+              <a:gd name="connsiteX0" fmla="*/ 0 w 618552"/>
+              <a:gd name="connsiteY0" fmla="*/ 0 h 571453"/>
+              <a:gd name="connsiteX1" fmla="*/ 374015 w 618552"/>
+              <a:gd name="connsiteY1" fmla="*/ 66671 h 571453"/>
+              <a:gd name="connsiteX2" fmla="*/ 371634 w 618552"/>
+              <a:gd name="connsiteY2" fmla="*/ 219055 h 571453"/>
+              <a:gd name="connsiteX3" fmla="*/ 618552 w 618552"/>
+              <a:gd name="connsiteY3" fmla="*/ 283344 h 571453"/>
+              <a:gd name="connsiteX4" fmla="*/ 374015 w 618552"/>
+              <a:gd name="connsiteY4" fmla="*/ 340491 h 571453"/>
+              <a:gd name="connsiteX5" fmla="*/ 374015 w 618552"/>
+              <a:gd name="connsiteY5" fmla="*/ 504782 h 571453"/>
+              <a:gd name="connsiteX6" fmla="*/ 0 w 618552"/>
+              <a:gd name="connsiteY6" fmla="*/ 571453 h 571453"/>
+            </a:gdLst>
+            <a:ahLst/>
+            <a:cxnLst>
+              <a:cxn ang="0">
+                <a:pos x="connsiteX0" y="connsiteY0"/>
+              </a:cxn>
+              <a:cxn ang="0">
+                <a:pos x="connsiteX1" y="connsiteY1"/>
+              </a:cxn>
+              <a:cxn ang="0">
+                <a:pos x="connsiteX2" y="connsiteY2"/>
+              </a:cxn>
+              <a:cxn ang="0">
+                <a:pos x="connsiteX3" y="connsiteY3"/>
+              </a:cxn>
+              <a:cxn ang="0">
+                <a:pos x="connsiteX4" y="connsiteY4"/>
+              </a:cxn>
+              <a:cxn ang="0">
+                <a:pos x="connsiteX5" y="connsiteY5"/>
+              </a:cxn>
+              <a:cxn ang="0">
+                <a:pos x="connsiteX6" y="connsiteY6"/>
+              </a:cxn>
+            </a:cxnLst>
+            <a:rect l="l" t="t" r="r" b="b"/>
+            <a:pathLst>
+              <a:path w="618552" h="571453" stroke="0" extrusionOk="0">
+                <a:moveTo>
+                  <a:pt x="0" y="0"/>
+                </a:moveTo>
+                <a:cubicBezTo>
+                  <a:pt x="206563" y="0"/>
+                  <a:pt x="374015" y="29850"/>
+                  <a:pt x="374015" y="66671"/>
+                </a:cubicBezTo>
+                <a:lnTo>
+                  <a:pt x="374015" y="245248"/>
+                </a:lnTo>
+                <a:cubicBezTo>
+                  <a:pt x="374015" y="282069"/>
+                  <a:pt x="494030" y="272234"/>
+                  <a:pt x="493236" y="285726"/>
+                </a:cubicBezTo>
+                <a:cubicBezTo>
+                  <a:pt x="492442" y="299218"/>
+                  <a:pt x="369252" y="289382"/>
+                  <a:pt x="369252" y="326203"/>
+                </a:cubicBezTo>
+                <a:lnTo>
+                  <a:pt x="374015" y="504782"/>
+                </a:lnTo>
+                <a:cubicBezTo>
+                  <a:pt x="374015" y="541603"/>
+                  <a:pt x="206563" y="571453"/>
+                  <a:pt x="0" y="571453"/>
+                </a:cubicBezTo>
+                <a:lnTo>
+                  <a:pt x="0" y="0"/>
+                </a:lnTo>
+                <a:close/>
+              </a:path>
+              <a:path w="618552" h="571453" fill="none">
+                <a:moveTo>
+                  <a:pt x="0" y="0"/>
+                </a:moveTo>
+                <a:cubicBezTo>
+                  <a:pt x="206563" y="0"/>
+                  <a:pt x="374015" y="29850"/>
+                  <a:pt x="374015" y="66671"/>
+                </a:cubicBezTo>
+                <a:cubicBezTo>
+                  <a:pt x="373221" y="104766"/>
+                  <a:pt x="372428" y="180960"/>
+                  <a:pt x="371634" y="219055"/>
+                </a:cubicBezTo>
+                <a:cubicBezTo>
+                  <a:pt x="371634" y="255876"/>
+                  <a:pt x="618155" y="263105"/>
+                  <a:pt x="618552" y="283344"/>
+                </a:cubicBezTo>
+                <a:cubicBezTo>
+                  <a:pt x="618949" y="303583"/>
+                  <a:pt x="374015" y="303670"/>
+                  <a:pt x="374015" y="340491"/>
+                </a:cubicBezTo>
+                <a:lnTo>
+                  <a:pt x="374015" y="504782"/>
+                </a:lnTo>
+                <a:cubicBezTo>
+                  <a:pt x="374015" y="541603"/>
+                  <a:pt x="206563" y="571453"/>
+                  <a:pt x="0" y="571453"/>
+                </a:cubicBezTo>
+              </a:path>
+            </a:pathLst>
+          </a:custGeom>
+          <a:ln w="38100">
+            <a:solidFill>
+              <a:srgbClr val="C00000"/>
+            </a:solidFill>
+          </a:ln>
+        </p:spPr>
+        <p:style>
+          <a:lnRef idx="1">
+            <a:schemeClr val="accent1"/>
+          </a:lnRef>
+          <a:fillRef idx="0">
+            <a:schemeClr val="accent1"/>
+          </a:fillRef>
+          <a:effectRef idx="0">
+            <a:schemeClr val="accent1"/>
+          </a:effectRef>
+          <a:fontRef idx="minor">
+            <a:schemeClr val="tx1"/>
+          </a:fontRef>
+        </p:style>
+        <p:txBody>
+          <a:bodyPr rtlCol="0" anchor="ctr"/>
+          <a:lstStyle/>
+          <a:p>
+            <a:pPr algn="ctr"/>
+            <a:endParaRPr lang="en-DE">
+              <a:ln>
+                <a:solidFill>
+                  <a:srgbClr val="C00000"/>
+                </a:solidFill>
+              </a:ln>
+            </a:endParaRPr>
+          </a:p>
+        </p:txBody>
+      </p:sp>
     </p:spTree>
     <p:extLst>
       <p:ext uri="{BB962C8B-B14F-4D97-AF65-F5344CB8AC3E}">
@@ -14326,7 +17954,7 @@
                                           </p:stCondLst>
                                         </p:cTn>
                                         <p:tgtEl>
-                                          <p:spTgt spid="18"/>
+                                          <p:spTgt spid="40"/>
                                         </p:tgtEl>
                                         <p:attrNameLst>
                                           <p:attrName>style.visibility</p:attrName>
@@ -14353,7 +17981,34 @@
                                           </p:stCondLst>
                                         </p:cTn>
                                         <p:tgtEl>
-                                          <p:spTgt spid="9"/>
+                                          <p:spTgt spid="11"/>
+                                        </p:tgtEl>
+                                        <p:attrNameLst>
+                                          <p:attrName>style.visibility</p:attrName>
+                                        </p:attrNameLst>
+                                      </p:cBhvr>
+                                      <p:to>
+                                        <p:strVal val="visible"/>
+                                      </p:to>
+                                    </p:set>
+                                  </p:childTnLst>
+                                </p:cTn>
+                              </p:par>
+                              <p:par>
+                                <p:cTn id="9" presetID="1" presetClass="entr" presetSubtype="0" fill="hold" grpId="0" nodeType="withEffect">
+                                  <p:stCondLst>
+                                    <p:cond delay="0"/>
+                                  </p:stCondLst>
+                                  <p:childTnLst>
+                                    <p:set>
+                                      <p:cBhvr>
+                                        <p:cTn id="10" dur="1" fill="hold">
+                                          <p:stCondLst>
+                                            <p:cond delay="0"/>
+                                          </p:stCondLst>
+                                        </p:cTn>
+                                        <p:tgtEl>
+                                          <p:spTgt spid="7"/>
                                         </p:tgtEl>
                                         <p:attrNameLst>
                                           <p:attrName>style.visibility</p:attrName>
@@ -14373,46 +18028,19 @@
                     </p:cTn>
                   </p:par>
                   <p:par>
-                    <p:cTn id="9" fill="hold">
+                    <p:cTn id="11" fill="hold">
                       <p:stCondLst>
                         <p:cond delay="indefinite"/>
                       </p:stCondLst>
                       <p:childTnLst>
                         <p:par>
-                          <p:cTn id="10" fill="hold">
+                          <p:cTn id="12" fill="hold">
                             <p:stCondLst>
                               <p:cond delay="0"/>
                             </p:stCondLst>
                             <p:childTnLst>
                               <p:par>
-                                <p:cTn id="11" presetID="1" presetClass="entr" presetSubtype="0" fill="hold" grpId="0" nodeType="clickEffect">
-                                  <p:stCondLst>
-                                    <p:cond delay="0"/>
-                                  </p:stCondLst>
-                                  <p:childTnLst>
-                                    <p:set>
-                                      <p:cBhvr>
-                                        <p:cTn id="12" dur="1" fill="hold">
-                                          <p:stCondLst>
-                                            <p:cond delay="0"/>
-                                          </p:stCondLst>
-                                        </p:cTn>
-                                        <p:tgtEl>
-                                          <p:spTgt spid="22"/>
-                                        </p:tgtEl>
-                                        <p:attrNameLst>
-                                          <p:attrName>style.visibility</p:attrName>
-                                        </p:attrNameLst>
-                                      </p:cBhvr>
-                                      <p:to>
-                                        <p:strVal val="visible"/>
-                                      </p:to>
-                                    </p:set>
-                                  </p:childTnLst>
-                                </p:cTn>
-                              </p:par>
-                              <p:par>
-                                <p:cTn id="13" presetID="1" presetClass="entr" presetSubtype="0" fill="hold" nodeType="withEffect">
+                                <p:cTn id="13" presetID="1" presetClass="entr" presetSubtype="0" fill="hold" nodeType="clickEffect">
                                   <p:stCondLst>
                                     <p:cond delay="0"/>
                                   </p:stCondLst>
@@ -14425,7 +18053,7 @@
                                           </p:stCondLst>
                                         </p:cTn>
                                         <p:tgtEl>
-                                          <p:spTgt spid="37"/>
+                                          <p:spTgt spid="18"/>
                                         </p:tgtEl>
                                         <p:attrNameLst>
                                           <p:attrName>style.visibility</p:attrName>
@@ -14452,7 +18080,7 @@
                                           </p:stCondLst>
                                         </p:cTn>
                                         <p:tgtEl>
-                                          <p:spTgt spid="11"/>
+                                          <p:spTgt spid="9"/>
                                         </p:tgtEl>
                                         <p:attrNameLst>
                                           <p:attrName>style.visibility</p:attrName>
@@ -14497,7 +18125,7 @@
                                           </p:stCondLst>
                                         </p:cTn>
                                         <p:tgtEl>
-                                          <p:spTgt spid="40"/>
+                                          <p:spTgt spid="37"/>
                                         </p:tgtEl>
                                         <p:attrNameLst>
                                           <p:attrName>style.visibility</p:attrName>
@@ -14510,15 +18138,24 @@
                                   </p:childTnLst>
                                 </p:cTn>
                               </p:par>
+                            </p:childTnLst>
+                          </p:cTn>
+                        </p:par>
+                        <p:par>
+                          <p:cTn id="21" fill="hold">
+                            <p:stCondLst>
+                              <p:cond delay="0"/>
+                            </p:stCondLst>
+                            <p:childTnLst>
                               <p:par>
-                                <p:cTn id="21" presetID="1" presetClass="entr" presetSubtype="0" fill="hold" grpId="0" nodeType="withEffect">
+                                <p:cTn id="22" presetID="1" presetClass="entr" presetSubtype="0" fill="hold" grpId="0" nodeType="afterEffect">
                                   <p:stCondLst>
                                     <p:cond delay="0"/>
                                   </p:stCondLst>
                                   <p:childTnLst>
                                     <p:set>
                                       <p:cBhvr>
-                                        <p:cTn id="22" dur="1" fill="hold">
+                                        <p:cTn id="23" dur="1" fill="hold">
                                           <p:stCondLst>
                                             <p:cond delay="0"/>
                                           </p:stCondLst>
@@ -14544,26 +18181,26 @@
                     </p:cTn>
                   </p:par>
                   <p:par>
-                    <p:cTn id="23" fill="hold">
+                    <p:cTn id="24" fill="hold">
                       <p:stCondLst>
                         <p:cond delay="indefinite"/>
                       </p:stCondLst>
                       <p:childTnLst>
                         <p:par>
-                          <p:cTn id="24" fill="hold">
+                          <p:cTn id="25" fill="hold">
                             <p:stCondLst>
                               <p:cond delay="0"/>
                             </p:stCondLst>
                             <p:childTnLst>
                               <p:par>
-                                <p:cTn id="25" presetID="1" presetClass="entr" presetSubtype="0" fill="hold" grpId="0" nodeType="clickEffect">
+                                <p:cTn id="26" presetID="1" presetClass="entr" presetSubtype="0" fill="hold" grpId="0" nodeType="clickEffect">
                                   <p:stCondLst>
                                     <p:cond delay="0"/>
                                   </p:stCondLst>
                                   <p:childTnLst>
                                     <p:set>
                                       <p:cBhvr>
-                                        <p:cTn id="26" dur="1" fill="hold">
+                                        <p:cTn id="27" dur="1" fill="hold">
                                           <p:stCondLst>
                                             <p:cond delay="0"/>
                                           </p:stCondLst>
@@ -14613,8 +18250,8 @@
       <p:bldP spid="9" grpId="0" animBg="1"/>
       <p:bldP spid="11" grpId="0" animBg="1"/>
       <p:bldP spid="16" grpId="0" animBg="1"/>
-      <p:bldP spid="22" grpId="0"/>
       <p:bldP spid="28" grpId="0" animBg="1"/>
+      <p:bldP spid="7" grpId="0" animBg="1"/>
     </p:bldLst>
   </p:timing>
 </p:sld>
@@ -14651,7 +18288,7 @@
           </p:cNvPicPr>
           <p:nvPr/>
         </p:nvPicPr>
-        <p:blipFill>
+        <p:blipFill rotWithShape="1">
           <a:blip r:embed="rId3">
             <a:extLst>
               <a:ext uri="{28A0092B-C50C-407E-A947-70E740481C1C}">
@@ -14659,14 +18296,13 @@
               </a:ext>
             </a:extLst>
           </a:blip>
-          <a:stretch>
-            <a:fillRect/>
-          </a:stretch>
+          <a:srcRect b="1469"/>
+          <a:stretch/>
         </p:blipFill>
         <p:spPr>
           <a:xfrm>
-            <a:off x="568832" y="2408509"/>
-            <a:ext cx="6352229" cy="2612526"/>
+            <a:off x="578646" y="2408508"/>
+            <a:ext cx="4980578" cy="2763567"/>
           </a:xfrm>
           <a:prstGeom prst="rect">
             <a:avLst/>
@@ -14821,14 +18457,19 @@
             <p:ph type="dt" sz="half" idx="10"/>
           </p:nvPr>
         </p:nvSpPr>
-        <p:spPr/>
+        <p:spPr>
+          <a:xfrm>
+            <a:off x="442912" y="6335518"/>
+            <a:ext cx="2743200" cy="365125"/>
+          </a:xfrm>
+        </p:spPr>
         <p:txBody>
           <a:bodyPr/>
           <a:lstStyle/>
           <a:p>
             <a:r>
               <a:rPr lang="en-DE"/>
-              <a:t>16.06.2025</a:t>
+              <a:t>16.06.2026</a:t>
             </a:r>
           </a:p>
         </p:txBody>
@@ -14849,14 +18490,19 @@
             <p:ph type="ftr" sz="quarter" idx="11"/>
           </p:nvPr>
         </p:nvSpPr>
-        <p:spPr/>
+        <p:spPr>
+          <a:xfrm>
+            <a:off x="4038600" y="6356350"/>
+            <a:ext cx="4114800" cy="365125"/>
+          </a:xfrm>
+        </p:spPr>
         <p:txBody>
           <a:bodyPr/>
           <a:lstStyle/>
           <a:p>
             <a:r>
               <a:rPr lang="en-US"/>
-              <a:t>MAgPIE25 Workshop &amp; Stories </a:t>
+              <a:t>MAgPIE26 Workshop &amp; Stories </a:t>
             </a:r>
             <a:endParaRPr lang="en-DE" dirty="0"/>
           </a:p>
@@ -14878,7 +18524,12 @@
             <p:ph type="sldNum" sz="quarter" idx="12"/>
           </p:nvPr>
         </p:nvSpPr>
-        <p:spPr/>
+        <p:spPr>
+          <a:xfrm>
+            <a:off x="8610600" y="6356350"/>
+            <a:ext cx="2743200" cy="365125"/>
+          </a:xfrm>
+        </p:spPr>
         <p:txBody>
           <a:bodyPr/>
           <a:lstStyle/>
@@ -14999,15 +18650,21 @@
           <p:nvPr/>
         </p:nvPicPr>
         <p:blipFill>
-          <a:blip r:embed="rId5"/>
+          <a:blip r:embed="rId5">
+            <a:extLst>
+              <a:ext uri="{28A0092B-C50C-407E-A947-70E740481C1C}">
+                <a14:useLocalDpi xmlns:a14="http://schemas.microsoft.com/office/drawing/2010/main" val="0"/>
+              </a:ext>
+            </a:extLst>
+          </a:blip>
           <a:stretch>
             <a:fillRect/>
           </a:stretch>
         </p:blipFill>
         <p:spPr>
           <a:xfrm>
-            <a:off x="665292" y="2201950"/>
-            <a:ext cx="5710108" cy="229552"/>
+            <a:off x="673100" y="2123314"/>
+            <a:ext cx="5537200" cy="275607"/>
           </a:xfrm>
           <a:prstGeom prst="rect">
             <a:avLst/>
@@ -15201,14 +18858,19 @@
             <p:ph type="dt" sz="half" idx="10"/>
           </p:nvPr>
         </p:nvSpPr>
-        <p:spPr/>
+        <p:spPr>
+          <a:xfrm>
+            <a:off x="442912" y="6335518"/>
+            <a:ext cx="2743200" cy="365125"/>
+          </a:xfrm>
+        </p:spPr>
         <p:txBody>
           <a:bodyPr/>
           <a:lstStyle/>
           <a:p>
             <a:r>
               <a:rPr lang="en-DE"/>
-              <a:t>16.06.2025</a:t>
+              <a:t>16.06.2026</a:t>
             </a:r>
           </a:p>
         </p:txBody>
@@ -15229,14 +18891,19 @@
             <p:ph type="ftr" sz="quarter" idx="11"/>
           </p:nvPr>
         </p:nvSpPr>
-        <p:spPr/>
+        <p:spPr>
+          <a:xfrm>
+            <a:off x="4038600" y="6356350"/>
+            <a:ext cx="4114800" cy="365125"/>
+          </a:xfrm>
+        </p:spPr>
         <p:txBody>
           <a:bodyPr/>
           <a:lstStyle/>
           <a:p>
             <a:r>
               <a:rPr lang="en-US"/>
-              <a:t>MAgPIE25 Workshop &amp; Stories </a:t>
+              <a:t>MAgPIE26 Workshop &amp; Stories </a:t>
             </a:r>
             <a:endParaRPr lang="en-DE"/>
           </a:p>
@@ -15258,7 +18925,12 @@
             <p:ph type="sldNum" sz="quarter" idx="12"/>
           </p:nvPr>
         </p:nvSpPr>
-        <p:spPr/>
+        <p:spPr>
+          <a:xfrm>
+            <a:off x="8610600" y="6356350"/>
+            <a:ext cx="2743200" cy="365125"/>
+          </a:xfrm>
+        </p:spPr>
         <p:txBody>
           <a:bodyPr/>
           <a:lstStyle/>
@@ -15286,7 +18958,7 @@
           <p:nvPr/>
         </p:nvPicPr>
         <p:blipFill>
-          <a:blip r:embed="rId2">
+          <a:blip r:embed="rId3">
             <a:extLst>
               <a:ext uri="{28A0092B-C50C-407E-A947-70E740481C1C}">
                 <a14:useLocalDpi xmlns:a14="http://schemas.microsoft.com/office/drawing/2010/main" val="0"/>
@@ -16356,15 +20028,249 @@
                                   </p:childTnLst>
                                 </p:cTn>
                               </p:par>
+                            </p:childTnLst>
+                          </p:cTn>
+                        </p:par>
+                      </p:childTnLst>
+                    </p:cTn>
+                  </p:par>
+                  <p:par>
+                    <p:cTn id="15" fill="hold">
+                      <p:stCondLst>
+                        <p:cond delay="indefinite"/>
+                      </p:stCondLst>
+                      <p:childTnLst>
+                        <p:par>
+                          <p:cTn id="16" fill="hold">
+                            <p:stCondLst>
+                              <p:cond delay="0"/>
+                            </p:stCondLst>
+                            <p:childTnLst>
                               <p:par>
-                                <p:cTn id="15" presetID="1" presetClass="entr" presetSubtype="0" fill="hold" grpId="0" nodeType="withEffect">
+                                <p:cTn id="17" presetID="1" presetClass="entr" presetSubtype="0" fill="hold" grpId="0" nodeType="clickEffect">
                                   <p:stCondLst>
                                     <p:cond delay="0"/>
                                   </p:stCondLst>
                                   <p:childTnLst>
                                     <p:set>
                                       <p:cBhvr>
-                                        <p:cTn id="16" dur="1" fill="hold">
+                                        <p:cTn id="18" dur="1" fill="hold">
+                                          <p:stCondLst>
+                                            <p:cond delay="0"/>
+                                          </p:stCondLst>
+                                        </p:cTn>
+                                        <p:tgtEl>
+                                          <p:spTgt spid="13"/>
+                                        </p:tgtEl>
+                                        <p:attrNameLst>
+                                          <p:attrName>style.visibility</p:attrName>
+                                        </p:attrNameLst>
+                                      </p:cBhvr>
+                                      <p:to>
+                                        <p:strVal val="visible"/>
+                                      </p:to>
+                                    </p:set>
+                                  </p:childTnLst>
+                                </p:cTn>
+                              </p:par>
+                              <p:par>
+                                <p:cTn id="19" presetID="1" presetClass="entr" presetSubtype="0" fill="hold" grpId="0" nodeType="withEffect">
+                                  <p:stCondLst>
+                                    <p:cond delay="0"/>
+                                  </p:stCondLst>
+                                  <p:childTnLst>
+                                    <p:set>
+                                      <p:cBhvr>
+                                        <p:cTn id="20" dur="1" fill="hold">
+                                          <p:stCondLst>
+                                            <p:cond delay="0"/>
+                                          </p:stCondLst>
+                                        </p:cTn>
+                                        <p:tgtEl>
+                                          <p:spTgt spid="12"/>
+                                        </p:tgtEl>
+                                        <p:attrNameLst>
+                                          <p:attrName>style.visibility</p:attrName>
+                                        </p:attrNameLst>
+                                      </p:cBhvr>
+                                      <p:to>
+                                        <p:strVal val="visible"/>
+                                      </p:to>
+                                    </p:set>
+                                  </p:childTnLst>
+                                </p:cTn>
+                              </p:par>
+                            </p:childTnLst>
+                          </p:cTn>
+                        </p:par>
+                      </p:childTnLst>
+                    </p:cTn>
+                  </p:par>
+                  <p:par>
+                    <p:cTn id="21" fill="hold">
+                      <p:stCondLst>
+                        <p:cond delay="indefinite"/>
+                      </p:stCondLst>
+                      <p:childTnLst>
+                        <p:par>
+                          <p:cTn id="22" fill="hold">
+                            <p:stCondLst>
+                              <p:cond delay="0"/>
+                            </p:stCondLst>
+                            <p:childTnLst>
+                              <p:par>
+                                <p:cTn id="23" presetID="1" presetClass="entr" presetSubtype="0" fill="hold" grpId="0" nodeType="clickEffect">
+                                  <p:stCondLst>
+                                    <p:cond delay="0"/>
+                                  </p:stCondLst>
+                                  <p:childTnLst>
+                                    <p:set>
+                                      <p:cBhvr>
+                                        <p:cTn id="24" dur="1" fill="hold">
+                                          <p:stCondLst>
+                                            <p:cond delay="0"/>
+                                          </p:stCondLst>
+                                        </p:cTn>
+                                        <p:tgtEl>
+                                          <p:spTgt spid="15"/>
+                                        </p:tgtEl>
+                                        <p:attrNameLst>
+                                          <p:attrName>style.visibility</p:attrName>
+                                        </p:attrNameLst>
+                                      </p:cBhvr>
+                                      <p:to>
+                                        <p:strVal val="visible"/>
+                                      </p:to>
+                                    </p:set>
+                                  </p:childTnLst>
+                                </p:cTn>
+                              </p:par>
+                              <p:par>
+                                <p:cTn id="25" presetID="1" presetClass="entr" presetSubtype="0" fill="hold" grpId="0" nodeType="withEffect">
+                                  <p:stCondLst>
+                                    <p:cond delay="0"/>
+                                  </p:stCondLst>
+                                  <p:childTnLst>
+                                    <p:set>
+                                      <p:cBhvr>
+                                        <p:cTn id="26" dur="1" fill="hold">
+                                          <p:stCondLst>
+                                            <p:cond delay="0"/>
+                                          </p:stCondLst>
+                                        </p:cTn>
+                                        <p:tgtEl>
+                                          <p:spTgt spid="14"/>
+                                        </p:tgtEl>
+                                        <p:attrNameLst>
+                                          <p:attrName>style.visibility</p:attrName>
+                                        </p:attrNameLst>
+                                      </p:cBhvr>
+                                      <p:to>
+                                        <p:strVal val="visible"/>
+                                      </p:to>
+                                    </p:set>
+                                  </p:childTnLst>
+                                </p:cTn>
+                              </p:par>
+                            </p:childTnLst>
+                          </p:cTn>
+                        </p:par>
+                      </p:childTnLst>
+                    </p:cTn>
+                  </p:par>
+                  <p:par>
+                    <p:cTn id="27" fill="hold">
+                      <p:stCondLst>
+                        <p:cond delay="indefinite"/>
+                      </p:stCondLst>
+                      <p:childTnLst>
+                        <p:par>
+                          <p:cTn id="28" fill="hold">
+                            <p:stCondLst>
+                              <p:cond delay="0"/>
+                            </p:stCondLst>
+                            <p:childTnLst>
+                              <p:par>
+                                <p:cTn id="29" presetID="1" presetClass="entr" presetSubtype="0" fill="hold" grpId="0" nodeType="clickEffect">
+                                  <p:stCondLst>
+                                    <p:cond delay="0"/>
+                                  </p:stCondLst>
+                                  <p:childTnLst>
+                                    <p:set>
+                                      <p:cBhvr>
+                                        <p:cTn id="30" dur="1" fill="hold">
+                                          <p:stCondLst>
+                                            <p:cond delay="0"/>
+                                          </p:stCondLst>
+                                        </p:cTn>
+                                        <p:tgtEl>
+                                          <p:spTgt spid="19"/>
+                                        </p:tgtEl>
+                                        <p:attrNameLst>
+                                          <p:attrName>style.visibility</p:attrName>
+                                        </p:attrNameLst>
+                                      </p:cBhvr>
+                                      <p:to>
+                                        <p:strVal val="visible"/>
+                                      </p:to>
+                                    </p:set>
+                                  </p:childTnLst>
+                                </p:cTn>
+                              </p:par>
+                              <p:par>
+                                <p:cTn id="31" presetID="1" presetClass="entr" presetSubtype="0" fill="hold" grpId="0" nodeType="withEffect">
+                                  <p:stCondLst>
+                                    <p:cond delay="0"/>
+                                  </p:stCondLst>
+                                  <p:childTnLst>
+                                    <p:set>
+                                      <p:cBhvr>
+                                        <p:cTn id="32" dur="1" fill="hold">
+                                          <p:stCondLst>
+                                            <p:cond delay="0"/>
+                                          </p:stCondLst>
+                                        </p:cTn>
+                                        <p:tgtEl>
+                                          <p:spTgt spid="18"/>
+                                        </p:tgtEl>
+                                        <p:attrNameLst>
+                                          <p:attrName>style.visibility</p:attrName>
+                                        </p:attrNameLst>
+                                      </p:cBhvr>
+                                      <p:to>
+                                        <p:strVal val="visible"/>
+                                      </p:to>
+                                    </p:set>
+                                  </p:childTnLst>
+                                </p:cTn>
+                              </p:par>
+                            </p:childTnLst>
+                          </p:cTn>
+                        </p:par>
+                      </p:childTnLst>
+                    </p:cTn>
+                  </p:par>
+                  <p:par>
+                    <p:cTn id="33" fill="hold">
+                      <p:stCondLst>
+                        <p:cond delay="indefinite"/>
+                      </p:stCondLst>
+                      <p:childTnLst>
+                        <p:par>
+                          <p:cTn id="34" fill="hold">
+                            <p:stCondLst>
+                              <p:cond delay="0"/>
+                            </p:stCondLst>
+                            <p:childTnLst>
+                              <p:par>
+                                <p:cTn id="35" presetID="1" presetClass="entr" presetSubtype="0" fill="hold" grpId="0" nodeType="clickEffect">
+                                  <p:stCondLst>
+                                    <p:cond delay="0"/>
+                                  </p:stCondLst>
+                                  <p:childTnLst>
+                                    <p:set>
+                                      <p:cBhvr>
+                                        <p:cTn id="36" dur="1" fill="hold">
                                           <p:stCondLst>
                                             <p:cond delay="0"/>
                                           </p:stCondLst>
@@ -16390,242 +20296,26 @@
                     </p:cTn>
                   </p:par>
                   <p:par>
-                    <p:cTn id="17" fill="hold">
+                    <p:cTn id="37" fill="hold">
                       <p:stCondLst>
                         <p:cond delay="indefinite"/>
                       </p:stCondLst>
                       <p:childTnLst>
                         <p:par>
-                          <p:cTn id="18" fill="hold">
+                          <p:cTn id="38" fill="hold">
                             <p:stCondLst>
                               <p:cond delay="0"/>
                             </p:stCondLst>
                             <p:childTnLst>
                               <p:par>
-                                <p:cTn id="19" presetID="1" presetClass="entr" presetSubtype="0" fill="hold" grpId="0" nodeType="clickEffect">
+                                <p:cTn id="39" presetID="1" presetClass="entr" presetSubtype="0" fill="hold" grpId="0" nodeType="clickEffect">
                                   <p:stCondLst>
                                     <p:cond delay="0"/>
                                   </p:stCondLst>
                                   <p:childTnLst>
                                     <p:set>
                                       <p:cBhvr>
-                                        <p:cTn id="20" dur="1" fill="hold">
-                                          <p:stCondLst>
-                                            <p:cond delay="0"/>
-                                          </p:stCondLst>
-                                        </p:cTn>
-                                        <p:tgtEl>
-                                          <p:spTgt spid="13"/>
-                                        </p:tgtEl>
-                                        <p:attrNameLst>
-                                          <p:attrName>style.visibility</p:attrName>
-                                        </p:attrNameLst>
-                                      </p:cBhvr>
-                                      <p:to>
-                                        <p:strVal val="visible"/>
-                                      </p:to>
-                                    </p:set>
-                                  </p:childTnLst>
-                                </p:cTn>
-                              </p:par>
-                              <p:par>
-                                <p:cTn id="21" presetID="1" presetClass="entr" presetSubtype="0" fill="hold" grpId="0" nodeType="withEffect">
-                                  <p:stCondLst>
-                                    <p:cond delay="0"/>
-                                  </p:stCondLst>
-                                  <p:childTnLst>
-                                    <p:set>
-                                      <p:cBhvr>
-                                        <p:cTn id="22" dur="1" fill="hold">
-                                          <p:stCondLst>
-                                            <p:cond delay="0"/>
-                                          </p:stCondLst>
-                                        </p:cTn>
-                                        <p:tgtEl>
-                                          <p:spTgt spid="12"/>
-                                        </p:tgtEl>
-                                        <p:attrNameLst>
-                                          <p:attrName>style.visibility</p:attrName>
-                                        </p:attrNameLst>
-                                      </p:cBhvr>
-                                      <p:to>
-                                        <p:strVal val="visible"/>
-                                      </p:to>
-                                    </p:set>
-                                  </p:childTnLst>
-                                </p:cTn>
-                              </p:par>
-                            </p:childTnLst>
-                          </p:cTn>
-                        </p:par>
-                      </p:childTnLst>
-                    </p:cTn>
-                  </p:par>
-                  <p:par>
-                    <p:cTn id="23" fill="hold">
-                      <p:stCondLst>
-                        <p:cond delay="indefinite"/>
-                      </p:stCondLst>
-                      <p:childTnLst>
-                        <p:par>
-                          <p:cTn id="24" fill="hold">
-                            <p:stCondLst>
-                              <p:cond delay="0"/>
-                            </p:stCondLst>
-                            <p:childTnLst>
-                              <p:par>
-                                <p:cTn id="25" presetID="1" presetClass="entr" presetSubtype="0" fill="hold" grpId="0" nodeType="clickEffect">
-                                  <p:stCondLst>
-                                    <p:cond delay="0"/>
-                                  </p:stCondLst>
-                                  <p:childTnLst>
-                                    <p:set>
-                                      <p:cBhvr>
-                                        <p:cTn id="26" dur="1" fill="hold">
-                                          <p:stCondLst>
-                                            <p:cond delay="0"/>
-                                          </p:stCondLst>
-                                        </p:cTn>
-                                        <p:tgtEl>
-                                          <p:spTgt spid="15"/>
-                                        </p:tgtEl>
-                                        <p:attrNameLst>
-                                          <p:attrName>style.visibility</p:attrName>
-                                        </p:attrNameLst>
-                                      </p:cBhvr>
-                                      <p:to>
-                                        <p:strVal val="visible"/>
-                                      </p:to>
-                                    </p:set>
-                                  </p:childTnLst>
-                                </p:cTn>
-                              </p:par>
-                              <p:par>
-                                <p:cTn id="27" presetID="1" presetClass="entr" presetSubtype="0" fill="hold" grpId="0" nodeType="withEffect">
-                                  <p:stCondLst>
-                                    <p:cond delay="0"/>
-                                  </p:stCondLst>
-                                  <p:childTnLst>
-                                    <p:set>
-                                      <p:cBhvr>
-                                        <p:cTn id="28" dur="1" fill="hold">
-                                          <p:stCondLst>
-                                            <p:cond delay="0"/>
-                                          </p:stCondLst>
-                                        </p:cTn>
-                                        <p:tgtEl>
-                                          <p:spTgt spid="14"/>
-                                        </p:tgtEl>
-                                        <p:attrNameLst>
-                                          <p:attrName>style.visibility</p:attrName>
-                                        </p:attrNameLst>
-                                      </p:cBhvr>
-                                      <p:to>
-                                        <p:strVal val="visible"/>
-                                      </p:to>
-                                    </p:set>
-                                  </p:childTnLst>
-                                </p:cTn>
-                              </p:par>
-                            </p:childTnLst>
-                          </p:cTn>
-                        </p:par>
-                      </p:childTnLst>
-                    </p:cTn>
-                  </p:par>
-                  <p:par>
-                    <p:cTn id="29" fill="hold">
-                      <p:stCondLst>
-                        <p:cond delay="indefinite"/>
-                      </p:stCondLst>
-                      <p:childTnLst>
-                        <p:par>
-                          <p:cTn id="30" fill="hold">
-                            <p:stCondLst>
-                              <p:cond delay="0"/>
-                            </p:stCondLst>
-                            <p:childTnLst>
-                              <p:par>
-                                <p:cTn id="31" presetID="1" presetClass="entr" presetSubtype="0" fill="hold" grpId="0" nodeType="clickEffect">
-                                  <p:stCondLst>
-                                    <p:cond delay="0"/>
-                                  </p:stCondLst>
-                                  <p:childTnLst>
-                                    <p:set>
-                                      <p:cBhvr>
-                                        <p:cTn id="32" dur="1" fill="hold">
-                                          <p:stCondLst>
-                                            <p:cond delay="0"/>
-                                          </p:stCondLst>
-                                        </p:cTn>
-                                        <p:tgtEl>
-                                          <p:spTgt spid="19"/>
-                                        </p:tgtEl>
-                                        <p:attrNameLst>
-                                          <p:attrName>style.visibility</p:attrName>
-                                        </p:attrNameLst>
-                                      </p:cBhvr>
-                                      <p:to>
-                                        <p:strVal val="visible"/>
-                                      </p:to>
-                                    </p:set>
-                                  </p:childTnLst>
-                                </p:cTn>
-                              </p:par>
-                              <p:par>
-                                <p:cTn id="33" presetID="1" presetClass="entr" presetSubtype="0" fill="hold" grpId="0" nodeType="withEffect">
-                                  <p:stCondLst>
-                                    <p:cond delay="0"/>
-                                  </p:stCondLst>
-                                  <p:childTnLst>
-                                    <p:set>
-                                      <p:cBhvr>
-                                        <p:cTn id="34" dur="1" fill="hold">
-                                          <p:stCondLst>
-                                            <p:cond delay="0"/>
-                                          </p:stCondLst>
-                                        </p:cTn>
-                                        <p:tgtEl>
-                                          <p:spTgt spid="18"/>
-                                        </p:tgtEl>
-                                        <p:attrNameLst>
-                                          <p:attrName>style.visibility</p:attrName>
-                                        </p:attrNameLst>
-                                      </p:cBhvr>
-                                      <p:to>
-                                        <p:strVal val="visible"/>
-                                      </p:to>
-                                    </p:set>
-                                  </p:childTnLst>
-                                </p:cTn>
-                              </p:par>
-                            </p:childTnLst>
-                          </p:cTn>
-                        </p:par>
-                      </p:childTnLst>
-                    </p:cTn>
-                  </p:par>
-                  <p:par>
-                    <p:cTn id="35" fill="hold">
-                      <p:stCondLst>
-                        <p:cond delay="indefinite"/>
-                      </p:stCondLst>
-                      <p:childTnLst>
-                        <p:par>
-                          <p:cTn id="36" fill="hold">
-                            <p:stCondLst>
-                              <p:cond delay="0"/>
-                            </p:stCondLst>
-                            <p:childTnLst>
-                              <p:par>
-                                <p:cTn id="37" presetID="1" presetClass="entr" presetSubtype="0" fill="hold" grpId="0" nodeType="clickEffect">
-                                  <p:stCondLst>
-                                    <p:cond delay="0"/>
-                                  </p:stCondLst>
-                                  <p:childTnLst>
-                                    <p:set>
-                                      <p:cBhvr>
-                                        <p:cTn id="38" dur="1" fill="hold">
+                                        <p:cTn id="40" dur="1" fill="hold">
                                           <p:stCondLst>
                                             <p:cond delay="0"/>
                                           </p:stCondLst>
@@ -17277,14 +20967,19 @@
             <p:ph type="dt" sz="half" idx="10"/>
           </p:nvPr>
         </p:nvSpPr>
-        <p:spPr/>
+        <p:spPr>
+          <a:xfrm>
+            <a:off x="442912" y="6335518"/>
+            <a:ext cx="2743200" cy="365125"/>
+          </a:xfrm>
+        </p:spPr>
         <p:txBody>
           <a:bodyPr/>
           <a:lstStyle/>
           <a:p>
             <a:r>
               <a:rPr lang="en-DE"/>
-              <a:t>16.06.2025</a:t>
+              <a:t>16.06.2026</a:t>
             </a:r>
           </a:p>
         </p:txBody>
@@ -17305,14 +21000,19 @@
             <p:ph type="ftr" sz="quarter" idx="11"/>
           </p:nvPr>
         </p:nvSpPr>
-        <p:spPr/>
+        <p:spPr>
+          <a:xfrm>
+            <a:off x="4038600" y="6356350"/>
+            <a:ext cx="4114800" cy="365125"/>
+          </a:xfrm>
+        </p:spPr>
         <p:txBody>
           <a:bodyPr/>
           <a:lstStyle/>
           <a:p>
             <a:r>
               <a:rPr lang="en-US"/>
-              <a:t>MAgPIE25 Workshop &amp; Stories </a:t>
+              <a:t>MAgPIE26 Workshop &amp; Stories </a:t>
             </a:r>
             <a:endParaRPr lang="en-DE"/>
           </a:p>
@@ -17334,7 +21034,12 @@
             <p:ph type="sldNum" sz="quarter" idx="12"/>
           </p:nvPr>
         </p:nvSpPr>
-        <p:spPr/>
+        <p:spPr>
+          <a:xfrm>
+            <a:off x="8610600" y="6356350"/>
+            <a:ext cx="2743200" cy="365125"/>
+          </a:xfrm>
+        </p:spPr>
         <p:txBody>
           <a:bodyPr/>
           <a:lstStyle/>
@@ -17362,7 +21067,7 @@
           <p:nvPr/>
         </p:nvPicPr>
         <p:blipFill>
-          <a:blip r:embed="rId2"/>
+          <a:blip r:embed="rId3"/>
           <a:stretch>
             <a:fillRect/>
           </a:stretch>
@@ -17402,7 +21107,7 @@
           <p:nvPr/>
         </p:nvPicPr>
         <p:blipFill>
-          <a:blip r:embed="rId3"/>
+          <a:blip r:embed="rId4"/>
           <a:stretch>
             <a:fillRect/>
           </a:stretch>
@@ -17442,7 +21147,7 @@
           <p:nvPr/>
         </p:nvPicPr>
         <p:blipFill>
-          <a:blip r:embed="rId4"/>
+          <a:blip r:embed="rId5"/>
           <a:stretch>
             <a:fillRect/>
           </a:stretch>
@@ -17482,7 +21187,7 @@
           <p:nvPr/>
         </p:nvPicPr>
         <p:blipFill>
-          <a:blip r:embed="rId5"/>
+          <a:blip r:embed="rId6"/>
           <a:stretch>
             <a:fillRect/>
           </a:stretch>
@@ -17522,7 +21227,7 @@
           <p:nvPr/>
         </p:nvPicPr>
         <p:blipFill>
-          <a:blip r:embed="rId6"/>
+          <a:blip r:embed="rId7"/>
           <a:stretch>
             <a:fillRect/>
           </a:stretch>
@@ -17562,7 +21267,7 @@
           <p:nvPr/>
         </p:nvPicPr>
         <p:blipFill>
-          <a:blip r:embed="rId7"/>
+          <a:blip r:embed="rId8"/>
           <a:stretch>
             <a:fillRect/>
           </a:stretch>
@@ -18199,7 +21904,7 @@
 <file path=ppt/theme/theme1.xml><?xml version="1.0" encoding="utf-8"?>
 <a:theme xmlns:a="http://schemas.openxmlformats.org/drawingml/2006/main" name="Office Theme">
   <a:themeElements>
-    <a:clrScheme name="Yellow">
+    <a:clrScheme name="Blue II">
       <a:dk1>
         <a:sysClr val="windowText" lastClr="000000"/>
       </a:dk1>
@@ -18207,34 +21912,34 @@
         <a:sysClr val="window" lastClr="FFFFFF"/>
       </a:lt1>
       <a:dk2>
-        <a:srgbClr val="39302A"/>
+        <a:srgbClr val="335B74"/>
       </a:dk2>
       <a:lt2>
-        <a:srgbClr val="E5DEDB"/>
+        <a:srgbClr val="DFE3E5"/>
       </a:lt2>
       <a:accent1>
-        <a:srgbClr val="FFCA08"/>
+        <a:srgbClr val="1CADE4"/>
       </a:accent1>
       <a:accent2>
-        <a:srgbClr val="F8931D"/>
+        <a:srgbClr val="2683C6"/>
       </a:accent2>
       <a:accent3>
-        <a:srgbClr val="CE8D3E"/>
+        <a:srgbClr val="27CED7"/>
       </a:accent3>
       <a:accent4>
-        <a:srgbClr val="EC7016"/>
+        <a:srgbClr val="42BA97"/>
       </a:accent4>
       <a:accent5>
-        <a:srgbClr val="E64823"/>
+        <a:srgbClr val="3E8853"/>
       </a:accent5>
       <a:accent6>
-        <a:srgbClr val="9C6A6A"/>
+        <a:srgbClr val="62A39F"/>
       </a:accent6>
       <a:hlink>
-        <a:srgbClr val="2998E3"/>
+        <a:srgbClr val="6EAC1C"/>
       </a:hlink>
       <a:folHlink>
-        <a:srgbClr val="7F723D"/>
+        <a:srgbClr val="B26B02"/>
       </a:folHlink>
     </a:clrScheme>
     <a:fontScheme name="Office">
